--- a/docs/report/Slide_WAF_Log_Analyzer.pptx
+++ b/docs/report/Slide_WAF_Log_Analyzer.pptx
@@ -15,7 +15,10 @@
     <p:sldId id="263" r:id="rId9"/>
     <p:sldId id="264" r:id="rId10"/>
     <p:sldId id="265" r:id="rId11"/>
+    <p:sldId id="277" r:id="rId28"/>
     <p:sldId id="266" r:id="rId12"/>
+    <p:sldId id="278" r:id="rId29"/>
+    <p:sldId id="279" r:id="rId30"/>
     <p:sldId id="267" r:id="rId13"/>
     <p:sldId id="268" r:id="rId14"/>
     <p:sldId id="269" r:id="rId15"/>
@@ -3172,9 +3175,9 @@
                 <a:solidFill>
                   <a:schemeClr val="bg1"/>
                 </a:solidFill>
-                <a:latin typeface="Cambria" pitchFamily="34" charset="0"/>
-                <a:ea typeface="Cambria" pitchFamily="34" charset="-122"/>
-                <a:cs typeface="Cambria" pitchFamily="34" charset="-120"/>
+                <a:latin typeface="Arial" pitchFamily="34" charset="0"/>
+                <a:ea typeface="Arial" pitchFamily="34" charset="-122"/>
+                <a:cs typeface="Arial" pitchFamily="34" charset="-120"/>
               </a:defRPr>
             </a:lvl1pPr>
           </a:lstStyle>
@@ -3285,9 +3288,9 @@
                 <a:solidFill>
                   <a:schemeClr val="tx1"/>
                 </a:solidFill>
-                <a:latin typeface="Cambria" pitchFamily="34" charset="0"/>
-                <a:ea typeface="Cambria" pitchFamily="34" charset="-122"/>
-                <a:cs typeface="Cambria" pitchFamily="34" charset="-120"/>
+                <a:latin typeface="Arial" pitchFamily="34" charset="0"/>
+                <a:ea typeface="Arial" pitchFamily="34" charset="-122"/>
+                <a:cs typeface="Arial" pitchFamily="34" charset="-120"/>
               </a:defRPr>
             </a:lvl1pPr>
           </a:lstStyle>
@@ -3329,7 +3332,7 @@
                   <a:srgbClr val="94A3B8"/>
                 </a:solidFill>
               </a:rPr>
-              <a:t>IT6027 · WAF Log Analyzer</a:t>
+              <a:t>IT6027 - WAF Log Analyzer</a:t>
             </a:r>
             <a:endParaRPr lang="en-US" sz="900" dirty="0"/>
           </a:p>
@@ -3729,30 +3732,6 @@
           <a:chExt cx="0" cy="0"/>
         </a:xfrm>
       </p:grpSpPr>
-      <p:pic>
-        <p:nvPicPr>
-          <p:cNvPr id="2" name="Image 0" descr="preencoded.png">    </p:cNvPr>
-          <p:cNvPicPr>
-            <a:picLocks noChangeAspect="1"/>
-          </p:cNvPicPr>
-          <p:nvPr/>
-        </p:nvPicPr>
-        <p:blipFill>
-          <a:blip r:embed="rId1"/>
-          <a:stretch>
-            <a:fillRect/>
-          </a:stretch>
-        </p:blipFill>
-        <p:spPr>
-          <a:xfrm>
-            <a:off x="548640" y="685800"/>
-            <a:ext cx="685800" cy="685800"/>
-          </a:xfrm>
-          <a:prstGeom prst="rect">
-            <a:avLst/>
-          </a:prstGeom>
-        </p:spPr>
-      </p:pic>
       <p:sp>
         <p:nvSpPr>
           <p:cNvPr id="3" name="Text 0"/>
@@ -3763,7 +3742,7 @@
         </p:nvSpPr>
         <p:spPr>
           <a:xfrm>
-            <a:off x="548640" y="1463040"/>
+            <a:off x="548640" y="822960"/>
             <a:ext cx="8046720" cy="1371600"/>
           </a:xfrm>
           <a:prstGeom prst="rect">
@@ -3784,9 +3763,9 @@
                 <a:solidFill>
                   <a:schemeClr val="bg1"/>
                 </a:solidFill>
-                <a:latin typeface="Cambria" pitchFamily="34" charset="0"/>
-                <a:ea typeface="Cambria" pitchFamily="34" charset="-122"/>
-                <a:cs typeface="Cambria" pitchFamily="34" charset="-120"/>
+                <a:latin typeface="Arial" pitchFamily="34" charset="0"/>
+                <a:ea typeface="Arial" pitchFamily="34" charset="-122"/>
+                <a:cs typeface="Arial" pitchFamily="34" charset="-120"/>
               </a:rPr>
               <a:t>Hệ thống giám sát và phát hiện tấn công web từ access log</a:t>
             </a:r>
@@ -3804,8 +3783,8 @@
         </p:nvSpPr>
         <p:spPr>
           <a:xfrm>
-            <a:off x="548640" y="2971800"/>
-            <a:ext cx="8046720" cy="1097280"/>
+            <a:off x="548640" y="2286000"/>
+            <a:ext cx="8046720" cy="1005840"/>
           </a:xfrm>
           <a:prstGeom prst="rect">
             <a:avLst/>
@@ -3818,17 +3797,54 @@
           <a:lstStyle/>
           <a:p>
             <a:pPr algn="l" indent="0" marL="0">
+              <a:spcBef>
+                <a:spcPts val="300"/>
+              </a:spcBef>
               <a:buNone/>
             </a:pPr>
             <a:r>
-              <a:rPr lang="en-US" sz="1600" dirty="0">
+              <a:rPr lang="vi-VN" sz="1600" dirty="0">
                 <a:solidFill>
                   <a:srgbClr val="CBD5E1"/>
                 </a:solidFill>
+                <a:latin typeface="Arial"/>
               </a:rPr>
-              <a:t>WAF Log Analyzer · Báo cáo bài tập lớn học phần IT6027</a:t>
-            </a:r>
-            <a:endParaRPr lang="en-US" sz="1600" dirty="0"/>
+              <a:t>WAF Log Analyzer</a:t>
+            </a:r>
+          </a:p>
+          <a:p>
+            <a:pPr algn="l" indent="0" marL="0">
+              <a:spcBef>
+                <a:spcPts val="300"/>
+              </a:spcBef>
+              <a:buNone/>
+            </a:pPr>
+            <a:r>
+              <a:rPr lang="vi-VN" sz="1600" dirty="0">
+                <a:solidFill>
+                  <a:srgbClr val="CBD5E1"/>
+                </a:solidFill>
+                <a:latin typeface="Arial"/>
+              </a:rPr>
+              <a:t>Báo cáo bài tập lớn môn Chính sách và Quản trị An ninh mạng (IT6027)</a:t>
+            </a:r>
+          </a:p>
+          <a:p>
+            <a:pPr algn="l" indent="0" marL="0">
+              <a:spcBef>
+                <a:spcPts val="300"/>
+              </a:spcBef>
+              <a:buNone/>
+            </a:pPr>
+            <a:r>
+              <a:rPr lang="vi-VN" sz="1600" dirty="0">
+                <a:solidFill>
+                  <a:srgbClr val="CBD5E1"/>
+                </a:solidFill>
+                <a:latin typeface="Arial"/>
+              </a:rPr>
+              <a:t>Đại học Bách Khoa Hà Nội, tháng 10/2026</a:t>
+            </a:r>
           </a:p>
         </p:txBody>
       </p:sp>
@@ -3840,8 +3856,8 @@
         </p:nvSpPr>
         <p:spPr>
           <a:xfrm>
-            <a:off x="548640" y="4343400"/>
-            <a:ext cx="8046720" cy="320040"/>
+            <a:off x="548640" y="3611880"/>
+            <a:ext cx="8046720" cy="1188720"/>
           </a:xfrm>
           <a:prstGeom prst="rect">
             <a:avLst/>
@@ -3853,18 +3869,38 @@
           <a:bodyPr wrap="square" lIns="0" tIns="0" rIns="0" bIns="0" rtlCol="0" anchor="t"/>
           <a:lstStyle/>
           <a:p>
-            <a:pPr indent="0" marL="0">
+            <a:pPr algn="l" indent="0" marL="0">
+              <a:spcBef>
+                <a:spcPts val="300"/>
+              </a:spcBef>
               <a:buNone/>
             </a:pPr>
             <a:r>
-              <a:rPr lang="en-US" sz="1200" dirty="0">
+              <a:rPr lang="vi-VN" sz="1300" dirty="0">
                 <a:solidFill>
                   <a:srgbClr val="94A3B8"/>
                 </a:solidFill>
+                <a:latin typeface="Arial"/>
               </a:rPr>
-              <a:t>Nhóm thực hiện: ………………………  ·  GVHD: ………………………</a:t>
-            </a:r>
-            <a:endParaRPr lang="en-US" sz="1200" dirty="0"/>
+              <a:t>Giảng viên hướng dẫn: TS. Nguyễn Đức Toàn, TS. Lê Xuân Thành</a:t>
+            </a:r>
+          </a:p>
+          <a:p>
+            <a:pPr algn="l" indent="0" marL="0">
+              <a:spcBef>
+                <a:spcPts val="300"/>
+              </a:spcBef>
+              <a:buNone/>
+            </a:pPr>
+            <a:r>
+              <a:rPr lang="vi-VN" sz="1300" dirty="0">
+                <a:solidFill>
+                  <a:srgbClr val="94A3B8"/>
+                </a:solidFill>
+                <a:latin typeface="Arial"/>
+              </a:rPr>
+              <a:t>Sinh viên: Trần Bá Đạt (20252129M), Nguyễn Thị Phương Liên (20252130M), Ngô Hoàng Xuân Hải (20252042M)</a:t>
+            </a:r>
           </a:p>
         </p:txBody>
       </p:sp>
@@ -3924,11 +3960,11 @@
                 <a:solidFill>
                   <a:schemeClr val="tx1"/>
                 </a:solidFill>
-                <a:latin typeface="Cambria" pitchFamily="34" charset="0"/>
-                <a:ea typeface="Cambria" pitchFamily="34" charset="-122"/>
-                <a:cs typeface="Cambria" pitchFamily="34" charset="-120"/>
+                <a:latin typeface="Arial" pitchFamily="34" charset="0"/>
+                <a:ea typeface="Arial" pitchFamily="34" charset="-122"/>
+                <a:cs typeface="Arial" pitchFamily="34" charset="-120"/>
               </a:rPr>
-              <a:t>Phân rã use case: quản lý rule và phát hiện tấn công</a:t>
+              <a:t>Phân rã UC03: quản lý rule phát hiện</a:t>
             </a:r>
             <a:endParaRPr lang="en-US" sz="2600" dirty="0"/>
           </a:p>
@@ -3950,32 +3986,8 @@
         </p:blipFill>
         <p:spPr>
           <a:xfrm>
-            <a:off x="365760" y="1589512"/>
-            <a:ext cx="4114800" cy="1941616"/>
-          </a:xfrm>
-          <a:prstGeom prst="rect">
-            <a:avLst/>
-          </a:prstGeom>
-        </p:spPr>
-      </p:pic>
-      <p:pic>
-        <p:nvPicPr>
-          <p:cNvPr id="4" name="Phân rã UC05" descr="Phân rã UC05">    </p:cNvPr>
-          <p:cNvPicPr>
-            <a:picLocks noChangeAspect="1"/>
-          </p:cNvPicPr>
-          <p:nvPr/>
-        </p:nvPicPr>
-        <p:blipFill>
-          <a:blip r:embed="rId2"/>
-          <a:stretch>
-            <a:fillRect/>
-          </a:stretch>
-        </p:blipFill>
-        <p:spPr>
-          <a:xfrm>
-            <a:off x="4663440" y="1368083"/>
-            <a:ext cx="4114800" cy="2384474"/>
+            <a:off x="1388531" y="900000"/>
+            <a:ext cx="6366938" cy="3430000"/>
           </a:xfrm>
           <a:prstGeom prst="rect">
             <a:avLst/>
@@ -3990,8 +4002,8 @@
         </p:nvSpPr>
         <p:spPr>
           <a:xfrm>
-            <a:off x="365760" y="4251960"/>
-            <a:ext cx="4114800" cy="365760"/>
+            <a:off x="457200" y="4390000"/>
+            <a:ext cx="8229600" cy="330000"/>
           </a:xfrm>
           <a:prstGeom prst="rect">
             <a:avLst/>
@@ -4007,48 +4019,12 @@
               <a:buNone/>
             </a:pPr>
             <a:r>
-              <a:rPr lang="en-US" sz="1200" dirty="0">
+              <a:rPr lang="en-US" sz="1300" dirty="0">
                 <a:solidFill>
                   <a:schemeClr val="tx2"/>
                 </a:solidFill>
               </a:rPr>
-              <a:t>UC03 – CRUD rule, validate RE2, phát snapshot rules.changed</a:t>
-            </a:r>
-            <a:endParaRPr lang="en-US" sz="1200" dirty="0"/>
-          </a:p>
-        </p:txBody>
-      </p:sp>
-      <p:sp>
-        <p:nvSpPr>
-          <p:cNvPr id="6" name="Text 2"/>
-          <p:cNvSpPr txBox="1"/>
-          <p:nvPr/>
-        </p:nvSpPr>
-        <p:spPr>
-          <a:xfrm>
-            <a:off x="4663440" y="4251960"/>
-            <a:ext cx="4114800" cy="365760"/>
-          </a:xfrm>
-          <a:prstGeom prst="rect">
-            <a:avLst/>
-          </a:prstGeom>
-          <a:noFill/>
-          <a:ln/>
-        </p:spPr>
-        <p:txBody>
-          <a:bodyPr wrap="square" lIns="0" tIns="0" rIns="0" bIns="0" rtlCol="0" anchor="t"/>
-          <a:lstStyle/>
-          <a:p>
-            <a:pPr algn="ctr" indent="0" marL="0">
-              <a:buNone/>
-            </a:pPr>
-            <a:r>
-              <a:rPr lang="en-US" sz="1200" dirty="0">
-                <a:solidFill>
-                  <a:schemeClr val="tx2"/>
-                </a:solidFill>
-              </a:rPr>
-              <a:t>UC05 – 5 nhóm phát hiện, chấm điểm hành vi, DDoS (extend)</a:t>
+              <a:t>UC03 - CRUD rule, kiểm tra RE2, chạy thử rule trên request mẫu, phát snapshot rules.changed</a:t>
             </a:r>
             <a:endParaRPr lang="en-US" sz="1200" dirty="0"/>
           </a:p>
@@ -4155,11 +4131,11 @@
                 <a:solidFill>
                   <a:schemeClr val="tx1"/>
                 </a:solidFill>
-                <a:latin typeface="Cambria" pitchFamily="34" charset="0"/>
-                <a:ea typeface="Cambria" pitchFamily="34" charset="-122"/>
-                <a:cs typeface="Cambria" pitchFamily="34" charset="-120"/>
+                <a:latin typeface="Arial" pitchFamily="34" charset="0"/>
+                <a:ea typeface="Arial" pitchFamily="34" charset="-122"/>
+                <a:cs typeface="Arial" pitchFamily="34" charset="-120"/>
               </a:rPr>
-              <a:t>Phân rã use case: thu thập log, phạm vi và giám sát</a:t>
+              <a:t>Phân rã UC04: thu thập và chuẩn hoá log</a:t>
             </a:r>
             <a:endParaRPr lang="en-US" sz="2600" dirty="0"/>
           </a:p>
@@ -4181,56 +4157,8 @@
         </p:blipFill>
         <p:spPr>
           <a:xfrm>
-            <a:off x="274320" y="1624206"/>
-            <a:ext cx="3108960" cy="1780789"/>
-          </a:xfrm>
-          <a:prstGeom prst="rect">
-            <a:avLst/>
-          </a:prstGeom>
-        </p:spPr>
-      </p:pic>
-      <p:pic>
-        <p:nvPicPr>
-          <p:cNvPr id="4" name="Phân rã UC02" descr="Phân rã UC02">    </p:cNvPr>
-          <p:cNvPicPr>
-            <a:picLocks noChangeAspect="1"/>
-          </p:cNvPicPr>
-          <p:nvPr/>
-        </p:nvPicPr>
-        <p:blipFill>
-          <a:blip r:embed="rId2"/>
-          <a:stretch>
-            <a:fillRect/>
-          </a:stretch>
-        </p:blipFill>
-        <p:spPr>
-          <a:xfrm>
-            <a:off x="3474720" y="1992649"/>
-            <a:ext cx="2377440" cy="1043901"/>
-          </a:xfrm>
-          <a:prstGeom prst="rect">
-            <a:avLst/>
-          </a:prstGeom>
-        </p:spPr>
-      </p:pic>
-      <p:pic>
-        <p:nvPicPr>
-          <p:cNvPr id="5" name="Phân rã UC07-08" descr="Phân rã UC07-08">    </p:cNvPr>
-          <p:cNvPicPr>
-            <a:picLocks noChangeAspect="1"/>
-          </p:cNvPicPr>
-          <p:nvPr/>
-        </p:nvPicPr>
-        <p:blipFill>
-          <a:blip r:embed="rId3"/>
-          <a:stretch>
-            <a:fillRect/>
-          </a:stretch>
-        </p:blipFill>
-        <p:spPr>
-          <a:xfrm>
-            <a:off x="5943600" y="1906351"/>
-            <a:ext cx="2926080" cy="1216498"/>
+            <a:off x="1577896" y="900000"/>
+            <a:ext cx="5988208" cy="3430000"/>
           </a:xfrm>
           <a:prstGeom prst="rect">
             <a:avLst/>
@@ -4245,8 +4173,8 @@
         </p:nvSpPr>
         <p:spPr>
           <a:xfrm>
-            <a:off x="274320" y="4206240"/>
-            <a:ext cx="3108960" cy="365760"/>
+            <a:off x="457200" y="4390000"/>
+            <a:ext cx="8229600" cy="330000"/>
           </a:xfrm>
           <a:prstGeom prst="rect">
             <a:avLst/>
@@ -4262,84 +4190,12 @@
               <a:buNone/>
             </a:pPr>
             <a:r>
-              <a:rPr lang="en-US" sz="1200" dirty="0">
+              <a:rPr lang="en-US" sz="1300" dirty="0">
                 <a:solidFill>
                   <a:schemeClr val="tx2"/>
                 </a:solidFill>
               </a:rPr>
-              <a:t>UC04 – Thu thập &amp; chuẩn hoá</a:t>
-            </a:r>
-            <a:endParaRPr lang="en-US" sz="1200" dirty="0"/>
-          </a:p>
-        </p:txBody>
-      </p:sp>
-      <p:sp>
-        <p:nvSpPr>
-          <p:cNvPr id="7" name="Text 2"/>
-          <p:cNvSpPr txBox="1"/>
-          <p:nvPr/>
-        </p:nvSpPr>
-        <p:spPr>
-          <a:xfrm>
-            <a:off x="3474720" y="4206240"/>
-            <a:ext cx="2377440" cy="365760"/>
-          </a:xfrm>
-          <a:prstGeom prst="rect">
-            <a:avLst/>
-          </a:prstGeom>
-          <a:noFill/>
-          <a:ln/>
-        </p:spPr>
-        <p:txBody>
-          <a:bodyPr wrap="square" lIns="0" tIns="0" rIns="0" bIns="0" rtlCol="0" anchor="t"/>
-          <a:lstStyle/>
-          <a:p>
-            <a:pPr algn="ctr" indent="0" marL="0">
-              <a:buNone/>
-            </a:pPr>
-            <a:r>
-              <a:rPr lang="en-US" sz="1200" dirty="0">
-                <a:solidFill>
-                  <a:schemeClr val="tx2"/>
-                </a:solidFill>
-              </a:rPr>
-              <a:t>UC02 – Phạm vi giám sát</a:t>
-            </a:r>
-            <a:endParaRPr lang="en-US" sz="1200" dirty="0"/>
-          </a:p>
-        </p:txBody>
-      </p:sp>
-      <p:sp>
-        <p:nvSpPr>
-          <p:cNvPr id="8" name="Text 3"/>
-          <p:cNvSpPr txBox="1"/>
-          <p:nvPr/>
-        </p:nvSpPr>
-        <p:spPr>
-          <a:xfrm>
-            <a:off x="5943600" y="4206240"/>
-            <a:ext cx="2926080" cy="365760"/>
-          </a:xfrm>
-          <a:prstGeom prst="rect">
-            <a:avLst/>
-          </a:prstGeom>
-          <a:noFill/>
-          <a:ln/>
-        </p:spPr>
-        <p:txBody>
-          <a:bodyPr wrap="square" lIns="0" tIns="0" rIns="0" bIns="0" rtlCol="0" anchor="t"/>
-          <a:lstStyle/>
-          <a:p>
-            <a:pPr algn="ctr" indent="0" marL="0">
-              <a:buNone/>
-            </a:pPr>
-            <a:r>
-              <a:rPr lang="en-US" sz="1200" dirty="0">
-                <a:solidFill>
-                  <a:schemeClr val="tx2"/>
-                </a:solidFill>
-              </a:rPr>
-              <a:t>UC07/08 – Giám sát, cảnh báo</a:t>
+              <a:t>UC04 - đọc log, parse, kiểm tra phạm vi, GeoIP, đếm tần suất, gom phiên</a:t>
             </a:r>
             <a:endParaRPr lang="en-US" sz="1200" dirty="0"/>
           </a:p>
@@ -4446,9 +4302,9 @@
                 <a:solidFill>
                   <a:schemeClr val="tx1"/>
                 </a:solidFill>
-                <a:latin typeface="Cambria" pitchFamily="34" charset="0"/>
-                <a:ea typeface="Cambria" pitchFamily="34" charset="-122"/>
-                <a:cs typeface="Cambria" pitchFamily="34" charset="-120"/>
+                <a:latin typeface="Arial" pitchFamily="34" charset="0"/>
+                <a:ea typeface="Arial" pitchFamily="34" charset="-122"/>
+                <a:cs typeface="Arial" pitchFamily="34" charset="-120"/>
               </a:rPr>
               <a:t>Sơ đồ tuần tự (a): phát hiện SQL Injection</a:t>
             </a:r>
@@ -4472,8 +4328,8 @@
         </p:blipFill>
         <p:spPr>
           <a:xfrm>
-            <a:off x="781869" y="868680"/>
-            <a:ext cx="7580263" cy="3840480"/>
+            <a:off x="1148414" y="868680"/>
+            <a:ext cx="6847172" cy="3840480"/>
           </a:xfrm>
           <a:prstGeom prst="rect">
             <a:avLst/>
@@ -4581,9 +4437,9 @@
                 <a:solidFill>
                   <a:schemeClr val="tx1"/>
                 </a:solidFill>
-                <a:latin typeface="Cambria" pitchFamily="34" charset="0"/>
-                <a:ea typeface="Cambria" pitchFamily="34" charset="-122"/>
-                <a:cs typeface="Cambria" pitchFamily="34" charset="-120"/>
+                <a:latin typeface="Arial" pitchFamily="34" charset="0"/>
+                <a:ea typeface="Arial" pitchFamily="34" charset="-122"/>
+                <a:cs typeface="Arial" pitchFamily="34" charset="-120"/>
               </a:rPr>
               <a:t>Sơ đồ tuần tự (b): cảnh báo và hiển thị realtime</a:t>
             </a:r>
@@ -4640,7 +4496,7 @@
               <a:buNone/>
             </a:pPr>
             <a:r>
-              <a:rPr lang="en-US" sz="1250" b="1" dirty="0">
+              <a:rPr lang="en-US" sz="1400" dirty="0">
                 <a:solidFill>
                   <a:srgbClr val="0E7490"/>
                 </a:solidFill>
@@ -4654,7 +4510,7 @@
               <a:buNone/>
             </a:pPr>
             <a:r>
-              <a:rPr lang="en-US" sz="1250" dirty="0">
+              <a:rPr lang="en-US" sz="1400" dirty="0">
                 <a:solidFill>
                   <a:schemeClr val="tx1"/>
                 </a:solidFill>
@@ -4682,7 +4538,7 @@
               <a:buNone/>
             </a:pPr>
             <a:r>
-              <a:rPr lang="en-US" sz="1250" b="1" dirty="0">
+              <a:rPr lang="en-US" sz="1400" dirty="0">
                 <a:solidFill>
                   <a:srgbClr val="0E7490"/>
                 </a:solidFill>
@@ -4696,12 +4552,12 @@
               <a:buNone/>
             </a:pPr>
             <a:r>
-              <a:rPr lang="en-US" sz="1250" dirty="0">
+              <a:rPr lang="en-US" sz="1400" dirty="0">
                 <a:solidFill>
                   <a:schemeClr val="tx1"/>
                 </a:solidFill>
               </a:rPr>
-              <a:t>Ngưỡng theo domain, cooldown (domain, IP, loại) → email + webhook</a:t>
+              <a:t>Ngưỡng theo domain, cooldown (domain, IP, loại), gửi email và webhook</a:t>
             </a:r>
             <a:endParaRPr lang="en-US" sz="1250" dirty="0"/>
           </a:p>
@@ -4724,7 +4580,7 @@
               <a:buNone/>
             </a:pPr>
             <a:r>
-              <a:rPr lang="en-US" sz="1250" b="1" dirty="0">
+              <a:rPr lang="en-US" sz="1400" dirty="0">
                 <a:solidFill>
                   <a:srgbClr val="0E7490"/>
                 </a:solidFill>
@@ -4738,12 +4594,12 @@
               <a:buNone/>
             </a:pPr>
             <a:r>
-              <a:rPr lang="en-US" sz="1250" dirty="0">
+              <a:rPr lang="en-US" sz="1400" dirty="0">
                 <a:solidFill>
                   <a:schemeClr val="tx1"/>
                 </a:solidFill>
               </a:rPr>
-              <a:t>Lưu detection.attacks, đẩy SSE; truy cập qua Gateway + JWT</a:t>
+              <a:t>Lưu detection.attacks, đẩy SSE; truy cập qua Gateway với JWT</a:t>
             </a:r>
             <a:endParaRPr lang="en-US" sz="1250" dirty="0"/>
           </a:p>
@@ -4850,9 +4706,9 @@
                 <a:solidFill>
                   <a:schemeClr val="tx1"/>
                 </a:solidFill>
-                <a:latin typeface="Cambria" pitchFamily="34" charset="0"/>
-                <a:ea typeface="Cambria" pitchFamily="34" charset="-122"/>
-                <a:cs typeface="Cambria" pitchFamily="34" charset="-120"/>
+                <a:latin typeface="Arial" pitchFamily="34" charset="0"/>
+                <a:ea typeface="Arial" pitchFamily="34" charset="-122"/>
+                <a:cs typeface="Arial" pitchFamily="34" charset="-120"/>
               </a:rPr>
               <a:t>Sơ đồ hoạt động (swimlane theo service)</a:t>
             </a:r>
@@ -4934,7 +4790,7 @@
               <a:buNone/>
             </a:pPr>
             <a:r>
-              <a:rPr lang="en-US" sz="1400" b="1" dirty="0">
+              <a:rPr lang="en-US" sz="1400" dirty="0">
                 <a:solidFill>
                   <a:srgbClr val="FFFFFF"/>
                 </a:solidFill>
@@ -4970,7 +4826,7 @@
               <a:buNone/>
             </a:pPr>
             <a:r>
-              <a:rPr lang="en-US" sz="1400" b="1" dirty="0">
+              <a:rPr lang="en-US" sz="1400" dirty="0">
                 <a:solidFill>
                   <a:schemeClr val="tx1"/>
                 </a:solidFill>
@@ -5006,12 +4862,12 @@
               <a:buNone/>
             </a:pPr>
             <a:r>
-              <a:rPr lang="en-US" sz="1200" dirty="0">
+              <a:rPr lang="en-US" sz="1300" dirty="0">
                 <a:solidFill>
                   <a:schemeClr val="tx2"/>
                 </a:solidFill>
               </a:rPr>
-              <a:t>Không → bỏ qua, vẫn commit offset</a:t>
+              <a:t>Không: bỏ qua, vẫn commit offset</a:t>
             </a:r>
             <a:endParaRPr lang="en-US" sz="1200" dirty="0"/>
           </a:p>
@@ -5067,7 +4923,7 @@
               <a:buNone/>
             </a:pPr>
             <a:r>
-              <a:rPr lang="en-US" sz="1400" b="1" dirty="0">
+              <a:rPr lang="en-US" sz="1400" dirty="0">
                 <a:solidFill>
                   <a:srgbClr val="FFFFFF"/>
                 </a:solidFill>
@@ -5103,7 +4959,7 @@
               <a:buNone/>
             </a:pPr>
             <a:r>
-              <a:rPr lang="en-US" sz="1400" b="1" dirty="0">
+              <a:rPr lang="en-US" sz="1400" dirty="0">
                 <a:solidFill>
                   <a:schemeClr val="tx1"/>
                 </a:solidFill>
@@ -5139,12 +4995,12 @@
               <a:buNone/>
             </a:pPr>
             <a:r>
-              <a:rPr lang="en-US" sz="1200" dirty="0">
+              <a:rPr lang="en-US" sz="1300" dirty="0">
                 <a:solidFill>
                   <a:schemeClr val="tx2"/>
                 </a:solidFill>
               </a:rPr>
-              <a:t>Không → waf.deadletter</a:t>
+              <a:t>Không: ghi vào waf.deadletter</a:t>
             </a:r>
             <a:endParaRPr lang="en-US" sz="1200" dirty="0"/>
           </a:p>
@@ -5200,7 +5056,7 @@
               <a:buNone/>
             </a:pPr>
             <a:r>
-              <a:rPr lang="en-US" sz="1400" b="1" dirty="0">
+              <a:rPr lang="en-US" sz="1400" dirty="0">
                 <a:solidFill>
                   <a:srgbClr val="FFFFFF"/>
                 </a:solidFill>
@@ -5236,7 +5092,7 @@
               <a:buNone/>
             </a:pPr>
             <a:r>
-              <a:rPr lang="en-US" sz="1400" b="1" dirty="0">
+              <a:rPr lang="en-US" sz="1400" dirty="0">
                 <a:solidFill>
                   <a:schemeClr val="tx1"/>
                 </a:solidFill>
@@ -5272,12 +5128,12 @@
               <a:buNone/>
             </a:pPr>
             <a:r>
-              <a:rPr lang="en-US" sz="1200" dirty="0">
+              <a:rPr lang="en-US" sz="1300" dirty="0">
                 <a:solidFill>
                   <a:schemeClr val="tx2"/>
                 </a:solidFill>
               </a:rPr>
-              <a:t>Có → attack.detected (mỗi rule 1 sự kiện)</a:t>
+              <a:t>Có: phát attack.detected (mỗi rule 1 sự kiện)</a:t>
             </a:r>
             <a:endParaRPr lang="en-US" sz="1200" dirty="0"/>
           </a:p>
@@ -5333,7 +5189,7 @@
               <a:buNone/>
             </a:pPr>
             <a:r>
-              <a:rPr lang="en-US" sz="1400" b="1" dirty="0">
+              <a:rPr lang="en-US" sz="1400" dirty="0">
                 <a:solidFill>
                   <a:srgbClr val="FFFFFF"/>
                 </a:solidFill>
@@ -5369,12 +5225,12 @@
               <a:buNone/>
             </a:pPr>
             <a:r>
-              <a:rPr lang="en-US" sz="1400" b="1" dirty="0">
+              <a:rPr lang="en-US" sz="1400" dirty="0">
                 <a:solidFill>
                   <a:schemeClr val="tx1"/>
                 </a:solidFill>
               </a:rPr>
-              <a:t>Điểm ≥ 70 &amp; qua cooldown 15 s?</a:t>
+              <a:t>Điểm ≥ 70 và qua cooldown 15 s?</a:t>
             </a:r>
             <a:endParaRPr lang="en-US" sz="1400" dirty="0"/>
           </a:p>
@@ -5405,12 +5261,12 @@
               <a:buNone/>
             </a:pPr>
             <a:r>
-              <a:rPr lang="en-US" sz="1200" dirty="0">
+              <a:rPr lang="en-US" sz="1300" dirty="0">
                 <a:solidFill>
                   <a:schemeClr val="tx2"/>
                 </a:solidFill>
               </a:rPr>
-              <a:t>Có → alert.triggered</a:t>
+              <a:t>Có: phát alert.triggered</a:t>
             </a:r>
             <a:endParaRPr lang="en-US" sz="1200" dirty="0"/>
           </a:p>
@@ -5466,7 +5322,7 @@
               <a:buNone/>
             </a:pPr>
             <a:r>
-              <a:rPr lang="en-US" sz="1400" b="1" dirty="0">
+              <a:rPr lang="en-US" sz="1400" dirty="0">
                 <a:solidFill>
                   <a:srgbClr val="FFFFFF"/>
                 </a:solidFill>
@@ -5502,7 +5358,7 @@
               <a:buNone/>
             </a:pPr>
             <a:r>
-              <a:rPr lang="en-US" sz="1400" b="1" dirty="0">
+              <a:rPr lang="en-US" sz="1400" dirty="0">
                 <a:solidFill>
                   <a:schemeClr val="tx1"/>
                 </a:solidFill>
@@ -5538,12 +5394,12 @@
               <a:buNone/>
             </a:pPr>
             <a:r>
-              <a:rPr lang="en-US" sz="1200" dirty="0">
+              <a:rPr lang="en-US" sz="1300" dirty="0">
                 <a:solidFill>
                   <a:schemeClr val="tx2"/>
                 </a:solidFill>
               </a:rPr>
-              <a:t>Có → lưu + email/webhook</a:t>
+              <a:t>Có: lưu cảnh báo, gửi email và webhook</a:t>
             </a:r>
             <a:endParaRPr lang="en-US" sz="1200" dirty="0"/>
           </a:p>
@@ -5650,9 +5506,9 @@
                 <a:solidFill>
                   <a:schemeClr val="tx1"/>
                 </a:solidFill>
-                <a:latin typeface="Cambria" pitchFamily="34" charset="0"/>
-                <a:ea typeface="Cambria" pitchFamily="34" charset="-122"/>
-                <a:cs typeface="Cambria" pitchFamily="34" charset="-120"/>
+                <a:latin typeface="Arial" pitchFamily="34" charset="0"/>
+                <a:ea typeface="Arial" pitchFamily="34" charset="-122"/>
+                <a:cs typeface="Arial" pitchFamily="34" charset="-120"/>
               </a:rPr>
               <a:t>Thiết kế cơ sở dữ liệu</a:t>
             </a:r>
@@ -5709,12 +5565,12 @@
               <a:buNone/>
             </a:pPr>
             <a:r>
-              <a:rPr lang="en-US" sz="1200" dirty="0">
+              <a:rPr lang="en-US" sz="1300" dirty="0">
                 <a:solidFill>
                   <a:schemeClr val="tx2"/>
                 </a:solidFill>
               </a:rPr>
-              <a:t>PostgreSQL 17 · mỗi module một schema riêng · quan hệ logic (không FK cứng) vì bảng do service khác nhau ghi bất đồng bộ từ Kafka · rules lưu ở rules.json + topic compacted</a:t>
+              <a:t>PostgreSQL 17, mỗi module một schema riêng; quan hệ logic (không khai báo FK) vì bảng do các service khác nhau ghi bất đồng bộ từ Kafka; rule lưu ở rules.json và topic compacted rules.changed</a:t>
             </a:r>
             <a:endParaRPr lang="en-US" sz="1200" dirty="0"/>
           </a:p>
@@ -5821,9 +5677,9 @@
                 <a:solidFill>
                   <a:schemeClr val="tx1"/>
                 </a:solidFill>
-                <a:latin typeface="Cambria" pitchFamily="34" charset="0"/>
-                <a:ea typeface="Cambria" pitchFamily="34" charset="-122"/>
-                <a:cs typeface="Cambria" pitchFamily="34" charset="-120"/>
+                <a:latin typeface="Arial" pitchFamily="34" charset="0"/>
+                <a:ea typeface="Arial" pitchFamily="34" charset="-122"/>
+                <a:cs typeface="Arial" pitchFamily="34" charset="-120"/>
               </a:rPr>
               <a:t>Thuật toán chấm điểm bất thường (D3)</a:t>
             </a:r>
@@ -5890,15 +5746,15 @@
               <a:buNone/>
             </a:pPr>
             <a:r>
-              <a:rPr lang="en-US" sz="2600" b="1" dirty="0">
+              <a:rPr lang="en-US" sz="2600" dirty="0">
                 <a:solidFill>
                   <a:srgbClr val="DC2626"/>
                 </a:solidFill>
-                <a:latin typeface="Cambria" pitchFamily="34" charset="0"/>
-                <a:ea typeface="Cambria" pitchFamily="34" charset="-122"/>
-                <a:cs typeface="Cambria" pitchFamily="34" charset="-120"/>
+                <a:latin typeface="Arial" pitchFamily="34" charset="0"/>
+                <a:ea typeface="Arial" pitchFamily="34" charset="-122"/>
+                <a:cs typeface="Arial" pitchFamily="34" charset="-120"/>
               </a:rPr>
-              <a:t>95 · 85 · 65</a:t>
+              <a:t>95, 85, 65</a:t>
             </a:r>
             <a:endParaRPr lang="en-US" sz="2600" dirty="0"/>
           </a:p>
@@ -5929,7 +5785,7 @@
               <a:buNone/>
             </a:pPr>
             <a:r>
-              <a:rPr lang="en-US" sz="1300" b="1" dirty="0">
+              <a:rPr lang="en-US" sz="1400" dirty="0">
                 <a:solidFill>
                   <a:schemeClr val="tx1"/>
                 </a:solidFill>
@@ -5965,7 +5821,7 @@
               <a:buNone/>
             </a:pPr>
             <a:r>
-              <a:rPr lang="en-US" sz="1150" dirty="0">
+              <a:rPr lang="en-US" sz="1300" dirty="0">
                 <a:solidFill>
                   <a:schemeClr val="tx2"/>
                 </a:solidFill>
@@ -6035,13 +5891,13 @@
               <a:buNone/>
             </a:pPr>
             <a:r>
-              <a:rPr lang="en-US" sz="2600" b="1" dirty="0">
+              <a:rPr lang="en-US" sz="2600" dirty="0">
                 <a:solidFill>
                   <a:srgbClr val="DC2626"/>
                 </a:solidFill>
-                <a:latin typeface="Cambria" pitchFamily="34" charset="0"/>
-                <a:ea typeface="Cambria" pitchFamily="34" charset="-122"/>
-                <a:cs typeface="Cambria" pitchFamily="34" charset="-120"/>
+                <a:latin typeface="Arial" pitchFamily="34" charset="0"/>
+                <a:ea typeface="Arial" pitchFamily="34" charset="-122"/>
+                <a:cs typeface="Arial" pitchFamily="34" charset="-120"/>
               </a:rPr>
               <a:t>+10</a:t>
             </a:r>
@@ -6074,7 +5930,7 @@
               <a:buNone/>
             </a:pPr>
             <a:r>
-              <a:rPr lang="en-US" sz="1300" b="1" dirty="0">
+              <a:rPr lang="en-US" sz="1400" dirty="0">
                 <a:solidFill>
                   <a:schemeClr val="tx1"/>
                 </a:solidFill>
@@ -6110,7 +5966,7 @@
               <a:buNone/>
             </a:pPr>
             <a:r>
-              <a:rPr lang="en-US" sz="1150" dirty="0">
+              <a:rPr lang="en-US" sz="1300" dirty="0">
                 <a:solidFill>
                   <a:schemeClr val="tx2"/>
                 </a:solidFill>
@@ -6180,13 +6036,13 @@
               <a:buNone/>
             </a:pPr>
             <a:r>
-              <a:rPr lang="en-US" sz="2600" b="1" dirty="0">
+              <a:rPr lang="en-US" sz="2600" dirty="0">
                 <a:solidFill>
                   <a:srgbClr val="2563EB"/>
                 </a:solidFill>
-                <a:latin typeface="Cambria" pitchFamily="34" charset="0"/>
-                <a:ea typeface="Cambria" pitchFamily="34" charset="-122"/>
-                <a:cs typeface="Cambria" pitchFamily="34" charset="-120"/>
+                <a:latin typeface="Arial" pitchFamily="34" charset="0"/>
+                <a:ea typeface="Arial" pitchFamily="34" charset="-122"/>
+                <a:cs typeface="Arial" pitchFamily="34" charset="-120"/>
               </a:rPr>
               <a:t>+30</a:t>
             </a:r>
@@ -6219,7 +6075,7 @@
               <a:buNone/>
             </a:pPr>
             <a:r>
-              <a:rPr lang="en-US" sz="1300" b="1" dirty="0">
+              <a:rPr lang="en-US" sz="1400" dirty="0">
                 <a:solidFill>
                   <a:schemeClr val="tx1"/>
                 </a:solidFill>
@@ -6255,12 +6111,12 @@
               <a:buNone/>
             </a:pPr>
             <a:r>
-              <a:rPr lang="en-US" sz="1150" dirty="0">
+              <a:rPr lang="en-US" sz="1300" dirty="0">
                 <a:solidFill>
                   <a:schemeClr val="tx2"/>
                 </a:solidFill>
               </a:rPr>
-              <a:t>≥ 20 req / 60 s</a:t>
+              <a:t>≥ 20 request / 60 s</a:t>
             </a:r>
             <a:endParaRPr lang="en-US" sz="1150" dirty="0"/>
           </a:p>
@@ -6325,13 +6181,13 @@
               <a:buNone/>
             </a:pPr>
             <a:r>
-              <a:rPr lang="en-US" sz="2600" b="1" dirty="0">
+              <a:rPr lang="en-US" sz="2600" dirty="0">
                 <a:solidFill>
                   <a:srgbClr val="2563EB"/>
                 </a:solidFill>
-                <a:latin typeface="Cambria" pitchFamily="34" charset="0"/>
-                <a:ea typeface="Cambria" pitchFamily="34" charset="-122"/>
-                <a:cs typeface="Cambria" pitchFamily="34" charset="-120"/>
+                <a:latin typeface="Arial" pitchFamily="34" charset="0"/>
+                <a:ea typeface="Arial" pitchFamily="34" charset="-122"/>
+                <a:cs typeface="Arial" pitchFamily="34" charset="-120"/>
               </a:rPr>
               <a:t>+40</a:t>
             </a:r>
@@ -6364,7 +6220,7 @@
               <a:buNone/>
             </a:pPr>
             <a:r>
-              <a:rPr lang="en-US" sz="1300" b="1" dirty="0">
+              <a:rPr lang="en-US" sz="1400" dirty="0">
                 <a:solidFill>
                   <a:schemeClr val="tx1"/>
                 </a:solidFill>
@@ -6400,12 +6256,12 @@
               <a:buNone/>
             </a:pPr>
             <a:r>
-              <a:rPr lang="en-US" sz="1150" dirty="0">
+              <a:rPr lang="en-US" sz="1300" dirty="0">
                 <a:solidFill>
                   <a:schemeClr val="tx2"/>
                 </a:solidFill>
               </a:rPr>
-              <a:t>≥ 100 req / 60 s</a:t>
+              <a:t>≥ 100 request / 60 s</a:t>
             </a:r>
             <a:endParaRPr lang="en-US" sz="1150" dirty="0"/>
           </a:p>
@@ -6470,13 +6326,13 @@
               <a:buNone/>
             </a:pPr>
             <a:r>
-              <a:rPr lang="en-US" sz="2600" b="1" dirty="0">
+              <a:rPr lang="en-US" sz="2600" dirty="0">
                 <a:solidFill>
                   <a:srgbClr val="0E7490"/>
                 </a:solidFill>
-                <a:latin typeface="Cambria" pitchFamily="34" charset="0"/>
-                <a:ea typeface="Cambria" pitchFamily="34" charset="-122"/>
-                <a:cs typeface="Cambria" pitchFamily="34" charset="-120"/>
+                <a:latin typeface="Arial" pitchFamily="34" charset="0"/>
+                <a:ea typeface="Arial" pitchFamily="34" charset="-122"/>
+                <a:cs typeface="Arial" pitchFamily="34" charset="-120"/>
               </a:rPr>
               <a:t>+25</a:t>
             </a:r>
@@ -6509,7 +6365,7 @@
               <a:buNone/>
             </a:pPr>
             <a:r>
-              <a:rPr lang="en-US" sz="1300" b="1" dirty="0">
+              <a:rPr lang="en-US" sz="1400" dirty="0">
                 <a:solidFill>
                   <a:schemeClr val="tx1"/>
                 </a:solidFill>
@@ -6545,7 +6401,7 @@
               <a:buNone/>
             </a:pPr>
             <a:r>
-              <a:rPr lang="en-US" sz="1150" dirty="0">
+              <a:rPr lang="en-US" sz="1300" dirty="0">
                 <a:solidFill>
                   <a:schemeClr val="tx2"/>
                 </a:solidFill>
@@ -6615,13 +6471,13 @@
               <a:buNone/>
             </a:pPr>
             <a:r>
-              <a:rPr lang="en-US" sz="2600" b="1" dirty="0">
+              <a:rPr lang="en-US" sz="2600" dirty="0">
                 <a:solidFill>
                   <a:srgbClr val="0E7490"/>
                 </a:solidFill>
-                <a:latin typeface="Cambria" pitchFamily="34" charset="0"/>
-                <a:ea typeface="Cambria" pitchFamily="34" charset="-122"/>
-                <a:cs typeface="Cambria" pitchFamily="34" charset="-120"/>
+                <a:latin typeface="Arial" pitchFamily="34" charset="0"/>
+                <a:ea typeface="Arial" pitchFamily="34" charset="-122"/>
+                <a:cs typeface="Arial" pitchFamily="34" charset="-120"/>
               </a:rPr>
               <a:t>+25</a:t>
             </a:r>
@@ -6654,7 +6510,7 @@
               <a:buNone/>
             </a:pPr>
             <a:r>
-              <a:rPr lang="en-US" sz="1300" b="1" dirty="0">
+              <a:rPr lang="en-US" sz="1400" dirty="0">
                 <a:solidFill>
                   <a:schemeClr val="tx1"/>
                 </a:solidFill>
@@ -6690,7 +6546,7 @@
               <a:buNone/>
             </a:pPr>
             <a:r>
-              <a:rPr lang="en-US" sz="1150" dirty="0">
+              <a:rPr lang="en-US" sz="1300" dirty="0">
                 <a:solidFill>
                   <a:schemeClr val="tx2"/>
                 </a:solidFill>
@@ -6760,23 +6616,23 @@
               <a:buNone/>
             </a:pPr>
             <a:r>
-              <a:rPr lang="en-US" sz="1300" b="1" dirty="0">
+              <a:rPr lang="en-US" sz="1400" dirty="0">
                 <a:solidFill>
                   <a:srgbClr val="F59E0B"/>
                 </a:solidFill>
               </a:rPr>
-              <a:t>Tổng chặn ở 100 · cảnh báo khi ≥ 70. </a:t>
+              <a:t>Tổng chặn ở 100, cảnh báo khi ≥ 70. </a:t>
             </a:r>
             <a:pPr indent="0" marL="0">
               <a:buNone/>
             </a:pPr>
             <a:r>
-              <a:rPr lang="en-US" sz="1300" dirty="0">
+              <a:rPr lang="en-US" sz="1400" dirty="0">
                 <a:solidFill>
                   <a:srgbClr val="FFFFFF"/>
                 </a:solidFill>
               </a:rPr>
-              <a:t>Không cần payload vẫn bắt được: dò quét 30 + 25 + 25 = 80, flood một nguồn 30 + 40 = 70. Regex RE2 thời gian tuyến tính → không ReDoS.</a:t>
+              <a:t>Nguồn không mang payload vẫn bị phát hiện: dò quét 30 + 25 + 25 = 80, flood một nguồn 30 + 40 = 70. Regex RE2 có thời gian khớp tuyến tính nên không bị ReDoS.</a:t>
             </a:r>
             <a:endParaRPr lang="en-US" sz="1300" dirty="0"/>
           </a:p>
@@ -6883,9 +6739,9 @@
                 <a:solidFill>
                   <a:schemeClr val="tx1"/>
                 </a:solidFill>
-                <a:latin typeface="Cambria" pitchFamily="34" charset="0"/>
-                <a:ea typeface="Cambria" pitchFamily="34" charset="-122"/>
-                <a:cs typeface="Cambria" pitchFamily="34" charset="-120"/>
+                <a:latin typeface="Arial" pitchFamily="34" charset="0"/>
+                <a:ea typeface="Arial" pitchFamily="34" charset="-122"/>
+                <a:cs typeface="Arial" pitchFamily="34" charset="-120"/>
               </a:rPr>
               <a:t>Kịch bản 1: vận hành và kiểm thử end-to-end</a:t>
             </a:r>
@@ -6917,31 +6773,23 @@
             <a:prstDash val="solid"/>
           </a:ln>
         </p:spPr>
-      </p:sp>
-      <p:pic>
-        <p:nvPicPr>
-          <p:cNvPr id="4" name="Image 0" descr="preencoded.png">    </p:cNvPr>
-          <p:cNvPicPr>
-            <a:picLocks noChangeAspect="1"/>
-          </p:cNvPicPr>
-          <p:nvPr/>
-        </p:nvPicPr>
-        <p:blipFill>
-          <a:blip r:embed="rId1"/>
-          <a:stretch>
-            <a:fillRect/>
-          </a:stretch>
-        </p:blipFill>
-        <p:spPr>
-          <a:xfrm>
-            <a:off x="567842" y="1116482"/>
-            <a:ext cx="281635" cy="281635"/>
-          </a:xfrm>
-          <a:prstGeom prst="rect">
-            <a:avLst/>
-          </a:prstGeom>
-        </p:spPr>
-      </p:pic>
+        <p:txBody>
+          <a:bodyPr wrap="none" lIns="0" tIns="0" rIns="0" bIns="0" anchor="ctr"/>
+          <a:lstStyle/>
+          <a:p>
+            <a:pPr algn="ctr"/>
+            <a:r>
+              <a:rPr lang="vi-VN" sz="1500" dirty="0">
+                <a:solidFill>
+                  <a:srgbClr val="FFFFFF"/>
+                </a:solidFill>
+                <a:latin typeface="Arial"/>
+              </a:rPr>
+              <a:t>1</a:t>
+            </a:r>
+          </a:p>
+        </p:txBody>
+      </p:sp>
       <p:sp>
         <p:nvSpPr>
           <p:cNvPr id="5" name="Text 2"/>
@@ -6967,13 +6815,13 @@
               <a:buNone/>
             </a:pPr>
             <a:r>
-              <a:rPr lang="en-US" sz="1400" b="1" dirty="0">
+              <a:rPr lang="en-US" sz="1400" dirty="0">
                 <a:solidFill>
                   <a:schemeClr val="tx1"/>
                 </a:solidFill>
-                <a:latin typeface="Courier New" pitchFamily="34" charset="0"/>
-                <a:ea typeface="Courier New" pitchFamily="34" charset="-122"/>
-                <a:cs typeface="Courier New" pitchFamily="34" charset="-120"/>
+                <a:latin typeface="Arial" pitchFamily="34" charset="0"/>
+                <a:ea typeface="Arial" pitchFamily="34" charset="-122"/>
+                <a:cs typeface="Arial" pitchFamily="34" charset="-120"/>
               </a:rPr>
               <a:t>make up</a:t>
             </a:r>
@@ -7006,12 +6854,12 @@
               <a:buNone/>
             </a:pPr>
             <a:r>
-              <a:rPr lang="en-US" sz="1150" dirty="0">
+              <a:rPr lang="en-US" sz="1300" dirty="0">
                 <a:solidFill>
                   <a:schemeClr val="tx2"/>
                 </a:solidFill>
               </a:rPr>
-              <a:t>Build &amp; khởi động toàn bộ</a:t>
+              <a:t>Build và khởi động toàn bộ</a:t>
             </a:r>
             <a:endParaRPr lang="en-US" sz="1150" dirty="0"/>
           </a:p>
@@ -7041,31 +6889,23 @@
             <a:prstDash val="solid"/>
           </a:ln>
         </p:spPr>
-      </p:sp>
-      <p:pic>
-        <p:nvPicPr>
-          <p:cNvPr id="8" name="Image 1" descr="preencoded.png">    </p:cNvPr>
-          <p:cNvPicPr>
-            <a:picLocks noChangeAspect="1"/>
-          </p:cNvPicPr>
-          <p:nvPr/>
-        </p:nvPicPr>
-        <p:blipFill>
-          <a:blip r:embed="rId2"/>
-          <a:stretch>
-            <a:fillRect/>
-          </a:stretch>
-        </p:blipFill>
-        <p:spPr>
-          <a:xfrm>
-            <a:off x="567842" y="1985162"/>
-            <a:ext cx="281635" cy="281635"/>
-          </a:xfrm>
-          <a:prstGeom prst="rect">
-            <a:avLst/>
-          </a:prstGeom>
-        </p:spPr>
-      </p:pic>
+        <p:txBody>
+          <a:bodyPr wrap="none" lIns="0" tIns="0" rIns="0" bIns="0" anchor="ctr"/>
+          <a:lstStyle/>
+          <a:p>
+            <a:pPr algn="ctr"/>
+            <a:r>
+              <a:rPr lang="vi-VN" sz="1500" dirty="0">
+                <a:solidFill>
+                  <a:srgbClr val="FFFFFF"/>
+                </a:solidFill>
+                <a:latin typeface="Arial"/>
+              </a:rPr>
+              <a:t>2</a:t>
+            </a:r>
+          </a:p>
+        </p:txBody>
+      </p:sp>
       <p:sp>
         <p:nvSpPr>
           <p:cNvPr id="9" name="Text 5"/>
@@ -7091,13 +6931,13 @@
               <a:buNone/>
             </a:pPr>
             <a:r>
-              <a:rPr lang="en-US" sz="1400" b="1" dirty="0">
+              <a:rPr lang="en-US" sz="1400" dirty="0">
                 <a:solidFill>
                   <a:schemeClr val="tx1"/>
                 </a:solidFill>
-                <a:latin typeface="Courier New" pitchFamily="34" charset="0"/>
-                <a:ea typeface="Courier New" pitchFamily="34" charset="-122"/>
-                <a:cs typeface="Courier New" pitchFamily="34" charset="-120"/>
+                <a:latin typeface="Arial" pitchFamily="34" charset="0"/>
+                <a:ea typeface="Arial" pitchFamily="34" charset="-122"/>
+                <a:cs typeface="Arial" pitchFamily="34" charset="-120"/>
               </a:rPr>
               <a:t>make demo</a:t>
             </a:r>
@@ -7130,12 +6970,12 @@
               <a:buNone/>
             </a:pPr>
             <a:r>
-              <a:rPr lang="en-US" sz="1150" dirty="0">
+              <a:rPr lang="en-US" sz="1300" dirty="0">
                 <a:solidFill>
                   <a:schemeClr val="tx2"/>
                 </a:solidFill>
               </a:rPr>
-              <a:t>Gửi request thật: bình thường, SQLi, XSS, PT, CI, LFI/RFI, Log4Shell…</a:t>
+              <a:t>Gửi request thật: bình thường, SQLi, XSS, PT, CI, LFI/RFI, Log4Shell.</a:t>
             </a:r>
             <a:endParaRPr lang="en-US" sz="1150" dirty="0"/>
           </a:p>
@@ -7165,31 +7005,23 @@
             <a:prstDash val="solid"/>
           </a:ln>
         </p:spPr>
-      </p:sp>
-      <p:pic>
-        <p:nvPicPr>
-          <p:cNvPr id="12" name="Image 2" descr="preencoded.png">    </p:cNvPr>
-          <p:cNvPicPr>
-            <a:picLocks noChangeAspect="1"/>
-          </p:cNvPicPr>
-          <p:nvPr/>
-        </p:nvPicPr>
-        <p:blipFill>
-          <a:blip r:embed="rId3"/>
-          <a:stretch>
-            <a:fillRect/>
-          </a:stretch>
-        </p:blipFill>
-        <p:spPr>
-          <a:xfrm>
-            <a:off x="567842" y="2853842"/>
-            <a:ext cx="281635" cy="281635"/>
-          </a:xfrm>
-          <a:prstGeom prst="rect">
-            <a:avLst/>
-          </a:prstGeom>
-        </p:spPr>
-      </p:pic>
+        <p:txBody>
+          <a:bodyPr wrap="none" lIns="0" tIns="0" rIns="0" bIns="0" anchor="ctr"/>
+          <a:lstStyle/>
+          <a:p>
+            <a:pPr algn="ctr"/>
+            <a:r>
+              <a:rPr lang="vi-VN" sz="1500" dirty="0">
+                <a:solidFill>
+                  <a:srgbClr val="FFFFFF"/>
+                </a:solidFill>
+                <a:latin typeface="Arial"/>
+              </a:rPr>
+              <a:t>3</a:t>
+            </a:r>
+          </a:p>
+        </p:txBody>
+      </p:sp>
       <p:sp>
         <p:nvSpPr>
           <p:cNvPr id="13" name="Text 8"/>
@@ -7215,13 +7047,13 @@
               <a:buNone/>
             </a:pPr>
             <a:r>
-              <a:rPr lang="en-US" sz="1400" b="1" dirty="0">
+              <a:rPr lang="en-US" sz="1400" dirty="0">
                 <a:solidFill>
                   <a:schemeClr val="tx1"/>
                 </a:solidFill>
-                <a:latin typeface="Courier New" pitchFamily="34" charset="0"/>
-                <a:ea typeface="Courier New" pitchFamily="34" charset="-122"/>
-                <a:cs typeface="Courier New" pitchFamily="34" charset="-120"/>
+                <a:latin typeface="Arial" pitchFamily="34" charset="0"/>
+                <a:ea typeface="Arial" pitchFamily="34" charset="-122"/>
+                <a:cs typeface="Arial" pitchFamily="34" charset="-120"/>
               </a:rPr>
               <a:t>make e2e</a:t>
             </a:r>
@@ -7254,7 +7086,7 @@
               <a:buNone/>
             </a:pPr>
             <a:r>
-              <a:rPr lang="en-US" sz="1150" dirty="0">
+              <a:rPr lang="en-US" sz="1300" dirty="0">
                 <a:solidFill>
                   <a:schemeClr val="tx2"/>
                 </a:solidFill>
@@ -7289,31 +7121,23 @@
             <a:prstDash val="solid"/>
           </a:ln>
         </p:spPr>
-      </p:sp>
-      <p:pic>
-        <p:nvPicPr>
-          <p:cNvPr id="16" name="Image 3" descr="preencoded.png">    </p:cNvPr>
-          <p:cNvPicPr>
-            <a:picLocks noChangeAspect="1"/>
-          </p:cNvPicPr>
-          <p:nvPr/>
-        </p:nvPicPr>
-        <p:blipFill>
-          <a:blip r:embed="rId4"/>
-          <a:stretch>
-            <a:fillRect/>
-          </a:stretch>
-        </p:blipFill>
-        <p:spPr>
-          <a:xfrm>
-            <a:off x="567842" y="3722522"/>
-            <a:ext cx="281635" cy="281635"/>
-          </a:xfrm>
-          <a:prstGeom prst="rect">
-            <a:avLst/>
-          </a:prstGeom>
-        </p:spPr>
-      </p:pic>
+        <p:txBody>
+          <a:bodyPr wrap="none" lIns="0" tIns="0" rIns="0" bIns="0" anchor="ctr"/>
+          <a:lstStyle/>
+          <a:p>
+            <a:pPr algn="ctr"/>
+            <a:r>
+              <a:rPr lang="vi-VN" sz="1500" dirty="0">
+                <a:solidFill>
+                  <a:srgbClr val="FFFFFF"/>
+                </a:solidFill>
+                <a:latin typeface="Arial"/>
+              </a:rPr>
+              <a:t>4</a:t>
+            </a:r>
+          </a:p>
+        </p:txBody>
+      </p:sp>
       <p:sp>
         <p:nvSpPr>
           <p:cNvPr id="17" name="Text 11"/>
@@ -7339,13 +7163,13 @@
               <a:buNone/>
             </a:pPr>
             <a:r>
-              <a:rPr lang="en-US" sz="1400" b="1" dirty="0">
+              <a:rPr lang="en-US" sz="1400" dirty="0">
                 <a:solidFill>
                   <a:schemeClr val="tx1"/>
                 </a:solidFill>
-                <a:latin typeface="Calibri" pitchFamily="34" charset="0"/>
-                <a:ea typeface="Calibri" pitchFamily="34" charset="-122"/>
-                <a:cs typeface="Calibri" pitchFamily="34" charset="-120"/>
+                <a:latin typeface="Arial" pitchFamily="34" charset="0"/>
+                <a:ea typeface="Arial" pitchFamily="34" charset="-122"/>
+                <a:cs typeface="Arial" pitchFamily="34" charset="-120"/>
               </a:rPr>
               <a:t>Quan sát</a:t>
             </a:r>
@@ -7378,12 +7202,12 @@
               <a:buNone/>
             </a:pPr>
             <a:r>
-              <a:rPr lang="en-US" sz="1150" dirty="0">
+              <a:rPr lang="en-US" sz="1300" dirty="0">
                 <a:solidFill>
                   <a:schemeClr val="tx2"/>
                 </a:solidFill>
               </a:rPr>
-              <a:t>Dashboard :8080 · Mailpit :8025 · webhook-sink</a:t>
+              <a:t>Dashboard :8080, Mailpit :8025, webhook-sink</a:t>
             </a:r>
             <a:endParaRPr lang="en-US" sz="1150" dirty="0"/>
           </a:p>
@@ -7426,20 +7250,20 @@
                         <a:buNone/>
                       </a:pPr>
                       <a:r>
-                        <a:rPr lang="en-US" sz="1100" b="1" dirty="0">
+                        <a:rPr lang="en-US" sz="1200" dirty="0">
                           <a:solidFill>
                             <a:srgbClr val="FFFFFF"/>
                           </a:solidFill>
-                          <a:latin typeface="Calibri" pitchFamily="34" charset="0"/>
-                          <a:ea typeface="Calibri" pitchFamily="34" charset="-122"/>
-                          <a:cs typeface="Calibri" pitchFamily="34" charset="-120"/>
+                          <a:latin typeface="Arial" pitchFamily="34" charset="0"/>
+                          <a:ea typeface="Arial" pitchFamily="34" charset="-122"/>
+                          <a:cs typeface="Arial" pitchFamily="34" charset="-120"/>
                         </a:rPr>
                         <a:t>Ca</a:t>
                       </a:r>
                       <a:endParaRPr lang="en-US" sz="1100" dirty="0">
-                        <a:latin typeface="Calibri" charset="0"/>
-                        <a:ea typeface="Calibri" charset="0"/>
-                        <a:cs typeface="Calibri" charset="0"/>
+                        <a:latin typeface="Arial" charset="0"/>
+                        <a:ea typeface="Arial" charset="0"/>
+                        <a:cs typeface="Arial" charset="0"/>
                       </a:endParaRPr>
                     </a:p>
                   </a:txBody>
@@ -7494,20 +7318,20 @@
                         <a:buNone/>
                       </a:pPr>
                       <a:r>
-                        <a:rPr lang="en-US" sz="1100" b="1" dirty="0">
+                        <a:rPr lang="en-US" sz="1200" dirty="0">
                           <a:solidFill>
                             <a:srgbClr val="FFFFFF"/>
                           </a:solidFill>
-                          <a:latin typeface="Calibri" pitchFamily="34" charset="0"/>
-                          <a:ea typeface="Calibri" pitchFamily="34" charset="-122"/>
-                          <a:cs typeface="Calibri" pitchFamily="34" charset="-120"/>
+                          <a:latin typeface="Arial" pitchFamily="34" charset="0"/>
+                          <a:ea typeface="Arial" pitchFamily="34" charset="-122"/>
+                          <a:cs typeface="Arial" pitchFamily="34" charset="-120"/>
                         </a:rPr>
                         <a:t>Kiểm tra</a:t>
                       </a:r>
                       <a:endParaRPr lang="en-US" sz="1100" dirty="0">
-                        <a:latin typeface="Calibri" charset="0"/>
-                        <a:ea typeface="Calibri" charset="0"/>
-                        <a:cs typeface="Calibri" charset="0"/>
+                        <a:latin typeface="Arial" charset="0"/>
+                        <a:ea typeface="Arial" charset="0"/>
+                        <a:cs typeface="Arial" charset="0"/>
                       </a:endParaRPr>
                     </a:p>
                   </a:txBody>
@@ -7562,20 +7386,20 @@
                         <a:buNone/>
                       </a:pPr>
                       <a:r>
-                        <a:rPr lang="en-US" sz="1100" b="1" dirty="0">
+                        <a:rPr lang="en-US" sz="1200" dirty="0">
                           <a:solidFill>
                             <a:srgbClr val="FFFFFF"/>
                           </a:solidFill>
-                          <a:latin typeface="Calibri" pitchFamily="34" charset="0"/>
-                          <a:ea typeface="Calibri" pitchFamily="34" charset="-122"/>
-                          <a:cs typeface="Calibri" pitchFamily="34" charset="-120"/>
+                          <a:latin typeface="Arial" pitchFamily="34" charset="0"/>
+                          <a:ea typeface="Arial" pitchFamily="34" charset="-122"/>
+                          <a:cs typeface="Arial" pitchFamily="34" charset="-120"/>
                         </a:rPr>
                         <a:t>Mong đợi</a:t>
                       </a:r>
                       <a:endParaRPr lang="en-US" sz="1100" dirty="0">
-                        <a:latin typeface="Calibri" charset="0"/>
-                        <a:ea typeface="Calibri" charset="0"/>
-                        <a:cs typeface="Calibri" charset="0"/>
+                        <a:latin typeface="Arial" charset="0"/>
+                        <a:ea typeface="Arial" charset="0"/>
+                        <a:cs typeface="Arial" charset="0"/>
                       </a:endParaRPr>
                     </a:p>
                   </a:txBody>
@@ -7632,20 +7456,20 @@
                         <a:buNone/>
                       </a:pPr>
                       <a:r>
-                        <a:rPr lang="en-US" sz="1100" dirty="0">
+                        <a:rPr lang="en-US" sz="1200" dirty="0">
                           <a:solidFill>
                             <a:srgbClr val="0F172A"/>
                           </a:solidFill>
-                          <a:latin typeface="Calibri" pitchFamily="34" charset="0"/>
-                          <a:ea typeface="Calibri" pitchFamily="34" charset="-122"/>
-                          <a:cs typeface="Calibri" pitchFamily="34" charset="-120"/>
+                          <a:latin typeface="Arial" pitchFamily="34" charset="0"/>
+                          <a:ea typeface="Arial" pitchFamily="34" charset="-122"/>
+                          <a:cs typeface="Arial" pitchFamily="34" charset="-120"/>
                         </a:rPr>
                         <a:t>E2E-02</a:t>
                       </a:r>
                       <a:endParaRPr lang="en-US" sz="1100" dirty="0">
-                        <a:latin typeface="Calibri" charset="0"/>
-                        <a:ea typeface="Calibri" charset="0"/>
-                        <a:cs typeface="Calibri" charset="0"/>
+                        <a:latin typeface="Arial" charset="0"/>
+                        <a:ea typeface="Arial" charset="0"/>
+                        <a:cs typeface="Arial" charset="0"/>
                       </a:endParaRPr>
                     </a:p>
                   </a:txBody>
@@ -7700,20 +7524,20 @@
                         <a:buNone/>
                       </a:pPr>
                       <a:r>
-                        <a:rPr lang="en-US" sz="1100" dirty="0">
+                        <a:rPr lang="en-US" sz="1200" dirty="0">
                           <a:solidFill>
                             <a:srgbClr val="0F172A"/>
                           </a:solidFill>
-                          <a:latin typeface="Calibri" pitchFamily="34" charset="0"/>
-                          <a:ea typeface="Calibri" pitchFamily="34" charset="-122"/>
-                          <a:cs typeface="Calibri" pitchFamily="34" charset="-120"/>
+                          <a:latin typeface="Arial" pitchFamily="34" charset="0"/>
+                          <a:ea typeface="Arial" pitchFamily="34" charset="-122"/>
+                          <a:cs typeface="Arial" pitchFamily="34" charset="-120"/>
                         </a:rPr>
                         <a:t>P5 ghi nhận tấn công (top_attacks)</a:t>
                       </a:r>
                       <a:endParaRPr lang="en-US" sz="1100" dirty="0">
-                        <a:latin typeface="Calibri" charset="0"/>
-                        <a:ea typeface="Calibri" charset="0"/>
-                        <a:cs typeface="Calibri" charset="0"/>
+                        <a:latin typeface="Arial" charset="0"/>
+                        <a:ea typeface="Arial" charset="0"/>
+                        <a:cs typeface="Arial" charset="0"/>
                       </a:endParaRPr>
                     </a:p>
                   </a:txBody>
@@ -7768,20 +7592,20 @@
                         <a:buNone/>
                       </a:pPr>
                       <a:r>
-                        <a:rPr lang="en-US" sz="1100" dirty="0">
+                        <a:rPr lang="en-US" sz="1200" dirty="0">
                           <a:solidFill>
                             <a:srgbClr val="0F172A"/>
                           </a:solidFill>
-                          <a:latin typeface="Calibri" pitchFamily="34" charset="0"/>
-                          <a:ea typeface="Calibri" pitchFamily="34" charset="-122"/>
-                          <a:cs typeface="Calibri" pitchFamily="34" charset="-120"/>
+                          <a:latin typeface="Arial" pitchFamily="34" charset="0"/>
+                          <a:ea typeface="Arial" pitchFamily="34" charset="-122"/>
+                          <a:cs typeface="Arial" pitchFamily="34" charset="-120"/>
                         </a:rPr>
                         <a:t>≥ 1</a:t>
                       </a:r>
                       <a:endParaRPr lang="en-US" sz="1100" dirty="0">
-                        <a:latin typeface="Calibri" charset="0"/>
-                        <a:ea typeface="Calibri" charset="0"/>
-                        <a:cs typeface="Calibri" charset="0"/>
+                        <a:latin typeface="Arial" charset="0"/>
+                        <a:ea typeface="Arial" charset="0"/>
+                        <a:cs typeface="Arial" charset="0"/>
                       </a:endParaRPr>
                     </a:p>
                   </a:txBody>
@@ -7838,20 +7662,20 @@
                         <a:buNone/>
                       </a:pPr>
                       <a:r>
-                        <a:rPr lang="en-US" sz="1100" dirty="0">
+                        <a:rPr lang="en-US" sz="1200" dirty="0">
                           <a:solidFill>
                             <a:srgbClr val="0F172A"/>
                           </a:solidFill>
-                          <a:latin typeface="Calibri" pitchFamily="34" charset="0"/>
-                          <a:ea typeface="Calibri" pitchFamily="34" charset="-122"/>
-                          <a:cs typeface="Calibri" pitchFamily="34" charset="-120"/>
+                          <a:latin typeface="Arial" pitchFamily="34" charset="0"/>
+                          <a:ea typeface="Arial" pitchFamily="34" charset="-122"/>
+                          <a:cs typeface="Arial" pitchFamily="34" charset="-120"/>
                         </a:rPr>
                         <a:t>E2E-03</a:t>
                       </a:r>
                       <a:endParaRPr lang="en-US" sz="1100" dirty="0">
-                        <a:latin typeface="Calibri" charset="0"/>
-                        <a:ea typeface="Calibri" charset="0"/>
-                        <a:cs typeface="Calibri" charset="0"/>
+                        <a:latin typeface="Arial" charset="0"/>
+                        <a:ea typeface="Arial" charset="0"/>
+                        <a:cs typeface="Arial" charset="0"/>
                       </a:endParaRPr>
                     </a:p>
                   </a:txBody>
@@ -7906,20 +7730,20 @@
                         <a:buNone/>
                       </a:pPr>
                       <a:r>
-                        <a:rPr lang="en-US" sz="1100" dirty="0">
+                        <a:rPr lang="en-US" sz="1200" dirty="0">
                           <a:solidFill>
                             <a:srgbClr val="0F172A"/>
                           </a:solidFill>
-                          <a:latin typeface="Calibri" pitchFamily="34" charset="0"/>
-                          <a:ea typeface="Calibri" pitchFamily="34" charset="-122"/>
-                          <a:cs typeface="Calibri" pitchFamily="34" charset="-120"/>
+                          <a:latin typeface="Arial" pitchFamily="34" charset="0"/>
+                          <a:ea typeface="Arial" pitchFamily="34" charset="-122"/>
+                          <a:cs typeface="Arial" pitchFamily="34" charset="-120"/>
                         </a:rPr>
                         <a:t>Phát hiện sql_injection</a:t>
                       </a:r>
                       <a:endParaRPr lang="en-US" sz="1100" dirty="0">
-                        <a:latin typeface="Calibri" charset="0"/>
-                        <a:ea typeface="Calibri" charset="0"/>
-                        <a:cs typeface="Calibri" charset="0"/>
+                        <a:latin typeface="Arial" charset="0"/>
+                        <a:ea typeface="Arial" charset="0"/>
+                        <a:cs typeface="Arial" charset="0"/>
                       </a:endParaRPr>
                     </a:p>
                   </a:txBody>
@@ -7974,20 +7798,20 @@
                         <a:buNone/>
                       </a:pPr>
                       <a:r>
-                        <a:rPr lang="en-US" sz="1100" dirty="0">
+                        <a:rPr lang="en-US" sz="1200" dirty="0">
                           <a:solidFill>
                             <a:srgbClr val="0F172A"/>
                           </a:solidFill>
-                          <a:latin typeface="Calibri" pitchFamily="34" charset="0"/>
-                          <a:ea typeface="Calibri" pitchFamily="34" charset="-122"/>
-                          <a:cs typeface="Calibri" pitchFamily="34" charset="-120"/>
+                          <a:latin typeface="Arial" pitchFamily="34" charset="0"/>
+                          <a:ea typeface="Arial" pitchFamily="34" charset="-122"/>
+                          <a:cs typeface="Arial" pitchFamily="34" charset="-120"/>
                         </a:rPr>
                         <a:t>≥ 1</a:t>
                       </a:r>
                       <a:endParaRPr lang="en-US" sz="1100" dirty="0">
-                        <a:latin typeface="Calibri" charset="0"/>
-                        <a:ea typeface="Calibri" charset="0"/>
-                        <a:cs typeface="Calibri" charset="0"/>
+                        <a:latin typeface="Arial" charset="0"/>
+                        <a:ea typeface="Arial" charset="0"/>
+                        <a:cs typeface="Arial" charset="0"/>
                       </a:endParaRPr>
                     </a:p>
                   </a:txBody>
@@ -8044,20 +7868,20 @@
                         <a:buNone/>
                       </a:pPr>
                       <a:r>
-                        <a:rPr lang="en-US" sz="1100" dirty="0">
+                        <a:rPr lang="en-US" sz="1200" dirty="0">
                           <a:solidFill>
                             <a:srgbClr val="0F172A"/>
                           </a:solidFill>
-                          <a:latin typeface="Calibri" pitchFamily="34" charset="0"/>
-                          <a:ea typeface="Calibri" pitchFamily="34" charset="-122"/>
-                          <a:cs typeface="Calibri" pitchFamily="34" charset="-120"/>
+                          <a:latin typeface="Arial" pitchFamily="34" charset="0"/>
+                          <a:ea typeface="Arial" pitchFamily="34" charset="-122"/>
+                          <a:cs typeface="Arial" pitchFamily="34" charset="-120"/>
                         </a:rPr>
                         <a:t>E2E-04</a:t>
                       </a:r>
                       <a:endParaRPr lang="en-US" sz="1100" dirty="0">
-                        <a:latin typeface="Calibri" charset="0"/>
-                        <a:ea typeface="Calibri" charset="0"/>
-                        <a:cs typeface="Calibri" charset="0"/>
+                        <a:latin typeface="Arial" charset="0"/>
+                        <a:ea typeface="Arial" charset="0"/>
+                        <a:cs typeface="Arial" charset="0"/>
                       </a:endParaRPr>
                     </a:p>
                   </a:txBody>
@@ -8112,20 +7936,20 @@
                         <a:buNone/>
                       </a:pPr>
                       <a:r>
-                        <a:rPr lang="en-US" sz="1100" dirty="0">
+                        <a:rPr lang="en-US" sz="1200" dirty="0">
                           <a:solidFill>
                             <a:srgbClr val="0F172A"/>
                           </a:solidFill>
-                          <a:latin typeface="Calibri" pitchFamily="34" charset="0"/>
-                          <a:ea typeface="Calibri" pitchFamily="34" charset="-122"/>
-                          <a:cs typeface="Calibri" pitchFamily="34" charset="-120"/>
+                          <a:latin typeface="Arial" pitchFamily="34" charset="0"/>
+                          <a:ea typeface="Arial" pitchFamily="34" charset="-122"/>
+                          <a:cs typeface="Arial" pitchFamily="34" charset="-120"/>
                         </a:rPr>
                         <a:t>Ghi nhận IP nguồn (top_ips)</a:t>
                       </a:r>
                       <a:endParaRPr lang="en-US" sz="1100" dirty="0">
-                        <a:latin typeface="Calibri" charset="0"/>
-                        <a:ea typeface="Calibri" charset="0"/>
-                        <a:cs typeface="Calibri" charset="0"/>
+                        <a:latin typeface="Arial" charset="0"/>
+                        <a:ea typeface="Arial" charset="0"/>
+                        <a:cs typeface="Arial" charset="0"/>
                       </a:endParaRPr>
                     </a:p>
                   </a:txBody>
@@ -8180,20 +8004,20 @@
                         <a:buNone/>
                       </a:pPr>
                       <a:r>
-                        <a:rPr lang="en-US" sz="1100" dirty="0">
+                        <a:rPr lang="en-US" sz="1200" dirty="0">
                           <a:solidFill>
                             <a:srgbClr val="0F172A"/>
                           </a:solidFill>
-                          <a:latin typeface="Calibri" pitchFamily="34" charset="0"/>
-                          <a:ea typeface="Calibri" pitchFamily="34" charset="-122"/>
-                          <a:cs typeface="Calibri" pitchFamily="34" charset="-120"/>
+                          <a:latin typeface="Arial" pitchFamily="34" charset="0"/>
+                          <a:ea typeface="Arial" pitchFamily="34" charset="-122"/>
+                          <a:cs typeface="Arial" pitchFamily="34" charset="-120"/>
                         </a:rPr>
                         <a:t>≥ 1</a:t>
                       </a:r>
                       <a:endParaRPr lang="en-US" sz="1100" dirty="0">
-                        <a:latin typeface="Calibri" charset="0"/>
-                        <a:ea typeface="Calibri" charset="0"/>
-                        <a:cs typeface="Calibri" charset="0"/>
+                        <a:latin typeface="Arial" charset="0"/>
+                        <a:ea typeface="Arial" charset="0"/>
+                        <a:cs typeface="Arial" charset="0"/>
                       </a:endParaRPr>
                     </a:p>
                   </a:txBody>
@@ -8250,20 +8074,20 @@
                         <a:buNone/>
                       </a:pPr>
                       <a:r>
-                        <a:rPr lang="en-US" sz="1100" dirty="0">
+                        <a:rPr lang="en-US" sz="1200" dirty="0">
                           <a:solidFill>
                             <a:srgbClr val="0F172A"/>
                           </a:solidFill>
-                          <a:latin typeface="Calibri" pitchFamily="34" charset="0"/>
-                          <a:ea typeface="Calibri" pitchFamily="34" charset="-122"/>
-                          <a:cs typeface="Calibri" pitchFamily="34" charset="-120"/>
+                          <a:latin typeface="Arial" pitchFamily="34" charset="0"/>
+                          <a:ea typeface="Arial" pitchFamily="34" charset="-122"/>
+                          <a:cs typeface="Arial" pitchFamily="34" charset="-120"/>
                         </a:rPr>
                         <a:t>E2E-05</a:t>
                       </a:r>
                       <a:endParaRPr lang="en-US" sz="1100" dirty="0">
-                        <a:latin typeface="Calibri" charset="0"/>
-                        <a:ea typeface="Calibri" charset="0"/>
-                        <a:cs typeface="Calibri" charset="0"/>
+                        <a:latin typeface="Arial" charset="0"/>
+                        <a:ea typeface="Arial" charset="0"/>
+                        <a:cs typeface="Arial" charset="0"/>
                       </a:endParaRPr>
                     </a:p>
                   </a:txBody>
@@ -8318,20 +8142,20 @@
                         <a:buNone/>
                       </a:pPr>
                       <a:r>
-                        <a:rPr lang="en-US" sz="1100" dirty="0">
+                        <a:rPr lang="en-US" sz="1200" dirty="0">
                           <a:solidFill>
                             <a:srgbClr val="0F172A"/>
                           </a:solidFill>
-                          <a:latin typeface="Calibri" pitchFamily="34" charset="0"/>
-                          <a:ea typeface="Calibri" pitchFamily="34" charset="-122"/>
-                          <a:cs typeface="Calibri" pitchFamily="34" charset="-120"/>
+                          <a:latin typeface="Arial" pitchFamily="34" charset="0"/>
+                          <a:ea typeface="Arial" pitchFamily="34" charset="-122"/>
+                          <a:cs typeface="Arial" pitchFamily="34" charset="-120"/>
                         </a:rPr>
                         <a:t>Mailpit nhận email cảnh báo</a:t>
                       </a:r>
                       <a:endParaRPr lang="en-US" sz="1100" dirty="0">
-                        <a:latin typeface="Calibri" charset="0"/>
-                        <a:ea typeface="Calibri" charset="0"/>
-                        <a:cs typeface="Calibri" charset="0"/>
+                        <a:latin typeface="Arial" charset="0"/>
+                        <a:ea typeface="Arial" charset="0"/>
+                        <a:cs typeface="Arial" charset="0"/>
                       </a:endParaRPr>
                     </a:p>
                   </a:txBody>
@@ -8386,20 +8210,20 @@
                         <a:buNone/>
                       </a:pPr>
                       <a:r>
-                        <a:rPr lang="en-US" sz="1100" dirty="0">
+                        <a:rPr lang="en-US" sz="1200" dirty="0">
                           <a:solidFill>
                             <a:srgbClr val="0F172A"/>
                           </a:solidFill>
-                          <a:latin typeface="Calibri" pitchFamily="34" charset="0"/>
-                          <a:ea typeface="Calibri" pitchFamily="34" charset="-122"/>
-                          <a:cs typeface="Calibri" pitchFamily="34" charset="-120"/>
+                          <a:latin typeface="Arial" pitchFamily="34" charset="0"/>
+                          <a:ea typeface="Arial" pitchFamily="34" charset="-122"/>
+                          <a:cs typeface="Arial" pitchFamily="34" charset="-120"/>
                         </a:rPr>
                         <a:t>≥ 1</a:t>
                       </a:r>
                       <a:endParaRPr lang="en-US" sz="1100" dirty="0">
-                        <a:latin typeface="Calibri" charset="0"/>
-                        <a:ea typeface="Calibri" charset="0"/>
-                        <a:cs typeface="Calibri" charset="0"/>
+                        <a:latin typeface="Arial" charset="0"/>
+                        <a:ea typeface="Arial" charset="0"/>
+                        <a:cs typeface="Arial" charset="0"/>
                       </a:endParaRPr>
                     </a:p>
                   </a:txBody>
@@ -8456,20 +8280,20 @@
                         <a:buNone/>
                       </a:pPr>
                       <a:r>
-                        <a:rPr lang="en-US" sz="1100" dirty="0">
+                        <a:rPr lang="en-US" sz="1200" dirty="0">
                           <a:solidFill>
                             <a:srgbClr val="0F172A"/>
                           </a:solidFill>
-                          <a:latin typeface="Calibri" pitchFamily="34" charset="0"/>
-                          <a:ea typeface="Calibri" pitchFamily="34" charset="-122"/>
-                          <a:cs typeface="Calibri" pitchFamily="34" charset="-120"/>
+                          <a:latin typeface="Arial" pitchFamily="34" charset="0"/>
+                          <a:ea typeface="Arial" pitchFamily="34" charset="-122"/>
+                          <a:cs typeface="Arial" pitchFamily="34" charset="-120"/>
                         </a:rPr>
                         <a:t>E2E-06</a:t>
                       </a:r>
                       <a:endParaRPr lang="en-US" sz="1100" dirty="0">
-                        <a:latin typeface="Calibri" charset="0"/>
-                        <a:ea typeface="Calibri" charset="0"/>
-                        <a:cs typeface="Calibri" charset="0"/>
+                        <a:latin typeface="Arial" charset="0"/>
+                        <a:ea typeface="Arial" charset="0"/>
+                        <a:cs typeface="Arial" charset="0"/>
                       </a:endParaRPr>
                     </a:p>
                   </a:txBody>
@@ -8524,20 +8348,20 @@
                         <a:buNone/>
                       </a:pPr>
                       <a:r>
-                        <a:rPr lang="en-US" sz="1100" dirty="0">
+                        <a:rPr lang="en-US" sz="1200" dirty="0">
                           <a:solidFill>
                             <a:srgbClr val="0F172A"/>
                           </a:solidFill>
-                          <a:latin typeface="Calibri" pitchFamily="34" charset="0"/>
-                          <a:ea typeface="Calibri" pitchFamily="34" charset="-122"/>
-                          <a:cs typeface="Calibri" pitchFamily="34" charset="-120"/>
+                          <a:latin typeface="Arial" pitchFamily="34" charset="0"/>
+                          <a:ea typeface="Arial" pitchFamily="34" charset="-122"/>
+                          <a:cs typeface="Arial" pitchFamily="34" charset="-120"/>
                         </a:rPr>
                         <a:t>Có lịch sử cảnh báo</a:t>
                       </a:r>
                       <a:endParaRPr lang="en-US" sz="1100" dirty="0">
-                        <a:latin typeface="Calibri" charset="0"/>
-                        <a:ea typeface="Calibri" charset="0"/>
-                        <a:cs typeface="Calibri" charset="0"/>
+                        <a:latin typeface="Arial" charset="0"/>
+                        <a:ea typeface="Arial" charset="0"/>
+                        <a:cs typeface="Arial" charset="0"/>
                       </a:endParaRPr>
                     </a:p>
                   </a:txBody>
@@ -8592,20 +8416,20 @@
                         <a:buNone/>
                       </a:pPr>
                       <a:r>
-                        <a:rPr lang="en-US" sz="1100" dirty="0">
+                        <a:rPr lang="en-US" sz="1200" dirty="0">
                           <a:solidFill>
                             <a:srgbClr val="0F172A"/>
                           </a:solidFill>
-                          <a:latin typeface="Calibri" pitchFamily="34" charset="0"/>
-                          <a:ea typeface="Calibri" pitchFamily="34" charset="-122"/>
-                          <a:cs typeface="Calibri" pitchFamily="34" charset="-120"/>
+                          <a:latin typeface="Arial" pitchFamily="34" charset="0"/>
+                          <a:ea typeface="Arial" pitchFamily="34" charset="-122"/>
+                          <a:cs typeface="Arial" pitchFamily="34" charset="-120"/>
                         </a:rPr>
                         <a:t>≥ 1</a:t>
                       </a:r>
                       <a:endParaRPr lang="en-US" sz="1100" dirty="0">
-                        <a:latin typeface="Calibri" charset="0"/>
-                        <a:ea typeface="Calibri" charset="0"/>
-                        <a:cs typeface="Calibri" charset="0"/>
+                        <a:latin typeface="Arial" charset="0"/>
+                        <a:ea typeface="Arial" charset="0"/>
+                        <a:cs typeface="Arial" charset="0"/>
                       </a:endParaRPr>
                     </a:p>
                   </a:txBody>
@@ -8662,20 +8486,20 @@
                         <a:buNone/>
                       </a:pPr>
                       <a:r>
-                        <a:rPr lang="en-US" sz="1100" dirty="0">
+                        <a:rPr lang="en-US" sz="1200" dirty="0">
                           <a:solidFill>
                             <a:srgbClr val="0F172A"/>
                           </a:solidFill>
-                          <a:latin typeface="Calibri" pitchFamily="34" charset="0"/>
-                          <a:ea typeface="Calibri" pitchFamily="34" charset="-122"/>
-                          <a:cs typeface="Calibri" pitchFamily="34" charset="-120"/>
+                          <a:latin typeface="Arial" pitchFamily="34" charset="0"/>
+                          <a:ea typeface="Arial" pitchFamily="34" charset="-122"/>
+                          <a:cs typeface="Arial" pitchFamily="34" charset="-120"/>
                         </a:rPr>
                         <a:t>E2E-07</a:t>
                       </a:r>
                       <a:endParaRPr lang="en-US" sz="1100" dirty="0">
-                        <a:latin typeface="Calibri" charset="0"/>
-                        <a:ea typeface="Calibri" charset="0"/>
-                        <a:cs typeface="Calibri" charset="0"/>
+                        <a:latin typeface="Arial" charset="0"/>
+                        <a:ea typeface="Arial" charset="0"/>
+                        <a:cs typeface="Arial" charset="0"/>
                       </a:endParaRPr>
                     </a:p>
                   </a:txBody>
@@ -8730,20 +8554,20 @@
                         <a:buNone/>
                       </a:pPr>
                       <a:r>
-                        <a:rPr lang="en-US" sz="1100" dirty="0">
+                        <a:rPr lang="en-US" sz="1200" dirty="0">
                           <a:solidFill>
                             <a:srgbClr val="0F172A"/>
                           </a:solidFill>
-                          <a:latin typeface="Calibri" pitchFamily="34" charset="0"/>
-                          <a:ea typeface="Calibri" pitchFamily="34" charset="-122"/>
-                          <a:cs typeface="Calibri" pitchFamily="34" charset="-120"/>
+                          <a:latin typeface="Arial" pitchFamily="34" charset="0"/>
+                          <a:ea typeface="Arial" pitchFamily="34" charset="-122"/>
+                          <a:cs typeface="Arial" pitchFamily="34" charset="-120"/>
                         </a:rPr>
                         <a:t>Không message mới vào dead-letter</a:t>
                       </a:r>
                       <a:endParaRPr lang="en-US" sz="1100" dirty="0">
-                        <a:latin typeface="Calibri" charset="0"/>
-                        <a:ea typeface="Calibri" charset="0"/>
-                        <a:cs typeface="Calibri" charset="0"/>
+                        <a:latin typeface="Arial" charset="0"/>
+                        <a:ea typeface="Arial" charset="0"/>
+                        <a:cs typeface="Arial" charset="0"/>
                       </a:endParaRPr>
                     </a:p>
                   </a:txBody>
@@ -8798,20 +8622,20 @@
                         <a:buNone/>
                       </a:pPr>
                       <a:r>
-                        <a:rPr lang="en-US" sz="1100" dirty="0">
+                        <a:rPr lang="en-US" sz="1200" dirty="0">
                           <a:solidFill>
                             <a:srgbClr val="0F172A"/>
                           </a:solidFill>
-                          <a:latin typeface="Calibri" pitchFamily="34" charset="0"/>
-                          <a:ea typeface="Calibri" pitchFamily="34" charset="-122"/>
-                          <a:cs typeface="Calibri" pitchFamily="34" charset="-120"/>
+                          <a:latin typeface="Arial" pitchFamily="34" charset="0"/>
+                          <a:ea typeface="Arial" pitchFamily="34" charset="-122"/>
+                          <a:cs typeface="Arial" pitchFamily="34" charset="-120"/>
                         </a:rPr>
                         <a:t>= 0</a:t>
                       </a:r>
                       <a:endParaRPr lang="en-US" sz="1100" dirty="0">
-                        <a:latin typeface="Calibri" charset="0"/>
-                        <a:ea typeface="Calibri" charset="0"/>
-                        <a:cs typeface="Calibri" charset="0"/>
+                        <a:latin typeface="Arial" charset="0"/>
+                        <a:ea typeface="Arial" charset="0"/>
+                        <a:cs typeface="Arial" charset="0"/>
                       </a:endParaRPr>
                     </a:p>
                   </a:txBody>
@@ -8868,20 +8692,20 @@
                         <a:buNone/>
                       </a:pPr>
                       <a:r>
-                        <a:rPr lang="en-US" sz="1100" dirty="0">
+                        <a:rPr lang="en-US" sz="1200" dirty="0">
                           <a:solidFill>
                             <a:srgbClr val="0F172A"/>
                           </a:solidFill>
-                          <a:latin typeface="Calibri" pitchFamily="34" charset="0"/>
-                          <a:ea typeface="Calibri" pitchFamily="34" charset="-122"/>
-                          <a:cs typeface="Calibri" pitchFamily="34" charset="-120"/>
+                          <a:latin typeface="Arial" pitchFamily="34" charset="0"/>
+                          <a:ea typeface="Arial" pitchFamily="34" charset="-122"/>
+                          <a:cs typeface="Arial" pitchFamily="34" charset="-120"/>
                         </a:rPr>
                         <a:t>E2E-08</a:t>
                       </a:r>
                       <a:endParaRPr lang="en-US" sz="1100" dirty="0">
-                        <a:latin typeface="Calibri" charset="0"/>
-                        <a:ea typeface="Calibri" charset="0"/>
-                        <a:cs typeface="Calibri" charset="0"/>
+                        <a:latin typeface="Arial" charset="0"/>
+                        <a:ea typeface="Arial" charset="0"/>
+                        <a:cs typeface="Arial" charset="0"/>
                       </a:endParaRPr>
                     </a:p>
                   </a:txBody>
@@ -8936,20 +8760,20 @@
                         <a:buNone/>
                       </a:pPr>
                       <a:r>
-                        <a:rPr lang="en-US" sz="1100" dirty="0">
+                        <a:rPr lang="en-US" sz="1200" dirty="0">
                           <a:solidFill>
                             <a:srgbClr val="0F172A"/>
                           </a:solidFill>
-                          <a:latin typeface="Calibri" pitchFamily="34" charset="0"/>
-                          <a:ea typeface="Calibri" pitchFamily="34" charset="-122"/>
-                          <a:cs typeface="Calibri" pitchFamily="34" charset="-120"/>
+                          <a:latin typeface="Arial" pitchFamily="34" charset="0"/>
+                          <a:ea typeface="Arial" pitchFamily="34" charset="-122"/>
+                          <a:cs typeface="Arial" pitchFamily="34" charset="-120"/>
                         </a:rPr>
-                        <a:t>internal.local (ngoài scope) không xuất hiện</a:t>
+                        <a:t>internal.local (ngoài scope): số bản ghi trong P5</a:t>
                       </a:r>
                       <a:endParaRPr lang="en-US" sz="1100" dirty="0">
-                        <a:latin typeface="Calibri" charset="0"/>
-                        <a:ea typeface="Calibri" charset="0"/>
-                        <a:cs typeface="Calibri" charset="0"/>
+                        <a:latin typeface="Arial" charset="0"/>
+                        <a:ea typeface="Arial" charset="0"/>
+                        <a:cs typeface="Arial" charset="0"/>
                       </a:endParaRPr>
                     </a:p>
                   </a:txBody>
@@ -9004,20 +8828,20 @@
                         <a:buNone/>
                       </a:pPr>
                       <a:r>
-                        <a:rPr lang="en-US" sz="1100" dirty="0">
+                        <a:rPr lang="en-US" sz="1200" dirty="0">
                           <a:solidFill>
                             <a:srgbClr val="0F172A"/>
                           </a:solidFill>
-                          <a:latin typeface="Calibri" pitchFamily="34" charset="0"/>
-                          <a:ea typeface="Calibri" pitchFamily="34" charset="-122"/>
-                          <a:cs typeface="Calibri" pitchFamily="34" charset="-120"/>
+                          <a:latin typeface="Arial" pitchFamily="34" charset="0"/>
+                          <a:ea typeface="Arial" pitchFamily="34" charset="-122"/>
+                          <a:cs typeface="Arial" pitchFamily="34" charset="-120"/>
                         </a:rPr>
-                        <a:t>đạt</a:t>
+                        <a:t>không tăng</a:t>
                       </a:r>
                       <a:endParaRPr lang="en-US" sz="1100" dirty="0">
-                        <a:latin typeface="Calibri" charset="0"/>
-                        <a:ea typeface="Calibri" charset="0"/>
-                        <a:cs typeface="Calibri" charset="0"/>
+                        <a:latin typeface="Arial" charset="0"/>
+                        <a:ea typeface="Arial" charset="0"/>
+                        <a:cs typeface="Arial" charset="0"/>
                       </a:endParaRPr>
                     </a:p>
                   </a:txBody>
@@ -9169,11 +8993,11 @@
                 <a:solidFill>
                   <a:schemeClr val="tx1"/>
                 </a:solidFill>
-                <a:latin typeface="Cambria" pitchFamily="34" charset="0"/>
-                <a:ea typeface="Cambria" pitchFamily="34" charset="-122"/>
-                <a:cs typeface="Cambria" pitchFamily="34" charset="-120"/>
+                <a:latin typeface="Arial" pitchFamily="34" charset="0"/>
+                <a:ea typeface="Arial" pitchFamily="34" charset="-122"/>
+                <a:cs typeface="Arial" pitchFamily="34" charset="-120"/>
               </a:rPr>
-              <a:t>Kịch bản 2: đo độ chính xác so với ModSecurity + CRS</a:t>
+              <a:t>Kịch bản 2: so sánh với ModSecurity CRS</a:t>
             </a:r>
             <a:endParaRPr lang="en-US" sz="2600" dirty="0"/>
           </a:p>
@@ -9238,13 +9062,13 @@
               <a:buNone/>
             </a:pPr>
             <a:r>
-              <a:rPr lang="en-US" sz="3200" b="1" dirty="0">
+              <a:rPr lang="en-US" sz="3200" dirty="0">
                 <a:solidFill>
                   <a:srgbClr val="F59E0B"/>
                 </a:solidFill>
-                <a:latin typeface="Cambria" pitchFamily="34" charset="0"/>
-                <a:ea typeface="Cambria" pitchFamily="34" charset="-122"/>
-                <a:cs typeface="Cambria" pitchFamily="34" charset="-120"/>
+                <a:latin typeface="Arial" pitchFamily="34" charset="0"/>
+                <a:ea typeface="Arial" pitchFamily="34" charset="-122"/>
+                <a:cs typeface="Arial" pitchFamily="34" charset="-120"/>
               </a:rPr>
               <a:t>0,944</a:t>
             </a:r>
@@ -9277,7 +9101,7 @@
               <a:buNone/>
             </a:pPr>
             <a:r>
-              <a:rPr lang="en-US" sz="1200" dirty="0">
+              <a:rPr lang="en-US" sz="1300" dirty="0">
                 <a:solidFill>
                   <a:srgbClr val="E2E8F0"/>
                 </a:solidFill>
@@ -9347,13 +9171,13 @@
               <a:buNone/>
             </a:pPr>
             <a:r>
-              <a:rPr lang="en-US" sz="3200" b="1" dirty="0">
+              <a:rPr lang="en-US" sz="3200" dirty="0">
                 <a:solidFill>
                   <a:srgbClr val="64748B"/>
                 </a:solidFill>
-                <a:latin typeface="Cambria" pitchFamily="34" charset="0"/>
-                <a:ea typeface="Cambria" pitchFamily="34" charset="-122"/>
-                <a:cs typeface="Cambria" pitchFamily="34" charset="-120"/>
+                <a:latin typeface="Arial" pitchFamily="34" charset="0"/>
+                <a:ea typeface="Arial" pitchFamily="34" charset="-122"/>
+                <a:cs typeface="Arial" pitchFamily="34" charset="-120"/>
               </a:rPr>
               <a:t>0,774</a:t>
             </a:r>
@@ -9386,7 +9210,7 @@
               <a:buNone/>
             </a:pPr>
             <a:r>
-              <a:rPr lang="en-US" sz="1200" dirty="0">
+              <a:rPr lang="en-US" sz="1300" dirty="0">
                 <a:solidFill>
                   <a:srgbClr val="1E293B"/>
                 </a:solidFill>
@@ -9456,13 +9280,13 @@
               <a:buNone/>
             </a:pPr>
             <a:r>
-              <a:rPr lang="en-US" sz="3200" b="1" dirty="0">
+              <a:rPr lang="en-US" sz="3200" dirty="0">
                 <a:solidFill>
                   <a:srgbClr val="10B981"/>
                 </a:solidFill>
-                <a:latin typeface="Cambria" pitchFamily="34" charset="0"/>
-                <a:ea typeface="Cambria" pitchFamily="34" charset="-122"/>
-                <a:cs typeface="Cambria" pitchFamily="34" charset="-120"/>
+                <a:latin typeface="Arial" pitchFamily="34" charset="0"/>
+                <a:ea typeface="Arial" pitchFamily="34" charset="-122"/>
+                <a:cs typeface="Arial" pitchFamily="34" charset="-120"/>
               </a:rPr>
               <a:t>0,004</a:t>
             </a:r>
@@ -9495,7 +9319,7 @@
               <a:buNone/>
             </a:pPr>
             <a:r>
-              <a:rPr lang="en-US" sz="1200" dirty="0">
+              <a:rPr lang="en-US" sz="1300" dirty="0">
                 <a:solidFill>
                   <a:srgbClr val="1E293B"/>
                 </a:solidFill>
@@ -9547,12 +9371,12 @@
               <a:buNone/>
             </a:pPr>
             <a:r>
-              <a:rPr lang="en-US" sz="1150" dirty="0">
+              <a:rPr lang="en-US" sz="1300" dirty="0">
                 <a:solidFill>
                   <a:schemeClr val="tx2"/>
                 </a:solidFill>
               </a:rPr>
-              <a:t>Precision 0,985 · F1 0,964 (CRS: 0,981 · 0,865). Hơn CRS ở RFI, command injection, SSTI; kém ở SQLi, XSS.</a:t>
+              <a:t>Precision 0,985, F1 0,964 (CRS: 0,981 và 0,865). Recall cao hơn CRS ở RFI, command injection, SSTI; thấp hơn ở SQLi, XSS.</a:t>
             </a:r>
             <a:endParaRPr lang="en-US" sz="1150" dirty="0"/>
           </a:p>
@@ -9659,11 +9483,11 @@
                 <a:solidFill>
                   <a:schemeClr val="tx1"/>
                 </a:solidFill>
-                <a:latin typeface="Cambria" pitchFamily="34" charset="0"/>
-                <a:ea typeface="Cambria" pitchFamily="34" charset="-122"/>
-                <a:cs typeface="Cambria" pitchFamily="34" charset="-120"/>
+                <a:latin typeface="Arial" pitchFamily="34" charset="0"/>
+                <a:ea typeface="Arial" pitchFamily="34" charset="-122"/>
+                <a:cs typeface="Arial" pitchFamily="34" charset="-120"/>
               </a:rPr>
-              <a:t>Tín hiệu hành vi bổ sung đúng phần rule không thấy</a:t>
+              <a:t>Tín hiệu hành vi bổ sung phần rule bỏ sót</a:t>
             </a:r>
             <a:endParaRPr lang="en-US" sz="2600" dirty="0"/>
           </a:p>
@@ -9710,20 +9534,20 @@
                         <a:buNone/>
                       </a:pPr>
                       <a:r>
-                        <a:rPr lang="en-US" sz="1200" b="1" dirty="0">
+                        <a:rPr lang="en-US" sz="1300" dirty="0">
                           <a:solidFill>
                             <a:srgbClr val="FFFFFF"/>
                           </a:solidFill>
-                          <a:latin typeface="Calibri" pitchFamily="34" charset="0"/>
-                          <a:ea typeface="Calibri" pitchFamily="34" charset="-122"/>
-                          <a:cs typeface="Calibri" pitchFamily="34" charset="-120"/>
+                          <a:latin typeface="Arial" pitchFamily="34" charset="0"/>
+                          <a:ea typeface="Arial" pitchFamily="34" charset="-122"/>
+                          <a:cs typeface="Arial" pitchFamily="34" charset="-120"/>
                         </a:rPr>
                         <a:t>Cấu hình</a:t>
                       </a:r>
                       <a:endParaRPr lang="en-US" sz="1200" dirty="0">
-                        <a:latin typeface="Calibri" charset="0"/>
-                        <a:ea typeface="Calibri" charset="0"/>
-                        <a:cs typeface="Calibri" charset="0"/>
+                        <a:latin typeface="Arial" charset="0"/>
+                        <a:ea typeface="Arial" charset="0"/>
+                        <a:cs typeface="Arial" charset="0"/>
                       </a:endParaRPr>
                     </a:p>
                   </a:txBody>
@@ -9778,20 +9602,20 @@
                         <a:buNone/>
                       </a:pPr>
                       <a:r>
-                        <a:rPr lang="en-US" sz="1200" b="1" dirty="0">
+                        <a:rPr lang="en-US" sz="1300" dirty="0">
                           <a:solidFill>
                             <a:srgbClr val="FFFFFF"/>
                           </a:solidFill>
-                          <a:latin typeface="Calibri" pitchFamily="34" charset="0"/>
-                          <a:ea typeface="Calibri" pitchFamily="34" charset="-122"/>
-                          <a:cs typeface="Calibri" pitchFamily="34" charset="-120"/>
+                          <a:latin typeface="Arial" pitchFamily="34" charset="0"/>
+                          <a:ea typeface="Arial" pitchFamily="34" charset="-122"/>
+                          <a:cs typeface="Arial" pitchFamily="34" charset="-120"/>
                         </a:rPr>
                         <a:t>Nguồn độc hại bị cảnh báo</a:t>
                       </a:r>
                       <a:endParaRPr lang="en-US" sz="1200" dirty="0">
-                        <a:latin typeface="Calibri" charset="0"/>
-                        <a:ea typeface="Calibri" charset="0"/>
-                        <a:cs typeface="Calibri" charset="0"/>
+                        <a:latin typeface="Arial" charset="0"/>
+                        <a:ea typeface="Arial" charset="0"/>
+                        <a:cs typeface="Arial" charset="0"/>
                       </a:endParaRPr>
                     </a:p>
                   </a:txBody>
@@ -9846,20 +9670,20 @@
                         <a:buNone/>
                       </a:pPr>
                       <a:r>
-                        <a:rPr lang="en-US" sz="1200" b="1" dirty="0">
+                        <a:rPr lang="en-US" sz="1300" dirty="0">
                           <a:solidFill>
                             <a:srgbClr val="FFFFFF"/>
                           </a:solidFill>
-                          <a:latin typeface="Calibri" pitchFamily="34" charset="0"/>
-                          <a:ea typeface="Calibri" pitchFamily="34" charset="-122"/>
-                          <a:cs typeface="Calibri" pitchFamily="34" charset="-120"/>
+                          <a:latin typeface="Arial" pitchFamily="34" charset="0"/>
+                          <a:ea typeface="Arial" pitchFamily="34" charset="-122"/>
+                          <a:cs typeface="Arial" pitchFamily="34" charset="-120"/>
                         </a:rPr>
                         <a:t>Báo nhầm</a:t>
                       </a:r>
                       <a:endParaRPr lang="en-US" sz="1200" dirty="0">
-                        <a:latin typeface="Calibri" charset="0"/>
-                        <a:ea typeface="Calibri" charset="0"/>
-                        <a:cs typeface="Calibri" charset="0"/>
+                        <a:latin typeface="Arial" charset="0"/>
+                        <a:ea typeface="Arial" charset="0"/>
+                        <a:cs typeface="Arial" charset="0"/>
                       </a:endParaRPr>
                     </a:p>
                   </a:txBody>
@@ -9914,20 +9738,20 @@
                         <a:buNone/>
                       </a:pPr>
                       <a:r>
-                        <a:rPr lang="en-US" sz="1200" b="1" dirty="0">
+                        <a:rPr lang="en-US" sz="1300" dirty="0">
                           <a:solidFill>
                             <a:srgbClr val="FFFFFF"/>
                           </a:solidFill>
-                          <a:latin typeface="Calibri" pitchFamily="34" charset="0"/>
-                          <a:ea typeface="Calibri" pitchFamily="34" charset="-122"/>
-                          <a:cs typeface="Calibri" pitchFamily="34" charset="-120"/>
+                          <a:latin typeface="Arial" pitchFamily="34" charset="0"/>
+                          <a:ea typeface="Arial" pitchFamily="34" charset="-122"/>
+                          <a:cs typeface="Arial" pitchFamily="34" charset="-120"/>
                         </a:rPr>
                         <a:t>Payload</a:t>
                       </a:r>
                       <a:endParaRPr lang="en-US" sz="1200" dirty="0">
-                        <a:latin typeface="Calibri" charset="0"/>
-                        <a:ea typeface="Calibri" charset="0"/>
-                        <a:cs typeface="Calibri" charset="0"/>
+                        <a:latin typeface="Arial" charset="0"/>
+                        <a:ea typeface="Arial" charset="0"/>
+                        <a:cs typeface="Arial" charset="0"/>
                       </a:endParaRPr>
                     </a:p>
                   </a:txBody>
@@ -9982,20 +9806,20 @@
                         <a:buNone/>
                       </a:pPr>
                       <a:r>
-                        <a:rPr lang="en-US" sz="1200" b="1" dirty="0">
+                        <a:rPr lang="en-US" sz="1300" dirty="0">
                           <a:solidFill>
                             <a:srgbClr val="FFFFFF"/>
                           </a:solidFill>
-                          <a:latin typeface="Calibri" pitchFamily="34" charset="0"/>
-                          <a:ea typeface="Calibri" pitchFamily="34" charset="-122"/>
-                          <a:cs typeface="Calibri" pitchFamily="34" charset="-120"/>
+                          <a:latin typeface="Arial" pitchFamily="34" charset="0"/>
+                          <a:ea typeface="Arial" pitchFamily="34" charset="-122"/>
+                          <a:cs typeface="Arial" pitchFamily="34" charset="-120"/>
                         </a:rPr>
                         <a:t>Dò quét</a:t>
                       </a:r>
                       <a:endParaRPr lang="en-US" sz="1200" dirty="0">
-                        <a:latin typeface="Calibri" charset="0"/>
-                        <a:ea typeface="Calibri" charset="0"/>
-                        <a:cs typeface="Calibri" charset="0"/>
+                        <a:latin typeface="Arial" charset="0"/>
+                        <a:ea typeface="Arial" charset="0"/>
+                        <a:cs typeface="Arial" charset="0"/>
                       </a:endParaRPr>
                     </a:p>
                   </a:txBody>
@@ -10050,20 +9874,20 @@
                         <a:buNone/>
                       </a:pPr>
                       <a:r>
-                        <a:rPr lang="en-US" sz="1200" b="1" dirty="0">
+                        <a:rPr lang="en-US" sz="1300" dirty="0">
                           <a:solidFill>
                             <a:srgbClr val="FFFFFF"/>
                           </a:solidFill>
-                          <a:latin typeface="Calibri" pitchFamily="34" charset="0"/>
-                          <a:ea typeface="Calibri" pitchFamily="34" charset="-122"/>
-                          <a:cs typeface="Calibri" pitchFamily="34" charset="-120"/>
+                          <a:latin typeface="Arial" pitchFamily="34" charset="0"/>
+                          <a:ea typeface="Arial" pitchFamily="34" charset="-122"/>
+                          <a:cs typeface="Arial" pitchFamily="34" charset="-120"/>
                         </a:rPr>
                         <a:t>Flood</a:t>
                       </a:r>
                       <a:endParaRPr lang="en-US" sz="1200" dirty="0">
-                        <a:latin typeface="Calibri" charset="0"/>
-                        <a:ea typeface="Calibri" charset="0"/>
-                        <a:cs typeface="Calibri" charset="0"/>
+                        <a:latin typeface="Arial" charset="0"/>
+                        <a:ea typeface="Arial" charset="0"/>
+                        <a:cs typeface="Arial" charset="0"/>
                       </a:endParaRPr>
                     </a:p>
                   </a:txBody>
@@ -10118,20 +9942,20 @@
                         <a:buNone/>
                       </a:pPr>
                       <a:r>
-                        <a:rPr lang="en-US" sz="1200" b="1" dirty="0">
+                        <a:rPr lang="en-US" sz="1300" dirty="0">
                           <a:solidFill>
                             <a:srgbClr val="FFFFFF"/>
                           </a:solidFill>
-                          <a:latin typeface="Calibri" pitchFamily="34" charset="0"/>
-                          <a:ea typeface="Calibri" pitchFamily="34" charset="-122"/>
-                          <a:cs typeface="Calibri" pitchFamily="34" charset="-120"/>
+                          <a:latin typeface="Arial" pitchFamily="34" charset="0"/>
+                          <a:ea typeface="Arial" pitchFamily="34" charset="-122"/>
+                          <a:cs typeface="Arial" pitchFamily="34" charset="-120"/>
                         </a:rPr>
                         <a:t>Trễ trung vị</a:t>
                       </a:r>
                       <a:endParaRPr lang="en-US" sz="1200" dirty="0">
-                        <a:latin typeface="Calibri" charset="0"/>
-                        <a:ea typeface="Calibri" charset="0"/>
-                        <a:cs typeface="Calibri" charset="0"/>
+                        <a:latin typeface="Arial" charset="0"/>
+                        <a:ea typeface="Arial" charset="0"/>
+                        <a:cs typeface="Arial" charset="0"/>
                       </a:endParaRPr>
                     </a:p>
                   </a:txBody>
@@ -10188,20 +10012,20 @@
                         <a:buNone/>
                       </a:pPr>
                       <a:r>
-                        <a:rPr lang="en-US" sz="1200" dirty="0">
+                        <a:rPr lang="en-US" sz="1300" dirty="0">
                           <a:solidFill>
                             <a:srgbClr val="0F172A"/>
                           </a:solidFill>
-                          <a:latin typeface="Calibri" pitchFamily="34" charset="0"/>
-                          <a:ea typeface="Calibri" pitchFamily="34" charset="-122"/>
-                          <a:cs typeface="Calibri" pitchFamily="34" charset="-120"/>
+                          <a:latin typeface="Arial" pitchFamily="34" charset="0"/>
+                          <a:ea typeface="Arial" pitchFamily="34" charset="-122"/>
+                          <a:cs typeface="Arial" pitchFamily="34" charset="-120"/>
                         </a:rPr>
-                        <a:t>A – chỉ rule</a:t>
+                        <a:t>A: chỉ rule</a:t>
                       </a:r>
                       <a:endParaRPr lang="en-US" sz="1200" dirty="0">
-                        <a:latin typeface="Calibri" charset="0"/>
-                        <a:ea typeface="Calibri" charset="0"/>
-                        <a:cs typeface="Calibri" charset="0"/>
+                        <a:latin typeface="Arial" charset="0"/>
+                        <a:ea typeface="Arial" charset="0"/>
+                        <a:cs typeface="Arial" charset="0"/>
                       </a:endParaRPr>
                     </a:p>
                   </a:txBody>
@@ -10256,20 +10080,20 @@
                         <a:buNone/>
                       </a:pPr>
                       <a:r>
-                        <a:rPr lang="en-US" sz="1200" dirty="0">
+                        <a:rPr lang="en-US" sz="1300" dirty="0">
                           <a:solidFill>
                             <a:srgbClr val="0F172A"/>
                           </a:solidFill>
-                          <a:latin typeface="Calibri" pitchFamily="34" charset="0"/>
-                          <a:ea typeface="Calibri" pitchFamily="34" charset="-122"/>
-                          <a:cs typeface="Calibri" pitchFamily="34" charset="-120"/>
+                          <a:latin typeface="Arial" pitchFamily="34" charset="0"/>
+                          <a:ea typeface="Arial" pitchFamily="34" charset="-122"/>
+                          <a:cs typeface="Arial" pitchFamily="34" charset="-120"/>
                         </a:rPr>
                         <a:t>31/36</a:t>
                       </a:r>
                       <a:endParaRPr lang="en-US" sz="1200" dirty="0">
-                        <a:latin typeface="Calibri" charset="0"/>
-                        <a:ea typeface="Calibri" charset="0"/>
-                        <a:cs typeface="Calibri" charset="0"/>
+                        <a:latin typeface="Arial" charset="0"/>
+                        <a:ea typeface="Arial" charset="0"/>
+                        <a:cs typeface="Arial" charset="0"/>
                       </a:endParaRPr>
                     </a:p>
                   </a:txBody>
@@ -10324,20 +10148,20 @@
                         <a:buNone/>
                       </a:pPr>
                       <a:r>
-                        <a:rPr lang="en-US" sz="1200" dirty="0">
+                        <a:rPr lang="en-US" sz="1300" dirty="0">
                           <a:solidFill>
                             <a:srgbClr val="0F172A"/>
                           </a:solidFill>
-                          <a:latin typeface="Calibri" pitchFamily="34" charset="0"/>
-                          <a:ea typeface="Calibri" pitchFamily="34" charset="-122"/>
-                          <a:cs typeface="Calibri" pitchFamily="34" charset="-120"/>
+                          <a:latin typeface="Arial" pitchFamily="34" charset="0"/>
+                          <a:ea typeface="Arial" pitchFamily="34" charset="-122"/>
+                          <a:cs typeface="Arial" pitchFamily="34" charset="-120"/>
                         </a:rPr>
                         <a:t>2/85</a:t>
                       </a:r>
                       <a:endParaRPr lang="en-US" sz="1200" dirty="0">
-                        <a:latin typeface="Calibri" charset="0"/>
-                        <a:ea typeface="Calibri" charset="0"/>
-                        <a:cs typeface="Calibri" charset="0"/>
+                        <a:latin typeface="Arial" charset="0"/>
+                        <a:ea typeface="Arial" charset="0"/>
+                        <a:cs typeface="Arial" charset="0"/>
                       </a:endParaRPr>
                     </a:p>
                   </a:txBody>
@@ -10392,20 +10216,20 @@
                         <a:buNone/>
                       </a:pPr>
                       <a:r>
-                        <a:rPr lang="en-US" sz="1200" dirty="0">
+                        <a:rPr lang="en-US" sz="1300" dirty="0">
                           <a:solidFill>
                             <a:srgbClr val="0F172A"/>
                           </a:solidFill>
-                          <a:latin typeface="Calibri" pitchFamily="34" charset="0"/>
-                          <a:ea typeface="Calibri" pitchFamily="34" charset="-122"/>
-                          <a:cs typeface="Calibri" pitchFamily="34" charset="-120"/>
+                          <a:latin typeface="Arial" pitchFamily="34" charset="0"/>
+                          <a:ea typeface="Arial" pitchFamily="34" charset="-122"/>
+                          <a:cs typeface="Arial" pitchFamily="34" charset="-120"/>
                         </a:rPr>
                         <a:t>29/30</a:t>
                       </a:r>
                       <a:endParaRPr lang="en-US" sz="1200" dirty="0">
-                        <a:latin typeface="Calibri" charset="0"/>
-                        <a:ea typeface="Calibri" charset="0"/>
-                        <a:cs typeface="Calibri" charset="0"/>
+                        <a:latin typeface="Arial" charset="0"/>
+                        <a:ea typeface="Arial" charset="0"/>
+                        <a:cs typeface="Arial" charset="0"/>
                       </a:endParaRPr>
                     </a:p>
                   </a:txBody>
@@ -10460,20 +10284,20 @@
                         <a:buNone/>
                       </a:pPr>
                       <a:r>
-                        <a:rPr lang="en-US" sz="1200" dirty="0">
+                        <a:rPr lang="en-US" sz="1300" dirty="0">
                           <a:solidFill>
                             <a:srgbClr val="0F172A"/>
                           </a:solidFill>
-                          <a:latin typeface="Calibri" pitchFamily="34" charset="0"/>
-                          <a:ea typeface="Calibri" pitchFamily="34" charset="-122"/>
-                          <a:cs typeface="Calibri" pitchFamily="34" charset="-120"/>
+                          <a:latin typeface="Arial" pitchFamily="34" charset="0"/>
+                          <a:ea typeface="Arial" pitchFamily="34" charset="-122"/>
+                          <a:cs typeface="Arial" pitchFamily="34" charset="-120"/>
                         </a:rPr>
                         <a:t>2/4</a:t>
                       </a:r>
                       <a:endParaRPr lang="en-US" sz="1200" dirty="0">
-                        <a:latin typeface="Calibri" charset="0"/>
-                        <a:ea typeface="Calibri" charset="0"/>
-                        <a:cs typeface="Calibri" charset="0"/>
+                        <a:latin typeface="Arial" charset="0"/>
+                        <a:ea typeface="Arial" charset="0"/>
+                        <a:cs typeface="Arial" charset="0"/>
                       </a:endParaRPr>
                     </a:p>
                   </a:txBody>
@@ -10528,20 +10352,20 @@
                         <a:buNone/>
                       </a:pPr>
                       <a:r>
-                        <a:rPr lang="en-US" sz="1200" dirty="0">
+                        <a:rPr lang="en-US" sz="1300" dirty="0">
                           <a:solidFill>
                             <a:srgbClr val="0F172A"/>
                           </a:solidFill>
-                          <a:latin typeface="Calibri" pitchFamily="34" charset="0"/>
-                          <a:ea typeface="Calibri" pitchFamily="34" charset="-122"/>
-                          <a:cs typeface="Calibri" pitchFamily="34" charset="-120"/>
+                          <a:latin typeface="Arial" pitchFamily="34" charset="0"/>
+                          <a:ea typeface="Arial" pitchFamily="34" charset="-122"/>
+                          <a:cs typeface="Arial" pitchFamily="34" charset="-120"/>
                         </a:rPr>
                         <a:t>0/2</a:t>
                       </a:r>
                       <a:endParaRPr lang="en-US" sz="1200" dirty="0">
-                        <a:latin typeface="Calibri" charset="0"/>
-                        <a:ea typeface="Calibri" charset="0"/>
-                        <a:cs typeface="Calibri" charset="0"/>
+                        <a:latin typeface="Arial" charset="0"/>
+                        <a:ea typeface="Arial" charset="0"/>
+                        <a:cs typeface="Arial" charset="0"/>
                       </a:endParaRPr>
                     </a:p>
                   </a:txBody>
@@ -10596,20 +10420,20 @@
                         <a:buNone/>
                       </a:pPr>
                       <a:r>
-                        <a:rPr lang="en-US" sz="1200" dirty="0">
+                        <a:rPr lang="en-US" sz="1300" dirty="0">
                           <a:solidFill>
                             <a:srgbClr val="0F172A"/>
                           </a:solidFill>
-                          <a:latin typeface="Calibri" pitchFamily="34" charset="0"/>
-                          <a:ea typeface="Calibri" pitchFamily="34" charset="-122"/>
-                          <a:cs typeface="Calibri" pitchFamily="34" charset="-120"/>
+                          <a:latin typeface="Arial" pitchFamily="34" charset="0"/>
+                          <a:ea typeface="Arial" pitchFamily="34" charset="-122"/>
+                          <a:cs typeface="Arial" pitchFamily="34" charset="-120"/>
                         </a:rPr>
                         <a:t>0 s</a:t>
                       </a:r>
                       <a:endParaRPr lang="en-US" sz="1200" dirty="0">
-                        <a:latin typeface="Calibri" charset="0"/>
-                        <a:ea typeface="Calibri" charset="0"/>
-                        <a:cs typeface="Calibri" charset="0"/>
+                        <a:latin typeface="Arial" charset="0"/>
+                        <a:ea typeface="Arial" charset="0"/>
+                        <a:cs typeface="Arial" charset="0"/>
                       </a:endParaRPr>
                     </a:p>
                   </a:txBody>
@@ -10666,20 +10490,20 @@
                         <a:buNone/>
                       </a:pPr>
                       <a:r>
-                        <a:rPr lang="en-US" sz="1200" dirty="0">
+                        <a:rPr lang="en-US" sz="1300" dirty="0">
                           <a:solidFill>
                             <a:srgbClr val="0F172A"/>
                           </a:solidFill>
-                          <a:latin typeface="Calibri" pitchFamily="34" charset="0"/>
-                          <a:ea typeface="Calibri" pitchFamily="34" charset="-122"/>
-                          <a:cs typeface="Calibri" pitchFamily="34" charset="-120"/>
+                          <a:latin typeface="Arial" pitchFamily="34" charset="0"/>
+                          <a:ea typeface="Arial" pitchFamily="34" charset="-122"/>
+                          <a:cs typeface="Arial" pitchFamily="34" charset="-120"/>
                         </a:rPr>
-                        <a:t>B – chỉ hành vi</a:t>
+                        <a:t>B: chỉ hành vi</a:t>
                       </a:r>
                       <a:endParaRPr lang="en-US" sz="1200" dirty="0">
-                        <a:latin typeface="Calibri" charset="0"/>
-                        <a:ea typeface="Calibri" charset="0"/>
-                        <a:cs typeface="Calibri" charset="0"/>
+                        <a:latin typeface="Arial" charset="0"/>
+                        <a:ea typeface="Arial" charset="0"/>
+                        <a:cs typeface="Arial" charset="0"/>
                       </a:endParaRPr>
                     </a:p>
                   </a:txBody>
@@ -10734,20 +10558,20 @@
                         <a:buNone/>
                       </a:pPr>
                       <a:r>
-                        <a:rPr lang="en-US" sz="1200" dirty="0">
+                        <a:rPr lang="en-US" sz="1300" dirty="0">
                           <a:solidFill>
                             <a:srgbClr val="0F172A"/>
                           </a:solidFill>
-                          <a:latin typeface="Calibri" pitchFamily="34" charset="0"/>
-                          <a:ea typeface="Calibri" pitchFamily="34" charset="-122"/>
-                          <a:cs typeface="Calibri" pitchFamily="34" charset="-120"/>
+                          <a:latin typeface="Arial" pitchFamily="34" charset="0"/>
+                          <a:ea typeface="Arial" pitchFamily="34" charset="-122"/>
+                          <a:cs typeface="Arial" pitchFamily="34" charset="-120"/>
                         </a:rPr>
                         <a:t>6/36</a:t>
                       </a:r>
                       <a:endParaRPr lang="en-US" sz="1200" dirty="0">
-                        <a:latin typeface="Calibri" charset="0"/>
-                        <a:ea typeface="Calibri" charset="0"/>
-                        <a:cs typeface="Calibri" charset="0"/>
+                        <a:latin typeface="Arial" charset="0"/>
+                        <a:ea typeface="Arial" charset="0"/>
+                        <a:cs typeface="Arial" charset="0"/>
                       </a:endParaRPr>
                     </a:p>
                   </a:txBody>
@@ -10802,20 +10626,20 @@
                         <a:buNone/>
                       </a:pPr>
                       <a:r>
-                        <a:rPr lang="en-US" sz="1200" dirty="0">
+                        <a:rPr lang="en-US" sz="1300" dirty="0">
                           <a:solidFill>
                             <a:srgbClr val="0F172A"/>
                           </a:solidFill>
-                          <a:latin typeface="Calibri" pitchFamily="34" charset="0"/>
-                          <a:ea typeface="Calibri" pitchFamily="34" charset="-122"/>
-                          <a:cs typeface="Calibri" pitchFamily="34" charset="-120"/>
+                          <a:latin typeface="Arial" pitchFamily="34" charset="0"/>
+                          <a:ea typeface="Arial" pitchFamily="34" charset="-122"/>
+                          <a:cs typeface="Arial" pitchFamily="34" charset="-120"/>
                         </a:rPr>
                         <a:t>0/85</a:t>
                       </a:r>
                       <a:endParaRPr lang="en-US" sz="1200" dirty="0">
-                        <a:latin typeface="Calibri" charset="0"/>
-                        <a:ea typeface="Calibri" charset="0"/>
-                        <a:cs typeface="Calibri" charset="0"/>
+                        <a:latin typeface="Arial" charset="0"/>
+                        <a:ea typeface="Arial" charset="0"/>
+                        <a:cs typeface="Arial" charset="0"/>
                       </a:endParaRPr>
                     </a:p>
                   </a:txBody>
@@ -10870,20 +10694,20 @@
                         <a:buNone/>
                       </a:pPr>
                       <a:r>
-                        <a:rPr lang="en-US" sz="1200" dirty="0">
+                        <a:rPr lang="en-US" sz="1300" dirty="0">
                           <a:solidFill>
                             <a:srgbClr val="0F172A"/>
                           </a:solidFill>
-                          <a:latin typeface="Calibri" pitchFamily="34" charset="0"/>
-                          <a:ea typeface="Calibri" pitchFamily="34" charset="-122"/>
-                          <a:cs typeface="Calibri" pitchFamily="34" charset="-120"/>
+                          <a:latin typeface="Arial" pitchFamily="34" charset="0"/>
+                          <a:ea typeface="Arial" pitchFamily="34" charset="-122"/>
+                          <a:cs typeface="Arial" pitchFamily="34" charset="-120"/>
                         </a:rPr>
                         <a:t>0/30</a:t>
                       </a:r>
                       <a:endParaRPr lang="en-US" sz="1200" dirty="0">
-                        <a:latin typeface="Calibri" charset="0"/>
-                        <a:ea typeface="Calibri" charset="0"/>
-                        <a:cs typeface="Calibri" charset="0"/>
+                        <a:latin typeface="Arial" charset="0"/>
+                        <a:ea typeface="Arial" charset="0"/>
+                        <a:cs typeface="Arial" charset="0"/>
                       </a:endParaRPr>
                     </a:p>
                   </a:txBody>
@@ -10938,20 +10762,20 @@
                         <a:buNone/>
                       </a:pPr>
                       <a:r>
-                        <a:rPr lang="en-US" sz="1200" dirty="0">
+                        <a:rPr lang="en-US" sz="1300" dirty="0">
                           <a:solidFill>
                             <a:srgbClr val="0F172A"/>
                           </a:solidFill>
-                          <a:latin typeface="Calibri" pitchFamily="34" charset="0"/>
-                          <a:ea typeface="Calibri" pitchFamily="34" charset="-122"/>
-                          <a:cs typeface="Calibri" pitchFamily="34" charset="-120"/>
+                          <a:latin typeface="Arial" pitchFamily="34" charset="0"/>
+                          <a:ea typeface="Arial" pitchFamily="34" charset="-122"/>
+                          <a:cs typeface="Arial" pitchFamily="34" charset="-120"/>
                         </a:rPr>
                         <a:t>4/4</a:t>
                       </a:r>
                       <a:endParaRPr lang="en-US" sz="1200" dirty="0">
-                        <a:latin typeface="Calibri" charset="0"/>
-                        <a:ea typeface="Calibri" charset="0"/>
-                        <a:cs typeface="Calibri" charset="0"/>
+                        <a:latin typeface="Arial" charset="0"/>
+                        <a:ea typeface="Arial" charset="0"/>
+                        <a:cs typeface="Arial" charset="0"/>
                       </a:endParaRPr>
                     </a:p>
                   </a:txBody>
@@ -11006,20 +10830,20 @@
                         <a:buNone/>
                       </a:pPr>
                       <a:r>
-                        <a:rPr lang="en-US" sz="1200" dirty="0">
+                        <a:rPr lang="en-US" sz="1300" dirty="0">
                           <a:solidFill>
                             <a:srgbClr val="0F172A"/>
                           </a:solidFill>
-                          <a:latin typeface="Calibri" pitchFamily="34" charset="0"/>
-                          <a:ea typeface="Calibri" pitchFamily="34" charset="-122"/>
-                          <a:cs typeface="Calibri" pitchFamily="34" charset="-120"/>
+                          <a:latin typeface="Arial" pitchFamily="34" charset="0"/>
+                          <a:ea typeface="Arial" pitchFamily="34" charset="-122"/>
+                          <a:cs typeface="Arial" pitchFamily="34" charset="-120"/>
                         </a:rPr>
                         <a:t>2/2</a:t>
                       </a:r>
                       <a:endParaRPr lang="en-US" sz="1200" dirty="0">
-                        <a:latin typeface="Calibri" charset="0"/>
-                        <a:ea typeface="Calibri" charset="0"/>
-                        <a:cs typeface="Calibri" charset="0"/>
+                        <a:latin typeface="Arial" charset="0"/>
+                        <a:ea typeface="Arial" charset="0"/>
+                        <a:cs typeface="Arial" charset="0"/>
                       </a:endParaRPr>
                     </a:p>
                   </a:txBody>
@@ -11074,20 +10898,20 @@
                         <a:buNone/>
                       </a:pPr>
                       <a:r>
-                        <a:rPr lang="en-US" sz="1200" dirty="0">
+                        <a:rPr lang="en-US" sz="1300" dirty="0">
                           <a:solidFill>
                             <a:srgbClr val="0F172A"/>
                           </a:solidFill>
-                          <a:latin typeface="Calibri" pitchFamily="34" charset="0"/>
-                          <a:ea typeface="Calibri" pitchFamily="34" charset="-122"/>
-                          <a:cs typeface="Calibri" pitchFamily="34" charset="-120"/>
+                          <a:latin typeface="Arial" pitchFamily="34" charset="0"/>
+                          <a:ea typeface="Arial" pitchFamily="34" charset="-122"/>
+                          <a:cs typeface="Arial" pitchFamily="34" charset="-120"/>
                         </a:rPr>
                         <a:t>8,1 s</a:t>
                       </a:r>
                       <a:endParaRPr lang="en-US" sz="1200" dirty="0">
-                        <a:latin typeface="Calibri" charset="0"/>
-                        <a:ea typeface="Calibri" charset="0"/>
-                        <a:cs typeface="Calibri" charset="0"/>
+                        <a:latin typeface="Arial" charset="0"/>
+                        <a:ea typeface="Arial" charset="0"/>
+                        <a:cs typeface="Arial" charset="0"/>
                       </a:endParaRPr>
                     </a:p>
                   </a:txBody>
@@ -11144,20 +10968,20 @@
                         <a:buNone/>
                       </a:pPr>
                       <a:r>
-                        <a:rPr lang="en-US" sz="1200" dirty="0">
+                        <a:rPr lang="en-US" sz="1300" dirty="0">
                           <a:solidFill>
                             <a:srgbClr val="0F172A"/>
                           </a:solidFill>
-                          <a:latin typeface="Calibri" pitchFamily="34" charset="0"/>
-                          <a:ea typeface="Calibri" pitchFamily="34" charset="-122"/>
-                          <a:cs typeface="Calibri" pitchFamily="34" charset="-120"/>
+                          <a:latin typeface="Arial" pitchFamily="34" charset="0"/>
+                          <a:ea typeface="Arial" pitchFamily="34" charset="-122"/>
+                          <a:cs typeface="Arial" pitchFamily="34" charset="-120"/>
                         </a:rPr>
-                        <a:t>C – kết hợp</a:t>
+                        <a:t>C: kết hợp</a:t>
                       </a:r>
                       <a:endParaRPr lang="en-US" sz="1200" dirty="0">
-                        <a:latin typeface="Calibri" charset="0"/>
-                        <a:ea typeface="Calibri" charset="0"/>
-                        <a:cs typeface="Calibri" charset="0"/>
+                        <a:latin typeface="Arial" charset="0"/>
+                        <a:ea typeface="Arial" charset="0"/>
+                        <a:cs typeface="Arial" charset="0"/>
                       </a:endParaRPr>
                     </a:p>
                   </a:txBody>
@@ -11212,20 +11036,20 @@
                         <a:buNone/>
                       </a:pPr>
                       <a:r>
-                        <a:rPr lang="en-US" sz="1200" dirty="0">
+                        <a:rPr lang="en-US" sz="1300" dirty="0">
                           <a:solidFill>
                             <a:srgbClr val="0F172A"/>
                           </a:solidFill>
-                          <a:latin typeface="Calibri" pitchFamily="34" charset="0"/>
-                          <a:ea typeface="Calibri" pitchFamily="34" charset="-122"/>
-                          <a:cs typeface="Calibri" pitchFamily="34" charset="-120"/>
+                          <a:latin typeface="Arial" pitchFamily="34" charset="0"/>
+                          <a:ea typeface="Arial" pitchFamily="34" charset="-122"/>
+                          <a:cs typeface="Arial" pitchFamily="34" charset="-120"/>
                         </a:rPr>
                         <a:t>35/36</a:t>
                       </a:r>
                       <a:endParaRPr lang="en-US" sz="1200" dirty="0">
-                        <a:latin typeface="Calibri" charset="0"/>
-                        <a:ea typeface="Calibri" charset="0"/>
-                        <a:cs typeface="Calibri" charset="0"/>
+                        <a:latin typeface="Arial" charset="0"/>
+                        <a:ea typeface="Arial" charset="0"/>
+                        <a:cs typeface="Arial" charset="0"/>
                       </a:endParaRPr>
                     </a:p>
                   </a:txBody>
@@ -11280,20 +11104,20 @@
                         <a:buNone/>
                       </a:pPr>
                       <a:r>
-                        <a:rPr lang="en-US" sz="1200" dirty="0">
+                        <a:rPr lang="en-US" sz="1300" dirty="0">
                           <a:solidFill>
                             <a:srgbClr val="0F172A"/>
                           </a:solidFill>
-                          <a:latin typeface="Calibri" pitchFamily="34" charset="0"/>
-                          <a:ea typeface="Calibri" pitchFamily="34" charset="-122"/>
-                          <a:cs typeface="Calibri" pitchFamily="34" charset="-120"/>
+                          <a:latin typeface="Arial" pitchFamily="34" charset="0"/>
+                          <a:ea typeface="Arial" pitchFamily="34" charset="-122"/>
+                          <a:cs typeface="Arial" pitchFamily="34" charset="-120"/>
                         </a:rPr>
                         <a:t>2/85</a:t>
                       </a:r>
                       <a:endParaRPr lang="en-US" sz="1200" dirty="0">
-                        <a:latin typeface="Calibri" charset="0"/>
-                        <a:ea typeface="Calibri" charset="0"/>
-                        <a:cs typeface="Calibri" charset="0"/>
+                        <a:latin typeface="Arial" charset="0"/>
+                        <a:ea typeface="Arial" charset="0"/>
+                        <a:cs typeface="Arial" charset="0"/>
                       </a:endParaRPr>
                     </a:p>
                   </a:txBody>
@@ -11348,20 +11172,20 @@
                         <a:buNone/>
                       </a:pPr>
                       <a:r>
-                        <a:rPr lang="en-US" sz="1200" dirty="0">
+                        <a:rPr lang="en-US" sz="1300" dirty="0">
                           <a:solidFill>
                             <a:srgbClr val="0F172A"/>
                           </a:solidFill>
-                          <a:latin typeface="Calibri" pitchFamily="34" charset="0"/>
-                          <a:ea typeface="Calibri" pitchFamily="34" charset="-122"/>
-                          <a:cs typeface="Calibri" pitchFamily="34" charset="-120"/>
+                          <a:latin typeface="Arial" pitchFamily="34" charset="0"/>
+                          <a:ea typeface="Arial" pitchFamily="34" charset="-122"/>
+                          <a:cs typeface="Arial" pitchFamily="34" charset="-120"/>
                         </a:rPr>
                         <a:t>29/30</a:t>
                       </a:r>
                       <a:endParaRPr lang="en-US" sz="1200" dirty="0">
-                        <a:latin typeface="Calibri" charset="0"/>
-                        <a:ea typeface="Calibri" charset="0"/>
-                        <a:cs typeface="Calibri" charset="0"/>
+                        <a:latin typeface="Arial" charset="0"/>
+                        <a:ea typeface="Arial" charset="0"/>
+                        <a:cs typeface="Arial" charset="0"/>
                       </a:endParaRPr>
                     </a:p>
                   </a:txBody>
@@ -11416,20 +11240,20 @@
                         <a:buNone/>
                       </a:pPr>
                       <a:r>
-                        <a:rPr lang="en-US" sz="1200" dirty="0">
+                        <a:rPr lang="en-US" sz="1300" dirty="0">
                           <a:solidFill>
                             <a:srgbClr val="0F172A"/>
                           </a:solidFill>
-                          <a:latin typeface="Calibri" pitchFamily="34" charset="0"/>
-                          <a:ea typeface="Calibri" pitchFamily="34" charset="-122"/>
-                          <a:cs typeface="Calibri" pitchFamily="34" charset="-120"/>
+                          <a:latin typeface="Arial" pitchFamily="34" charset="0"/>
+                          <a:ea typeface="Arial" pitchFamily="34" charset="-122"/>
+                          <a:cs typeface="Arial" pitchFamily="34" charset="-120"/>
                         </a:rPr>
                         <a:t>4/4</a:t>
                       </a:r>
                       <a:endParaRPr lang="en-US" sz="1200" dirty="0">
-                        <a:latin typeface="Calibri" charset="0"/>
-                        <a:ea typeface="Calibri" charset="0"/>
-                        <a:cs typeface="Calibri" charset="0"/>
+                        <a:latin typeface="Arial" charset="0"/>
+                        <a:ea typeface="Arial" charset="0"/>
+                        <a:cs typeface="Arial" charset="0"/>
                       </a:endParaRPr>
                     </a:p>
                   </a:txBody>
@@ -11484,20 +11308,20 @@
                         <a:buNone/>
                       </a:pPr>
                       <a:r>
-                        <a:rPr lang="en-US" sz="1200" dirty="0">
+                        <a:rPr lang="en-US" sz="1300" dirty="0">
                           <a:solidFill>
                             <a:srgbClr val="0F172A"/>
                           </a:solidFill>
-                          <a:latin typeface="Calibri" pitchFamily="34" charset="0"/>
-                          <a:ea typeface="Calibri" pitchFamily="34" charset="-122"/>
-                          <a:cs typeface="Calibri" pitchFamily="34" charset="-120"/>
+                          <a:latin typeface="Arial" pitchFamily="34" charset="0"/>
+                          <a:ea typeface="Arial" pitchFamily="34" charset="-122"/>
+                          <a:cs typeface="Arial" pitchFamily="34" charset="-120"/>
                         </a:rPr>
                         <a:t>2/2</a:t>
                       </a:r>
                       <a:endParaRPr lang="en-US" sz="1200" dirty="0">
-                        <a:latin typeface="Calibri" charset="0"/>
-                        <a:ea typeface="Calibri" charset="0"/>
-                        <a:cs typeface="Calibri" charset="0"/>
+                        <a:latin typeface="Arial" charset="0"/>
+                        <a:ea typeface="Arial" charset="0"/>
+                        <a:cs typeface="Arial" charset="0"/>
                       </a:endParaRPr>
                     </a:p>
                   </a:txBody>
@@ -11552,20 +11376,20 @@
                         <a:buNone/>
                       </a:pPr>
                       <a:r>
-                        <a:rPr lang="en-US" sz="1200" dirty="0">
+                        <a:rPr lang="en-US" sz="1300" dirty="0">
                           <a:solidFill>
                             <a:srgbClr val="0F172A"/>
                           </a:solidFill>
-                          <a:latin typeface="Calibri" pitchFamily="34" charset="0"/>
-                          <a:ea typeface="Calibri" pitchFamily="34" charset="-122"/>
-                          <a:cs typeface="Calibri" pitchFamily="34" charset="-120"/>
+                          <a:latin typeface="Arial" pitchFamily="34" charset="0"/>
+                          <a:ea typeface="Arial" pitchFamily="34" charset="-122"/>
+                          <a:cs typeface="Arial" pitchFamily="34" charset="-120"/>
                         </a:rPr>
                         <a:t>0 s</a:t>
                       </a:r>
                       <a:endParaRPr lang="en-US" sz="1200" dirty="0">
-                        <a:latin typeface="Calibri" charset="0"/>
-                        <a:ea typeface="Calibri" charset="0"/>
-                        <a:cs typeface="Calibri" charset="0"/>
+                        <a:latin typeface="Arial" charset="0"/>
+                        <a:ea typeface="Arial" charset="0"/>
+                        <a:cs typeface="Arial" charset="0"/>
                       </a:endParaRPr>
                     </a:p>
                   </a:txBody>
@@ -11622,20 +11446,20 @@
                         <a:buNone/>
                       </a:pPr>
                       <a:r>
-                        <a:rPr lang="en-US" sz="1200" dirty="0">
+                        <a:rPr lang="en-US" sz="1300" dirty="0">
                           <a:solidFill>
                             <a:srgbClr val="0F172A"/>
                           </a:solidFill>
-                          <a:latin typeface="Calibri" pitchFamily="34" charset="0"/>
-                          <a:ea typeface="Calibri" pitchFamily="34" charset="-122"/>
-                          <a:cs typeface="Calibri" pitchFamily="34" charset="-120"/>
+                          <a:latin typeface="Arial" pitchFamily="34" charset="0"/>
+                          <a:ea typeface="Arial" pitchFamily="34" charset="-122"/>
+                          <a:cs typeface="Arial" pitchFamily="34" charset="-120"/>
                         </a:rPr>
                         <a:t>ModSecurity CRS</a:t>
                       </a:r>
                       <a:endParaRPr lang="en-US" sz="1200" dirty="0">
-                        <a:latin typeface="Calibri" charset="0"/>
-                        <a:ea typeface="Calibri" charset="0"/>
-                        <a:cs typeface="Calibri" charset="0"/>
+                        <a:latin typeface="Arial" charset="0"/>
+                        <a:ea typeface="Arial" charset="0"/>
+                        <a:cs typeface="Arial" charset="0"/>
                       </a:endParaRPr>
                     </a:p>
                   </a:txBody>
@@ -11690,20 +11514,20 @@
                         <a:buNone/>
                       </a:pPr>
                       <a:r>
-                        <a:rPr lang="en-US" sz="1200" dirty="0">
+                        <a:rPr lang="en-US" sz="1300" dirty="0">
                           <a:solidFill>
                             <a:srgbClr val="0F172A"/>
                           </a:solidFill>
-                          <a:latin typeface="Calibri" pitchFamily="34" charset="0"/>
-                          <a:ea typeface="Calibri" pitchFamily="34" charset="-122"/>
-                          <a:cs typeface="Calibri" pitchFamily="34" charset="-120"/>
+                          <a:latin typeface="Arial" pitchFamily="34" charset="0"/>
+                          <a:ea typeface="Arial" pitchFamily="34" charset="-122"/>
+                          <a:cs typeface="Arial" pitchFamily="34" charset="-120"/>
                         </a:rPr>
                         <a:t>34/36</a:t>
                       </a:r>
                       <a:endParaRPr lang="en-US" sz="1200" dirty="0">
-                        <a:latin typeface="Calibri" charset="0"/>
-                        <a:ea typeface="Calibri" charset="0"/>
-                        <a:cs typeface="Calibri" charset="0"/>
+                        <a:latin typeface="Arial" charset="0"/>
+                        <a:ea typeface="Arial" charset="0"/>
+                        <a:cs typeface="Arial" charset="0"/>
                       </a:endParaRPr>
                     </a:p>
                   </a:txBody>
@@ -11758,20 +11582,20 @@
                         <a:buNone/>
                       </a:pPr>
                       <a:r>
-                        <a:rPr lang="en-US" sz="1200" dirty="0">
+                        <a:rPr lang="en-US" sz="1300" dirty="0">
                           <a:solidFill>
                             <a:srgbClr val="0F172A"/>
                           </a:solidFill>
-                          <a:latin typeface="Calibri" pitchFamily="34" charset="0"/>
-                          <a:ea typeface="Calibri" pitchFamily="34" charset="-122"/>
-                          <a:cs typeface="Calibri" pitchFamily="34" charset="-120"/>
+                          <a:latin typeface="Arial" pitchFamily="34" charset="0"/>
+                          <a:ea typeface="Arial" pitchFamily="34" charset="-122"/>
+                          <a:cs typeface="Arial" pitchFamily="34" charset="-120"/>
                         </a:rPr>
                         <a:t>2/85</a:t>
                       </a:r>
                       <a:endParaRPr lang="en-US" sz="1200" dirty="0">
-                        <a:latin typeface="Calibri" charset="0"/>
-                        <a:ea typeface="Calibri" charset="0"/>
-                        <a:cs typeface="Calibri" charset="0"/>
+                        <a:latin typeface="Arial" charset="0"/>
+                        <a:ea typeface="Arial" charset="0"/>
+                        <a:cs typeface="Arial" charset="0"/>
                       </a:endParaRPr>
                     </a:p>
                   </a:txBody>
@@ -11826,20 +11650,20 @@
                         <a:buNone/>
                       </a:pPr>
                       <a:r>
-                        <a:rPr lang="en-US" sz="1200" dirty="0">
+                        <a:rPr lang="en-US" sz="1300" dirty="0">
                           <a:solidFill>
                             <a:srgbClr val="0F172A"/>
                           </a:solidFill>
-                          <a:latin typeface="Calibri" pitchFamily="34" charset="0"/>
-                          <a:ea typeface="Calibri" pitchFamily="34" charset="-122"/>
-                          <a:cs typeface="Calibri" pitchFamily="34" charset="-120"/>
+                          <a:latin typeface="Arial" pitchFamily="34" charset="0"/>
+                          <a:ea typeface="Arial" pitchFamily="34" charset="-122"/>
+                          <a:cs typeface="Arial" pitchFamily="34" charset="-120"/>
                         </a:rPr>
                         <a:t>30/30</a:t>
                       </a:r>
                       <a:endParaRPr lang="en-US" sz="1200" dirty="0">
-                        <a:latin typeface="Calibri" charset="0"/>
-                        <a:ea typeface="Calibri" charset="0"/>
-                        <a:cs typeface="Calibri" charset="0"/>
+                        <a:latin typeface="Arial" charset="0"/>
+                        <a:ea typeface="Arial" charset="0"/>
+                        <a:cs typeface="Arial" charset="0"/>
                       </a:endParaRPr>
                     </a:p>
                   </a:txBody>
@@ -11894,20 +11718,20 @@
                         <a:buNone/>
                       </a:pPr>
                       <a:r>
-                        <a:rPr lang="en-US" sz="1200" dirty="0">
+                        <a:rPr lang="en-US" sz="1300" dirty="0">
                           <a:solidFill>
                             <a:srgbClr val="0F172A"/>
                           </a:solidFill>
-                          <a:latin typeface="Calibri" pitchFamily="34" charset="0"/>
-                          <a:ea typeface="Calibri" pitchFamily="34" charset="-122"/>
-                          <a:cs typeface="Calibri" pitchFamily="34" charset="-120"/>
+                          <a:latin typeface="Arial" pitchFamily="34" charset="0"/>
+                          <a:ea typeface="Arial" pitchFamily="34" charset="-122"/>
+                          <a:cs typeface="Arial" pitchFamily="34" charset="-120"/>
                         </a:rPr>
                         <a:t>4/4</a:t>
                       </a:r>
                       <a:endParaRPr lang="en-US" sz="1200" dirty="0">
-                        <a:latin typeface="Calibri" charset="0"/>
-                        <a:ea typeface="Calibri" charset="0"/>
-                        <a:cs typeface="Calibri" charset="0"/>
+                        <a:latin typeface="Arial" charset="0"/>
+                        <a:ea typeface="Arial" charset="0"/>
+                        <a:cs typeface="Arial" charset="0"/>
                       </a:endParaRPr>
                     </a:p>
                   </a:txBody>
@@ -11962,20 +11786,20 @@
                         <a:buNone/>
                       </a:pPr>
                       <a:r>
-                        <a:rPr lang="en-US" sz="1200" dirty="0">
+                        <a:rPr lang="en-US" sz="1300" dirty="0">
                           <a:solidFill>
                             <a:srgbClr val="0F172A"/>
                           </a:solidFill>
-                          <a:latin typeface="Calibri" pitchFamily="34" charset="0"/>
-                          <a:ea typeface="Calibri" pitchFamily="34" charset="-122"/>
-                          <a:cs typeface="Calibri" pitchFamily="34" charset="-120"/>
+                          <a:latin typeface="Arial" pitchFamily="34" charset="0"/>
+                          <a:ea typeface="Arial" pitchFamily="34" charset="-122"/>
+                          <a:cs typeface="Arial" pitchFamily="34" charset="-120"/>
                         </a:rPr>
                         <a:t>0/2</a:t>
                       </a:r>
                       <a:endParaRPr lang="en-US" sz="1200" dirty="0">
-                        <a:latin typeface="Calibri" charset="0"/>
-                        <a:ea typeface="Calibri" charset="0"/>
-                        <a:cs typeface="Calibri" charset="0"/>
+                        <a:latin typeface="Arial" charset="0"/>
+                        <a:ea typeface="Arial" charset="0"/>
+                        <a:cs typeface="Arial" charset="0"/>
                       </a:endParaRPr>
                     </a:p>
                   </a:txBody>
@@ -12030,20 +11854,20 @@
                         <a:buNone/>
                       </a:pPr>
                       <a:r>
-                        <a:rPr lang="en-US" sz="1200" dirty="0">
+                        <a:rPr lang="en-US" sz="1300" dirty="0">
                           <a:solidFill>
                             <a:srgbClr val="0F172A"/>
                           </a:solidFill>
-                          <a:latin typeface="Calibri" pitchFamily="34" charset="0"/>
-                          <a:ea typeface="Calibri" pitchFamily="34" charset="-122"/>
-                          <a:cs typeface="Calibri" pitchFamily="34" charset="-120"/>
+                          <a:latin typeface="Arial" pitchFamily="34" charset="0"/>
+                          <a:ea typeface="Arial" pitchFamily="34" charset="-122"/>
+                          <a:cs typeface="Arial" pitchFamily="34" charset="-120"/>
                         </a:rPr>
-                        <a:t>–</a:t>
+                        <a:t>-</a:t>
                       </a:r>
                       <a:endParaRPr lang="en-US" sz="1200" dirty="0">
-                        <a:latin typeface="Calibri" charset="0"/>
-                        <a:ea typeface="Calibri" charset="0"/>
-                        <a:cs typeface="Calibri" charset="0"/>
+                        <a:latin typeface="Arial" charset="0"/>
+                        <a:ea typeface="Arial" charset="0"/>
+                        <a:cs typeface="Arial" charset="0"/>
                       </a:endParaRPr>
                     </a:p>
                   </a:txBody>
@@ -12152,31 +11976,23 @@
             <a:prstDash val="solid"/>
           </a:ln>
         </p:spPr>
-      </p:sp>
-      <p:pic>
-        <p:nvPicPr>
-          <p:cNvPr id="6" name="Image 0" descr="preencoded.png">    </p:cNvPr>
-          <p:cNvPicPr>
-            <a:picLocks noChangeAspect="1"/>
-          </p:cNvPicPr>
-          <p:nvPr/>
-        </p:nvPicPr>
-        <p:blipFill>
-          <a:blip r:embed="rId1"/>
-          <a:stretch>
-            <a:fillRect/>
-          </a:stretch>
-        </p:blipFill>
-        <p:spPr>
-          <a:xfrm>
-            <a:off x="730606" y="3400654"/>
-            <a:ext cx="230429" cy="230429"/>
-          </a:xfrm>
-          <a:prstGeom prst="rect">
-            <a:avLst/>
-          </a:prstGeom>
-        </p:spPr>
-      </p:pic>
+        <p:txBody>
+          <a:bodyPr wrap="none" lIns="0" tIns="0" rIns="0" bIns="0" anchor="ctr"/>
+          <a:lstStyle/>
+          <a:p>
+            <a:pPr algn="ctr"/>
+            <a:r>
+              <a:rPr lang="vi-VN" sz="1300" dirty="0">
+                <a:solidFill>
+                  <a:srgbClr val="FFFFFF"/>
+                </a:solidFill>
+                <a:latin typeface="Arial"/>
+              </a:rPr>
+              <a:t>1</a:t>
+            </a:r>
+          </a:p>
+        </p:txBody>
+      </p:sp>
       <p:sp>
         <p:nvSpPr>
           <p:cNvPr id="7" name="Text 3"/>
@@ -12202,12 +12018,12 @@
               <a:buNone/>
             </a:pPr>
             <a:r>
-              <a:rPr lang="en-US" sz="1300" b="1" dirty="0">
+              <a:rPr lang="en-US" sz="1400" dirty="0">
                 <a:solidFill>
                   <a:schemeClr val="tx1"/>
                 </a:solidFill>
               </a:rPr>
-              <a:t>C so với A: +4 nguồn</a:t>
+              <a:t>C thêm 4 nguồn</a:t>
             </a:r>
             <a:endParaRPr lang="en-US" sz="1300" dirty="0"/>
           </a:p>
@@ -12238,12 +12054,12 @@
               <a:buNone/>
             </a:pPr>
             <a:r>
-              <a:rPr lang="en-US" sz="1150" dirty="0">
+              <a:rPr lang="en-US" sz="1300" dirty="0">
                 <a:solidFill>
                   <a:schemeClr val="tx2"/>
                 </a:solidFill>
               </a:rPr>
-              <a:t>2 scanner giả User-Agent + 2 flood, không thêm báo nhầm</a:t>
+              <a:t>2 scanner giả User-Agent và 2 nguồn flood, không thêm báo nhầm</a:t>
             </a:r>
             <a:endParaRPr lang="en-US" sz="1150" dirty="0"/>
           </a:p>
@@ -12307,31 +12123,23 @@
             <a:prstDash val="solid"/>
           </a:ln>
         </p:spPr>
-      </p:sp>
-      <p:pic>
-        <p:nvPicPr>
-          <p:cNvPr id="11" name="Image 1" descr="preencoded.png">    </p:cNvPr>
-          <p:cNvPicPr>
-            <a:picLocks noChangeAspect="1"/>
-          </p:cNvPicPr>
-          <p:nvPr/>
-        </p:nvPicPr>
-        <p:blipFill>
-          <a:blip r:embed="rId2"/>
-          <a:stretch>
-            <a:fillRect/>
-          </a:stretch>
-        </p:blipFill>
-        <p:spPr>
-          <a:xfrm>
-            <a:off x="3519526" y="3400654"/>
-            <a:ext cx="230429" cy="230429"/>
-          </a:xfrm>
-          <a:prstGeom prst="rect">
-            <a:avLst/>
-          </a:prstGeom>
-        </p:spPr>
-      </p:pic>
+        <p:txBody>
+          <a:bodyPr wrap="none" lIns="0" tIns="0" rIns="0" bIns="0" anchor="ctr"/>
+          <a:lstStyle/>
+          <a:p>
+            <a:pPr algn="ctr"/>
+            <a:r>
+              <a:rPr lang="vi-VN" sz="1300" dirty="0">
+                <a:solidFill>
+                  <a:srgbClr val="FFFFFF"/>
+                </a:solidFill>
+                <a:latin typeface="Arial"/>
+              </a:rPr>
+              <a:t>2</a:t>
+            </a:r>
+          </a:p>
+        </p:txBody>
+      </p:sp>
       <p:sp>
         <p:nvSpPr>
           <p:cNvPr id="12" name="Text 7"/>
@@ -12357,7 +12165,7 @@
               <a:buNone/>
             </a:pPr>
             <a:r>
-              <a:rPr lang="en-US" sz="1300" b="1" dirty="0">
+              <a:rPr lang="en-US" sz="1400" dirty="0">
                 <a:solidFill>
                   <a:schemeClr val="tx1"/>
                 </a:solidFill>
@@ -12393,12 +12201,12 @@
               <a:buNone/>
             </a:pPr>
             <a:r>
-              <a:rPr lang="en-US" sz="1150" dirty="0">
+              <a:rPr lang="en-US" sz="1300" dirty="0">
                 <a:solidFill>
                   <a:schemeClr val="tx2"/>
                 </a:solidFill>
               </a:rPr>
-              <a:t>Truy vấn "../ relative path docs" – nhập nhằng chủ ý</a:t>
+              <a:t>Truy vấn ../ relative path docs, nhập nhằng có chủ ý</a:t>
             </a:r>
             <a:endParaRPr lang="en-US" sz="1150" dirty="0"/>
           </a:p>
@@ -12462,31 +12270,23 @@
             <a:prstDash val="solid"/>
           </a:ln>
         </p:spPr>
-      </p:sp>
-      <p:pic>
-        <p:nvPicPr>
-          <p:cNvPr id="16" name="Image 2" descr="preencoded.png">    </p:cNvPr>
-          <p:cNvPicPr>
-            <a:picLocks noChangeAspect="1"/>
-          </p:cNvPicPr>
-          <p:nvPr/>
-        </p:nvPicPr>
-        <p:blipFill>
-          <a:blip r:embed="rId3"/>
-          <a:stretch>
-            <a:fillRect/>
-          </a:stretch>
-        </p:blipFill>
-        <p:spPr>
-          <a:xfrm>
-            <a:off x="6308446" y="3400654"/>
-            <a:ext cx="230429" cy="230429"/>
-          </a:xfrm>
-          <a:prstGeom prst="rect">
-            <a:avLst/>
-          </a:prstGeom>
-        </p:spPr>
-      </p:pic>
+        <p:txBody>
+          <a:bodyPr wrap="none" lIns="0" tIns="0" rIns="0" bIns="0" anchor="ctr"/>
+          <a:lstStyle/>
+          <a:p>
+            <a:pPr algn="ctr"/>
+            <a:r>
+              <a:rPr lang="vi-VN" sz="1300" dirty="0">
+                <a:solidFill>
+                  <a:srgbClr val="FFFFFF"/>
+                </a:solidFill>
+                <a:latin typeface="Arial"/>
+              </a:rPr>
+              <a:t>3</a:t>
+            </a:r>
+          </a:p>
+        </p:txBody>
+      </p:sp>
       <p:sp>
         <p:nvSpPr>
           <p:cNvPr id="17" name="Text 11"/>
@@ -12512,7 +12312,7 @@
               <a:buNone/>
             </a:pPr>
             <a:r>
-              <a:rPr lang="en-US" sz="1300" b="1" dirty="0">
+              <a:rPr lang="en-US" sz="1400" dirty="0">
                 <a:solidFill>
                   <a:schemeClr val="tx1"/>
                 </a:solidFill>
@@ -12548,7 +12348,7 @@
               <a:buNone/>
             </a:pPr>
             <a:r>
-              <a:rPr lang="en-US" sz="1150" dirty="0">
+              <a:rPr lang="en-US" sz="1300" dirty="0">
                 <a:solidFill>
                   <a:schemeClr val="tx2"/>
                 </a:solidFill>
@@ -12660,9 +12460,9 @@
                 <a:solidFill>
                   <a:schemeClr val="tx1"/>
                 </a:solidFill>
-                <a:latin typeface="Cambria" pitchFamily="34" charset="0"/>
-                <a:ea typeface="Cambria" pitchFamily="34" charset="-122"/>
-                <a:cs typeface="Cambria" pitchFamily="34" charset="-120"/>
+                <a:latin typeface="Arial" pitchFamily="34" charset="0"/>
+                <a:ea typeface="Arial" pitchFamily="34" charset="-122"/>
+                <a:cs typeface="Arial" pitchFamily="34" charset="-120"/>
               </a:rPr>
               <a:t>Nội dung trình bày</a:t>
             </a:r>
@@ -12728,31 +12528,23 @@
             <a:prstDash val="solid"/>
           </a:ln>
         </p:spPr>
-      </p:sp>
-      <p:pic>
-        <p:nvPicPr>
-          <p:cNvPr id="5" name="Image 0" descr="preencoded.png">    </p:cNvPr>
-          <p:cNvPicPr>
-            <a:picLocks noChangeAspect="1"/>
-          </p:cNvPicPr>
-          <p:nvPr/>
-        </p:nvPicPr>
-        <p:blipFill>
-          <a:blip r:embed="rId1"/>
-          <a:stretch>
-            <a:fillRect/>
-          </a:stretch>
-        </p:blipFill>
-        <p:spPr>
-          <a:xfrm>
-            <a:off x="806501" y="1538021"/>
-            <a:ext cx="307238" cy="307238"/>
-          </a:xfrm>
-          <a:prstGeom prst="rect">
-            <a:avLst/>
-          </a:prstGeom>
-        </p:spPr>
-      </p:pic>
+        <p:txBody>
+          <a:bodyPr wrap="none" lIns="0" tIns="0" rIns="0" bIns="0" anchor="ctr"/>
+          <a:lstStyle/>
+          <a:p>
+            <a:pPr algn="ctr"/>
+            <a:r>
+              <a:rPr lang="vi-VN" sz="1600" dirty="0">
+                <a:solidFill>
+                  <a:srgbClr val="FFFFFF"/>
+                </a:solidFill>
+                <a:latin typeface="Arial"/>
+              </a:rPr>
+              <a:t>1</a:t>
+            </a:r>
+          </a:p>
+        </p:txBody>
+      </p:sp>
       <p:sp>
         <p:nvSpPr>
           <p:cNvPr id="6" name="Text 3"/>
@@ -12778,12 +12570,12 @@
               <a:buNone/>
             </a:pPr>
             <a:r>
-              <a:rPr lang="en-US" sz="1700" b="1" dirty="0">
+              <a:rPr lang="en-US" sz="1700" dirty="0">
                 <a:solidFill>
                   <a:schemeClr val="tx1"/>
                 </a:solidFill>
               </a:rPr>
-              <a:t>1. Kiến trúc &amp; môi trường</a:t>
+              <a:t>Kiến trúc và môi trường</a:t>
             </a:r>
             <a:endParaRPr lang="en-US" sz="1700" dirty="0"/>
           </a:p>
@@ -12814,7 +12606,7 @@
               <a:buNone/>
             </a:pPr>
             <a:r>
-              <a:rPr lang="en-US" sz="1300" dirty="0">
+              <a:rPr lang="en-US" sz="1400" dirty="0">
                 <a:solidFill>
                   <a:schemeClr val="tx2"/>
                 </a:solidFill>
@@ -12883,31 +12675,23 @@
             <a:prstDash val="solid"/>
           </a:ln>
         </p:spPr>
-      </p:sp>
-      <p:pic>
-        <p:nvPicPr>
-          <p:cNvPr id="10" name="Image 1" descr="preencoded.png">    </p:cNvPr>
-          <p:cNvPicPr>
-            <a:picLocks noChangeAspect="1"/>
-          </p:cNvPicPr>
-          <p:nvPr/>
-        </p:nvPicPr>
-        <p:blipFill>
-          <a:blip r:embed="rId2"/>
-          <a:stretch>
-            <a:fillRect/>
-          </a:stretch>
-        </p:blipFill>
-        <p:spPr>
-          <a:xfrm>
-            <a:off x="5012741" y="1538021"/>
-            <a:ext cx="307238" cy="307238"/>
-          </a:xfrm>
-          <a:prstGeom prst="rect">
-            <a:avLst/>
-          </a:prstGeom>
-        </p:spPr>
-      </p:pic>
+        <p:txBody>
+          <a:bodyPr wrap="none" lIns="0" tIns="0" rIns="0" bIns="0" anchor="ctr"/>
+          <a:lstStyle/>
+          <a:p>
+            <a:pPr algn="ctr"/>
+            <a:r>
+              <a:rPr lang="vi-VN" sz="1600" dirty="0">
+                <a:solidFill>
+                  <a:srgbClr val="FFFFFF"/>
+                </a:solidFill>
+                <a:latin typeface="Arial"/>
+              </a:rPr>
+              <a:t>2</a:t>
+            </a:r>
+          </a:p>
+        </p:txBody>
+      </p:sp>
       <p:sp>
         <p:nvSpPr>
           <p:cNvPr id="11" name="Text 7"/>
@@ -12933,12 +12717,12 @@
               <a:buNone/>
             </a:pPr>
             <a:r>
-              <a:rPr lang="en-US" sz="1700" b="1" dirty="0">
+              <a:rPr lang="en-US" sz="1700" dirty="0">
                 <a:solidFill>
                   <a:schemeClr val="tx1"/>
                 </a:solidFill>
               </a:rPr>
-              <a:t>2. Use case</a:t>
+              <a:t>Use case</a:t>
             </a:r>
             <a:endParaRPr lang="en-US" sz="1700" dirty="0"/>
           </a:p>
@@ -12969,7 +12753,7 @@
               <a:buNone/>
             </a:pPr>
             <a:r>
-              <a:rPr lang="en-US" sz="1300" dirty="0">
+              <a:rPr lang="en-US" sz="1400" dirty="0">
                 <a:solidFill>
                   <a:schemeClr val="tx2"/>
                 </a:solidFill>
@@ -13038,31 +12822,23 @@
             <a:prstDash val="solid"/>
           </a:ln>
         </p:spPr>
-      </p:sp>
-      <p:pic>
-        <p:nvPicPr>
-          <p:cNvPr id="15" name="Image 2" descr="preencoded.png">    </p:cNvPr>
-          <p:cNvPicPr>
-            <a:picLocks noChangeAspect="1"/>
-          </p:cNvPicPr>
-          <p:nvPr/>
-        </p:nvPicPr>
-        <p:blipFill>
-          <a:blip r:embed="rId3"/>
-          <a:stretch>
-            <a:fillRect/>
-          </a:stretch>
-        </p:blipFill>
-        <p:spPr>
-          <a:xfrm>
-            <a:off x="806501" y="3229661"/>
-            <a:ext cx="307238" cy="307238"/>
-          </a:xfrm>
-          <a:prstGeom prst="rect">
-            <a:avLst/>
-          </a:prstGeom>
-        </p:spPr>
-      </p:pic>
+        <p:txBody>
+          <a:bodyPr wrap="none" lIns="0" tIns="0" rIns="0" bIns="0" anchor="ctr"/>
+          <a:lstStyle/>
+          <a:p>
+            <a:pPr algn="ctr"/>
+            <a:r>
+              <a:rPr lang="vi-VN" sz="1600" dirty="0">
+                <a:solidFill>
+                  <a:srgbClr val="FFFFFF"/>
+                </a:solidFill>
+                <a:latin typeface="Arial"/>
+              </a:rPr>
+              <a:t>3</a:t>
+            </a:r>
+          </a:p>
+        </p:txBody>
+      </p:sp>
       <p:sp>
         <p:nvSpPr>
           <p:cNvPr id="16" name="Text 11"/>
@@ -13088,12 +12864,12 @@
               <a:buNone/>
             </a:pPr>
             <a:r>
-              <a:rPr lang="en-US" sz="1700" b="1" dirty="0">
+              <a:rPr lang="en-US" sz="1700" dirty="0">
                 <a:solidFill>
                   <a:schemeClr val="tx1"/>
                 </a:solidFill>
               </a:rPr>
-              <a:t>3. Phân tích thiết kế</a:t>
+              <a:t>Phân tích thiết kế</a:t>
             </a:r>
             <a:endParaRPr lang="en-US" sz="1700" dirty="0"/>
           </a:p>
@@ -13124,7 +12900,7 @@
               <a:buNone/>
             </a:pPr>
             <a:r>
-              <a:rPr lang="en-US" sz="1300" dirty="0">
+              <a:rPr lang="en-US" sz="1400" dirty="0">
                 <a:solidFill>
                   <a:schemeClr val="tx2"/>
                 </a:solidFill>
@@ -13193,31 +12969,23 @@
             <a:prstDash val="solid"/>
           </a:ln>
         </p:spPr>
-      </p:sp>
-      <p:pic>
-        <p:nvPicPr>
-          <p:cNvPr id="20" name="Image 3" descr="preencoded.png">    </p:cNvPr>
-          <p:cNvPicPr>
-            <a:picLocks noChangeAspect="1"/>
-          </p:cNvPicPr>
-          <p:nvPr/>
-        </p:nvPicPr>
-        <p:blipFill>
-          <a:blip r:embed="rId4"/>
-          <a:stretch>
-            <a:fillRect/>
-          </a:stretch>
-        </p:blipFill>
-        <p:spPr>
-          <a:xfrm>
-            <a:off x="5012741" y="3229661"/>
-            <a:ext cx="307238" cy="307238"/>
-          </a:xfrm>
-          <a:prstGeom prst="rect">
-            <a:avLst/>
-          </a:prstGeom>
-        </p:spPr>
-      </p:pic>
+        <p:txBody>
+          <a:bodyPr wrap="none" lIns="0" tIns="0" rIns="0" bIns="0" anchor="ctr"/>
+          <a:lstStyle/>
+          <a:p>
+            <a:pPr algn="ctr"/>
+            <a:r>
+              <a:rPr lang="vi-VN" sz="1600" dirty="0">
+                <a:solidFill>
+                  <a:srgbClr val="FFFFFF"/>
+                </a:solidFill>
+                <a:latin typeface="Arial"/>
+              </a:rPr>
+              <a:t>4</a:t>
+            </a:r>
+          </a:p>
+        </p:txBody>
+      </p:sp>
       <p:sp>
         <p:nvSpPr>
           <p:cNvPr id="21" name="Text 15"/>
@@ -13243,12 +13011,12 @@
               <a:buNone/>
             </a:pPr>
             <a:r>
-              <a:rPr lang="en-US" sz="1700" b="1" dirty="0">
+              <a:rPr lang="en-US" sz="1700" dirty="0">
                 <a:solidFill>
                   <a:schemeClr val="tx1"/>
                 </a:solidFill>
               </a:rPr>
-              <a:t>4. Vận hành · kiểm thử · đo đạc</a:t>
+              <a:t>Vận hành, kiểm thử, đo đạc</a:t>
             </a:r>
             <a:endParaRPr lang="en-US" sz="1700" dirty="0"/>
           </a:p>
@@ -13279,7 +13047,7 @@
               <a:buNone/>
             </a:pPr>
             <a:r>
-              <a:rPr lang="en-US" sz="1300" dirty="0">
+              <a:rPr lang="en-US" sz="1400" dirty="0">
                 <a:solidFill>
                   <a:schemeClr val="tx2"/>
                 </a:solidFill>
@@ -13391,9 +13159,9 @@
                 <a:solidFill>
                   <a:schemeClr val="tx1"/>
                 </a:solidFill>
-                <a:latin typeface="Cambria" pitchFamily="34" charset="0"/>
-                <a:ea typeface="Cambria" pitchFamily="34" charset="-122"/>
-                <a:cs typeface="Cambria" pitchFamily="34" charset="-120"/>
+                <a:latin typeface="Arial" pitchFamily="34" charset="0"/>
+                <a:ea typeface="Arial" pitchFamily="34" charset="-122"/>
+                <a:cs typeface="Arial" pitchFamily="34" charset="-120"/>
               </a:rPr>
               <a:t>Kịch bản 3: kiểm thử tải 20.000 dòng log</a:t>
             </a:r>
@@ -13476,15 +13244,15 @@
               <a:buNone/>
             </a:pPr>
             <a:r>
-              <a:rPr lang="en-US" sz="2200" b="1" dirty="0">
+              <a:rPr lang="en-US" sz="2200" dirty="0">
                 <a:solidFill>
                   <a:srgbClr val="F59E0B"/>
                 </a:solidFill>
-                <a:latin typeface="Cambria" pitchFamily="34" charset="0"/>
-                <a:ea typeface="Cambria" pitchFamily="34" charset="-122"/>
-                <a:cs typeface="Cambria" pitchFamily="34" charset="-120"/>
+                <a:latin typeface="Arial" pitchFamily="34" charset="0"/>
+                <a:ea typeface="Arial" pitchFamily="34" charset="-122"/>
+                <a:cs typeface="Arial" pitchFamily="34" charset="-120"/>
               </a:rPr>
-              <a:t>~30×</a:t>
+              <a:t>31 lần</a:t>
             </a:r>
             <a:endParaRPr lang="en-US" sz="2200" dirty="0"/>
           </a:p>
@@ -13515,7 +13283,7 @@
               <a:buNone/>
             </a:pPr>
             <a:r>
-              <a:rPr lang="en-US" sz="1100" dirty="0">
+              <a:rPr lang="en-US" sz="1200" dirty="0">
                 <a:solidFill>
                   <a:srgbClr val="E2E8F0"/>
                 </a:solidFill>
@@ -13585,13 +13353,13 @@
               <a:buNone/>
             </a:pPr>
             <a:r>
-              <a:rPr lang="en-US" sz="2200" b="1" dirty="0">
+              <a:rPr lang="en-US" sz="2200" dirty="0">
                 <a:solidFill>
                   <a:srgbClr val="0E7490"/>
                 </a:solidFill>
-                <a:latin typeface="Cambria" pitchFamily="34" charset="0"/>
-                <a:ea typeface="Cambria" pitchFamily="34" charset="-122"/>
-                <a:cs typeface="Cambria" pitchFamily="34" charset="-120"/>
+                <a:latin typeface="Arial" pitchFamily="34" charset="0"/>
+                <a:ea typeface="Arial" pitchFamily="34" charset="-122"/>
+                <a:cs typeface="Arial" pitchFamily="34" charset="-120"/>
               </a:rPr>
               <a:t>32.468</a:t>
             </a:r>
@@ -13624,12 +13392,12 @@
               <a:buNone/>
             </a:pPr>
             <a:r>
-              <a:rPr lang="en-US" sz="1100" dirty="0">
+              <a:rPr lang="en-US" sz="1200" dirty="0">
                 <a:solidFill>
                   <a:srgbClr val="1E293B"/>
                 </a:solidFill>
               </a:rPr>
-              <a:t>msg/s tại C1 (100k dòng)</a:t>
+              <a:t>message/s tại C1 (100.000 dòng)</a:t>
             </a:r>
             <a:endParaRPr lang="en-US" sz="1100" dirty="0"/>
           </a:p>
@@ -13694,13 +13462,13 @@
               <a:buNone/>
             </a:pPr>
             <a:r>
-              <a:rPr lang="en-US" sz="2200" b="1" dirty="0">
+              <a:rPr lang="en-US" sz="2200" dirty="0">
                 <a:solidFill>
                   <a:srgbClr val="0E7490"/>
                 </a:solidFill>
-                <a:latin typeface="Cambria" pitchFamily="34" charset="0"/>
-                <a:ea typeface="Cambria" pitchFamily="34" charset="-122"/>
-                <a:cs typeface="Cambria" pitchFamily="34" charset="-120"/>
+                <a:latin typeface="Arial" pitchFamily="34" charset="0"/>
+                <a:ea typeface="Arial" pitchFamily="34" charset="-122"/>
+                <a:cs typeface="Arial" pitchFamily="34" charset="-120"/>
               </a:rPr>
               <a:t>5.774</a:t>
             </a:r>
@@ -13733,12 +13501,12 @@
               <a:buNone/>
             </a:pPr>
             <a:r>
-              <a:rPr lang="en-US" sz="1100" dirty="0">
+              <a:rPr lang="en-US" sz="1200" dirty="0">
                 <a:solidFill>
                   <a:srgbClr val="1E293B"/>
                 </a:solidFill>
               </a:rPr>
-              <a:t>msg/s tại detector</a:t>
+              <a:t>message/s tại detector</a:t>
             </a:r>
             <a:endParaRPr lang="en-US" sz="1100" dirty="0"/>
           </a:p>
@@ -13803,13 +13571,13 @@
               <a:buNone/>
             </a:pPr>
             <a:r>
-              <a:rPr lang="en-US" sz="2200" b="1" dirty="0">
+              <a:rPr lang="en-US" sz="2200" dirty="0">
                 <a:solidFill>
                   <a:srgbClr val="0E7490"/>
                 </a:solidFill>
-                <a:latin typeface="Cambria" pitchFamily="34" charset="0"/>
-                <a:ea typeface="Cambria" pitchFamily="34" charset="-122"/>
-                <a:cs typeface="Cambria" pitchFamily="34" charset="-120"/>
+                <a:latin typeface="Arial" pitchFamily="34" charset="0"/>
+                <a:ea typeface="Arial" pitchFamily="34" charset="-122"/>
+                <a:cs typeface="Arial" pitchFamily="34" charset="-120"/>
               </a:rPr>
               <a:t>0</a:t>
             </a:r>
@@ -13842,7 +13610,7 @@
               <a:buNone/>
             </a:pPr>
             <a:r>
-              <a:rPr lang="en-US" sz="1100" dirty="0">
+              <a:rPr lang="en-US" sz="1200" dirty="0">
                 <a:solidFill>
                   <a:srgbClr val="1E293B"/>
                 </a:solidFill>
@@ -13878,12 +13646,12 @@
               <a:buNone/>
             </a:pPr>
             <a:r>
-              <a:rPr lang="en-US" sz="1200" dirty="0">
+              <a:rPr lang="en-US" sz="1300" dirty="0">
                 <a:solidFill>
                   <a:schemeClr val="tx2"/>
                 </a:solidFill>
               </a:rPr>
-              <a:t>Nghẽn ban đầu tại C2 (flush + commit từng message, key theo domain dồn 1 partition). Điểm nghẽn hiện tại: detector – có thể chạy 3 instance cùng group.</a:t>
+              <a:t>Điểm nghẽn ban đầu ở C2 (flush và commit từng message, key theo domain nên dữ liệu dồn vào 1 partition). Điểm nghẽn hiện tại là detector, có thể chạy 3 instance cùng group.</a:t>
             </a:r>
             <a:endParaRPr lang="en-US" sz="1200" dirty="0"/>
           </a:p>
@@ -13988,9 +13756,9 @@
                 <a:solidFill>
                   <a:srgbClr val="FFFFFF"/>
                 </a:solidFill>
-                <a:latin typeface="Cambria" pitchFamily="34" charset="0"/>
-                <a:ea typeface="Cambria" pitchFamily="34" charset="-122"/>
-                <a:cs typeface="Cambria" pitchFamily="34" charset="-120"/>
+                <a:latin typeface="Arial" pitchFamily="34" charset="0"/>
+                <a:ea typeface="Arial" pitchFamily="34" charset="-122"/>
+                <a:cs typeface="Arial" pitchFamily="34" charset="-120"/>
               </a:rPr>
               <a:t>Kết luận và hướng phát triển</a:t>
             </a:r>
@@ -14050,7 +13818,7 @@
               <a:buNone/>
             </a:pPr>
             <a:r>
-              <a:rPr lang="en-US" sz="1700" b="1" dirty="0">
+              <a:rPr lang="en-US" sz="1700" dirty="0">
                 <a:solidFill>
                   <a:srgbClr val="10B981"/>
                 </a:solidFill>
@@ -14095,7 +13863,7 @@
                   <a:srgbClr val="E2E8F0"/>
                 </a:solidFill>
               </a:rPr>
-              <a:t>Pipeline realtime log → cảnh báo → dashboard</a:t>
+              <a:t>Pipeline realtime từ log tới cảnh báo</a:t>
             </a:r>
             <a:endParaRPr lang="en-US" sz="1300" dirty="0"/>
           </a:p>
@@ -14113,7 +13881,7 @@
                   <a:srgbClr val="E2E8F0"/>
                 </a:solidFill>
               </a:rPr>
-              <a:t>Rule engine tự viết, RE2, 20 rule / 10 nhóm</a:t>
+              <a:t>Rule engine tự viết, RE2, 20 rule thuộc 10 nhóm</a:t>
             </a:r>
             <a:endParaRPr lang="en-US" sz="1300" dirty="0"/>
           </a:p>
@@ -14131,7 +13899,7 @@
                   <a:srgbClr val="E2E8F0"/>
                 </a:solidFill>
               </a:rPr>
-              <a:t>Recall 0,944 @ FPR 0,004; 35/36 nguồn</a:t>
+              <a:t>Recall 0,944 với FPR 0,004; phát hiện 35/36 nguồn</a:t>
             </a:r>
             <a:endParaRPr lang="en-US" sz="1300" dirty="0"/>
           </a:p>
@@ -14149,7 +13917,7 @@
                   <a:srgbClr val="E2E8F0"/>
                 </a:solidFill>
               </a:rPr>
-              <a:t>20k dòng log trong 4,5 s; 153 unit test</a:t>
+              <a:t>20.000 dòng log trong 4,5 giây; 173 unit test</a:t>
             </a:r>
             <a:endParaRPr lang="en-US" sz="1300" dirty="0"/>
           </a:p>
@@ -14207,7 +13975,7 @@
               <a:buNone/>
             </a:pPr>
             <a:r>
-              <a:rPr lang="en-US" sz="1700" b="1" dirty="0">
+              <a:rPr lang="en-US" sz="1700" dirty="0">
                 <a:solidFill>
                   <a:srgbClr val="F59E0B"/>
                 </a:solidFill>
@@ -14252,7 +14020,7 @@
                   <a:srgbClr val="E2E8F0"/>
                 </a:solidFill>
               </a:rPr>
-              <a:t>Không thấy request body</a:t>
+              <a:t>Không phân tích request body</a:t>
             </a:r>
             <a:endParaRPr lang="en-US" sz="1300" dirty="0"/>
           </a:p>
@@ -14364,7 +14132,7 @@
               <a:buNone/>
             </a:pPr>
             <a:r>
-              <a:rPr lang="en-US" sz="1700" b="1" dirty="0">
+              <a:rPr lang="en-US" sz="1700" dirty="0">
                 <a:solidFill>
                   <a:srgbClr val="38BDF8"/>
                 </a:solidFill>
@@ -14409,7 +14177,7 @@
                   <a:srgbClr val="E2E8F0"/>
                 </a:solidFill>
               </a:rPr>
-              <a:t>Rule cho SSTI ${…}, XSS ngữ cảnh JS</a:t>
+              <a:t>Rule cho SSTI ${...}, XSS ngữ cảnh JS</a:t>
             </a:r>
             <a:endParaRPr lang="en-US" sz="1300" dirty="0"/>
           </a:p>
@@ -14526,6 +14294,519 @@
               <a:buNone/>
             </a:pPr>
             <a:endParaRPr lang="en-US" sz="1600" dirty="0"/>
+          </a:p>
+        </p:txBody>
+      </p:sp>
+    </p:spTree>
+  </p:cSld>
+  <p:clrMapOvr>
+    <a:masterClrMapping/>
+  </p:clrMapOvr>
+</p:sld>
+</file>
+
+<file path=ppt/slides/slide22.xml><?xml version="1.0" encoding="utf-8"?>
+<p:sld xmlns:a="http://schemas.openxmlformats.org/drawingml/2006/main" xmlns:r="http://schemas.openxmlformats.org/officeDocument/2006/relationships" xmlns:p="http://schemas.openxmlformats.org/presentationml/2006/main">
+  <p:cSld name="Slide 10">
+    <p:spTree>
+      <p:nvGrpSpPr>
+        <p:cNvPr id="1" name=""/>
+        <p:cNvGrpSpPr/>
+        <p:nvPr/>
+      </p:nvGrpSpPr>
+      <p:grpSpPr>
+        <a:xfrm>
+          <a:off x="0" y="0"/>
+          <a:ext cx="0" cy="0"/>
+          <a:chOff x="0" y="0"/>
+          <a:chExt cx="0" cy="0"/>
+        </a:xfrm>
+      </p:grpSpPr>
+      <p:sp>
+        <p:nvSpPr>
+          <p:cNvPr id="2" name="Text 0"/>
+          <p:cNvSpPr/>
+          <p:nvPr>
+            <p:ph idx="100" type="title" hasCustomPrompt="1"/>
+          </p:nvPr>
+        </p:nvSpPr>
+        <p:spPr>
+          <a:xfrm>
+            <a:off x="457200" y="256032"/>
+            <a:ext cx="8229600" cy="566928"/>
+          </a:xfrm>
+          <a:prstGeom prst="rect">
+            <a:avLst/>
+          </a:prstGeom>
+          <a:noFill/>
+          <a:ln/>
+        </p:spPr>
+        <p:txBody>
+          <a:bodyPr wrap="square" lIns="0" tIns="0" rIns="0" bIns="0" rtlCol="0" anchor="ctr"/>
+          <a:lstStyle/>
+          <a:p>
+            <a:pPr algn="l" indent="0" marL="0">
+              <a:buNone/>
+            </a:pPr>
+            <a:r>
+              <a:rPr lang="en-US" sz="2600" b="1" dirty="0">
+                <a:solidFill>
+                  <a:schemeClr val="tx1"/>
+                </a:solidFill>
+                <a:latin typeface="Arial" pitchFamily="34" charset="0"/>
+                <a:ea typeface="Arial" pitchFamily="34" charset="-122"/>
+                <a:cs typeface="Arial" pitchFamily="34" charset="-120"/>
+              </a:rPr>
+              <a:t>Phân rã UC05: phát hiện và chấm điểm</a:t>
+            </a:r>
+            <a:endParaRPr lang="en-US" sz="2600" dirty="0"/>
+          </a:p>
+        </p:txBody>
+      </p:sp>
+      <p:pic>
+        <p:nvPicPr>
+          <p:cNvPr id="4" name="Phân rã UC05" descr="Phân rã UC05">    </p:cNvPr>
+          <p:cNvPicPr>
+            <a:picLocks noChangeAspect="1"/>
+          </p:cNvPicPr>
+          <p:nvPr/>
+        </p:nvPicPr>
+        <p:blipFill>
+          <a:blip r:embed="rId2"/>
+          <a:stretch>
+            <a:fillRect/>
+          </a:stretch>
+        </p:blipFill>
+        <p:spPr>
+          <a:xfrm>
+            <a:off x="1612486" y="900000"/>
+            <a:ext cx="5919027" cy="3430000"/>
+          </a:xfrm>
+          <a:prstGeom prst="rect">
+            <a:avLst/>
+          </a:prstGeom>
+        </p:spPr>
+      </p:pic>
+      <p:sp>
+        <p:nvSpPr>
+          <p:cNvPr id="6" name="Text 2"/>
+          <p:cNvSpPr txBox="1"/>
+          <p:nvPr/>
+        </p:nvSpPr>
+        <p:spPr>
+          <a:xfrm>
+            <a:off x="457200" y="4390000"/>
+            <a:ext cx="8229600" cy="330000"/>
+          </a:xfrm>
+          <a:prstGeom prst="rect">
+            <a:avLst/>
+          </a:prstGeom>
+          <a:noFill/>
+          <a:ln/>
+        </p:spPr>
+        <p:txBody>
+          <a:bodyPr wrap="square" lIns="0" tIns="0" rIns="0" bIns="0" rtlCol="0" anchor="t"/>
+          <a:lstStyle/>
+          <a:p>
+            <a:pPr algn="ctr" indent="0" marL="0">
+              <a:buNone/>
+            </a:pPr>
+            <a:r>
+              <a:rPr lang="en-US" sz="1300" dirty="0">
+                <a:solidFill>
+                  <a:schemeClr val="tx2"/>
+                </a:solidFill>
+              </a:rPr>
+              <a:t>UC05 - 5 nhóm phát hiện theo rule, chấm điểm theo hành vi, DDoS theo domain (extend)</a:t>
+            </a:r>
+            <a:endParaRPr lang="en-US" sz="1200" dirty="0"/>
+          </a:p>
+        </p:txBody>
+      </p:sp>
+      <p:sp>
+        <p:nvSpPr>
+          <p:cNvPr id="25" name="Slide Number Placeholder 0"/>
+          <p:cNvSpPr>
+            <a:spLocks noGrp="1"/>
+          </p:cNvSpPr>
+          <p:nvPr>
+            <p:ph type="sldNum" sz="quarter" idx="4294967295"/>
+          </p:nvPr>
+        </p:nvSpPr>
+        <p:spPr>
+          <a:xfrm>
+            <a:off x="8229600" y="4800600"/>
+            <a:ext cx="457200" cy="228600"/>
+          </a:xfrm>
+          <a:prstGeom prst="rect">
+            <a:avLst/>
+          </a:prstGeom>
+          <a:extLst>
+            <a:ext uri="{C572A759-6A51-4108-AA02-DFA0A04FC94B}">
+              <ma14:wrappingTextBoxFlag xmlns:ma14="http://schemas.microsoft.com/office/mac/drawingml/2011/main" val="0"/>
+            </a:ext>
+          </a:extLst>
+        </p:spPr>
+        <p:txBody>
+          <a:bodyPr/>
+          <a:lstStyle>
+            <a:lvl1pPr>
+              <a:defRPr sz="900">
+                <a:solidFill>
+                  <a:srgbClr val="94A3B8"/>
+                </a:solidFill>
+              </a:defRPr>
+            </a:lvl1pPr>
+          </a:lstStyle>
+          <a:p>
+            <a:pPr algn="r"/>
+            <a:fld id="{F7021451-1387-4CA6-816F-3879F97B5CBC}" type="slidenum">
+              <a:rPr b="0" lang="en-US"/>
+              <a:t>10</a:t>
+            </a:fld>
+            <a:endParaRPr lang="en-US"/>
+          </a:p>
+        </p:txBody>
+      </p:sp>
+    </p:spTree>
+  </p:cSld>
+  <p:clrMapOvr>
+    <a:masterClrMapping/>
+  </p:clrMapOvr>
+</p:sld>
+</file>
+
+<file path=ppt/slides/slide23.xml><?xml version="1.0" encoding="utf-8"?>
+<p:sld xmlns:a="http://schemas.openxmlformats.org/drawingml/2006/main" xmlns:r="http://schemas.openxmlformats.org/officeDocument/2006/relationships" xmlns:p="http://schemas.openxmlformats.org/presentationml/2006/main">
+  <p:cSld name="Slide 11">
+    <p:spTree>
+      <p:nvGrpSpPr>
+        <p:cNvPr id="1" name=""/>
+        <p:cNvGrpSpPr/>
+        <p:nvPr/>
+      </p:nvGrpSpPr>
+      <p:grpSpPr>
+        <a:xfrm>
+          <a:off x="0" y="0"/>
+          <a:ext cx="0" cy="0"/>
+          <a:chOff x="0" y="0"/>
+          <a:chExt cx="0" cy="0"/>
+        </a:xfrm>
+      </p:grpSpPr>
+      <p:sp>
+        <p:nvSpPr>
+          <p:cNvPr id="2" name="Text 0"/>
+          <p:cNvSpPr/>
+          <p:nvPr>
+            <p:ph idx="100" type="title" hasCustomPrompt="1"/>
+          </p:nvPr>
+        </p:nvSpPr>
+        <p:spPr>
+          <a:xfrm>
+            <a:off x="457200" y="256032"/>
+            <a:ext cx="8229600" cy="566928"/>
+          </a:xfrm>
+          <a:prstGeom prst="rect">
+            <a:avLst/>
+          </a:prstGeom>
+          <a:noFill/>
+          <a:ln/>
+        </p:spPr>
+        <p:txBody>
+          <a:bodyPr wrap="square" lIns="0" tIns="0" rIns="0" bIns="0" rtlCol="0" anchor="ctr"/>
+          <a:lstStyle/>
+          <a:p>
+            <a:pPr algn="l" indent="0" marL="0">
+              <a:buNone/>
+            </a:pPr>
+            <a:r>
+              <a:rPr lang="en-US" sz="2600" b="1" dirty="0">
+                <a:solidFill>
+                  <a:schemeClr val="tx1"/>
+                </a:solidFill>
+                <a:latin typeface="Arial" pitchFamily="34" charset="0"/>
+                <a:ea typeface="Arial" pitchFamily="34" charset="-122"/>
+                <a:cs typeface="Arial" pitchFamily="34" charset="-120"/>
+              </a:rPr>
+              <a:t>Phân rã UC02: quản lý phạm vi giám sát</a:t>
+            </a:r>
+            <a:endParaRPr lang="en-US" sz="2600" dirty="0"/>
+          </a:p>
+        </p:txBody>
+      </p:sp>
+      <p:pic>
+        <p:nvPicPr>
+          <p:cNvPr id="4" name="Phân rã UC02" descr="Phân rã UC02">    </p:cNvPr>
+          <p:cNvPicPr>
+            <a:picLocks noChangeAspect="1"/>
+          </p:cNvPicPr>
+          <p:nvPr/>
+        </p:nvPicPr>
+        <p:blipFill>
+          <a:blip r:embed="rId2"/>
+          <a:stretch>
+            <a:fillRect/>
+          </a:stretch>
+        </p:blipFill>
+        <p:spPr>
+          <a:xfrm>
+            <a:off x="1193450" y="900000"/>
+            <a:ext cx="6757100" cy="3430000"/>
+          </a:xfrm>
+          <a:prstGeom prst="rect">
+            <a:avLst/>
+          </a:prstGeom>
+        </p:spPr>
+      </p:pic>
+      <p:sp>
+        <p:nvSpPr>
+          <p:cNvPr id="7" name="Text 2"/>
+          <p:cNvSpPr txBox="1"/>
+          <p:nvPr/>
+        </p:nvSpPr>
+        <p:spPr>
+          <a:xfrm>
+            <a:off x="457200" y="4390000"/>
+            <a:ext cx="8229600" cy="330000"/>
+          </a:xfrm>
+          <a:prstGeom prst="rect">
+            <a:avLst/>
+          </a:prstGeom>
+          <a:noFill/>
+          <a:ln/>
+        </p:spPr>
+        <p:txBody>
+          <a:bodyPr wrap="square" lIns="0" tIns="0" rIns="0" bIns="0" rtlCol="0" anchor="t"/>
+          <a:lstStyle/>
+          <a:p>
+            <a:pPr algn="ctr" indent="0" marL="0">
+              <a:buNone/>
+            </a:pPr>
+            <a:r>
+              <a:rPr lang="en-US" sz="1300" dirty="0">
+                <a:solidFill>
+                  <a:schemeClr val="tx2"/>
+                </a:solidFill>
+              </a:rPr>
+              <a:t>UC02 - xem, thêm, sửa, bật/tắt, xoá domain trong allowlist; mọi thao tác qua Gateway và JWT</a:t>
+            </a:r>
+            <a:endParaRPr lang="en-US" sz="1200" dirty="0"/>
+          </a:p>
+        </p:txBody>
+      </p:sp>
+      <p:sp>
+        <p:nvSpPr>
+          <p:cNvPr id="25" name="Slide Number Placeholder 0"/>
+          <p:cNvSpPr>
+            <a:spLocks noGrp="1"/>
+          </p:cNvSpPr>
+          <p:nvPr>
+            <p:ph type="sldNum" sz="quarter" idx="4294967295"/>
+          </p:nvPr>
+        </p:nvSpPr>
+        <p:spPr>
+          <a:xfrm>
+            <a:off x="8229600" y="4800600"/>
+            <a:ext cx="457200" cy="228600"/>
+          </a:xfrm>
+          <a:prstGeom prst="rect">
+            <a:avLst/>
+          </a:prstGeom>
+          <a:extLst>
+            <a:ext uri="{C572A759-6A51-4108-AA02-DFA0A04FC94B}">
+              <ma14:wrappingTextBoxFlag xmlns:ma14="http://schemas.microsoft.com/office/mac/drawingml/2011/main" val="0"/>
+            </a:ext>
+          </a:extLst>
+        </p:spPr>
+        <p:txBody>
+          <a:bodyPr/>
+          <a:lstStyle>
+            <a:lvl1pPr>
+              <a:defRPr sz="900">
+                <a:solidFill>
+                  <a:srgbClr val="94A3B8"/>
+                </a:solidFill>
+              </a:defRPr>
+            </a:lvl1pPr>
+          </a:lstStyle>
+          <a:p>
+            <a:pPr algn="r"/>
+            <a:fld id="{F7021451-1387-4CA6-816F-3879F97B5CBC}" type="slidenum">
+              <a:rPr b="0" lang="en-US"/>
+              <a:t>11</a:t>
+            </a:fld>
+            <a:endParaRPr lang="en-US"/>
+          </a:p>
+        </p:txBody>
+      </p:sp>
+    </p:spTree>
+  </p:cSld>
+  <p:clrMapOvr>
+    <a:masterClrMapping/>
+  </p:clrMapOvr>
+</p:sld>
+</file>
+
+<file path=ppt/slides/slide24.xml><?xml version="1.0" encoding="utf-8"?>
+<p:sld xmlns:a="http://schemas.openxmlformats.org/drawingml/2006/main" xmlns:r="http://schemas.openxmlformats.org/officeDocument/2006/relationships" xmlns:p="http://schemas.openxmlformats.org/presentationml/2006/main">
+  <p:cSld name="Slide 11">
+    <p:spTree>
+      <p:nvGrpSpPr>
+        <p:cNvPr id="1" name=""/>
+        <p:cNvGrpSpPr/>
+        <p:nvPr/>
+      </p:nvGrpSpPr>
+      <p:grpSpPr>
+        <a:xfrm>
+          <a:off x="0" y="0"/>
+          <a:ext cx="0" cy="0"/>
+          <a:chOff x="0" y="0"/>
+          <a:chExt cx="0" cy="0"/>
+        </a:xfrm>
+      </p:grpSpPr>
+      <p:sp>
+        <p:nvSpPr>
+          <p:cNvPr id="2" name="Text 0"/>
+          <p:cNvSpPr/>
+          <p:nvPr>
+            <p:ph idx="100" type="title" hasCustomPrompt="1"/>
+          </p:nvPr>
+        </p:nvSpPr>
+        <p:spPr>
+          <a:xfrm>
+            <a:off x="457200" y="256032"/>
+            <a:ext cx="8229600" cy="566928"/>
+          </a:xfrm>
+          <a:prstGeom prst="rect">
+            <a:avLst/>
+          </a:prstGeom>
+          <a:noFill/>
+          <a:ln/>
+        </p:spPr>
+        <p:txBody>
+          <a:bodyPr wrap="square" lIns="0" tIns="0" rIns="0" bIns="0" rtlCol="0" anchor="ctr"/>
+          <a:lstStyle/>
+          <a:p>
+            <a:pPr algn="l" indent="0" marL="0">
+              <a:buNone/>
+            </a:pPr>
+            <a:r>
+              <a:rPr lang="en-US" sz="2600" b="1" dirty="0">
+                <a:solidFill>
+                  <a:schemeClr val="tx1"/>
+                </a:solidFill>
+                <a:latin typeface="Arial" pitchFamily="34" charset="0"/>
+                <a:ea typeface="Arial" pitchFamily="34" charset="-122"/>
+                <a:cs typeface="Arial" pitchFamily="34" charset="-120"/>
+              </a:rPr>
+              <a:t>Phân rã UC07, UC08: giám sát và cảnh báo</a:t>
+            </a:r>
+            <a:endParaRPr lang="en-US" sz="2600" dirty="0"/>
+          </a:p>
+        </p:txBody>
+      </p:sp>
+      <p:pic>
+        <p:nvPicPr>
+          <p:cNvPr id="5" name="Phân rã UC07-08" descr="Phân rã UC07-08">    </p:cNvPr>
+          <p:cNvPicPr>
+            <a:picLocks noChangeAspect="1"/>
+          </p:cNvPicPr>
+          <p:nvPr/>
+        </p:nvPicPr>
+        <p:blipFill>
+          <a:blip r:embed="rId3"/>
+          <a:stretch>
+            <a:fillRect/>
+          </a:stretch>
+        </p:blipFill>
+        <p:spPr>
+          <a:xfrm>
+            <a:off x="1089231" y="900000"/>
+            <a:ext cx="6965538" cy="3430000"/>
+          </a:xfrm>
+          <a:prstGeom prst="rect">
+            <a:avLst/>
+          </a:prstGeom>
+        </p:spPr>
+      </p:pic>
+      <p:sp>
+        <p:nvSpPr>
+          <p:cNvPr id="8" name="Text 3"/>
+          <p:cNvSpPr txBox="1"/>
+          <p:nvPr/>
+        </p:nvSpPr>
+        <p:spPr>
+          <a:xfrm>
+            <a:off x="457200" y="4390000"/>
+            <a:ext cx="8229600" cy="330000"/>
+          </a:xfrm>
+          <a:prstGeom prst="rect">
+            <a:avLst/>
+          </a:prstGeom>
+          <a:noFill/>
+          <a:ln/>
+        </p:spPr>
+        <p:txBody>
+          <a:bodyPr wrap="square" lIns="0" tIns="0" rIns="0" bIns="0" rtlCol="0" anchor="t"/>
+          <a:lstStyle/>
+          <a:p>
+            <a:pPr algn="ctr" indent="0" marL="0">
+              <a:buNone/>
+            </a:pPr>
+            <a:r>
+              <a:rPr lang="en-US" sz="1300" dirty="0">
+                <a:solidFill>
+                  <a:schemeClr val="tx2"/>
+                </a:solidFill>
+              </a:rPr>
+              <a:t>UC07, UC08 - tổng quan, realtime, lịch sử, chi tiết sự kiện, xuất CSV, nhận cảnh báo</a:t>
+            </a:r>
+            <a:endParaRPr lang="en-US" sz="1200" dirty="0"/>
+          </a:p>
+        </p:txBody>
+      </p:sp>
+      <p:sp>
+        <p:nvSpPr>
+          <p:cNvPr id="25" name="Slide Number Placeholder 0"/>
+          <p:cNvSpPr>
+            <a:spLocks noGrp="1"/>
+          </p:cNvSpPr>
+          <p:nvPr>
+            <p:ph type="sldNum" sz="quarter" idx="4294967295"/>
+          </p:nvPr>
+        </p:nvSpPr>
+        <p:spPr>
+          <a:xfrm>
+            <a:off x="8229600" y="4800600"/>
+            <a:ext cx="457200" cy="228600"/>
+          </a:xfrm>
+          <a:prstGeom prst="rect">
+            <a:avLst/>
+          </a:prstGeom>
+          <a:extLst>
+            <a:ext uri="{C572A759-6A51-4108-AA02-DFA0A04FC94B}">
+              <ma14:wrappingTextBoxFlag xmlns:ma14="http://schemas.microsoft.com/office/mac/drawingml/2011/main" val="0"/>
+            </a:ext>
+          </a:extLst>
+        </p:spPr>
+        <p:txBody>
+          <a:bodyPr/>
+          <a:lstStyle>
+            <a:lvl1pPr>
+              <a:defRPr sz="900">
+                <a:solidFill>
+                  <a:srgbClr val="94A3B8"/>
+                </a:solidFill>
+              </a:defRPr>
+            </a:lvl1pPr>
+          </a:lstStyle>
+          <a:p>
+            <a:pPr algn="r"/>
+            <a:fld id="{F7021451-1387-4CA6-816F-3879F97B5CBC}" type="slidenum">
+              <a:rPr b="0" lang="en-US"/>
+              <a:t>11</a:t>
+            </a:fld>
+            <a:endParaRPr lang="en-US"/>
           </a:p>
         </p:txBody>
       </p:sp>
@@ -14585,9 +14866,9 @@
                 <a:solidFill>
                   <a:schemeClr val="tx1"/>
                 </a:solidFill>
-                <a:latin typeface="Cambria" pitchFamily="34" charset="0"/>
-                <a:ea typeface="Cambria" pitchFamily="34" charset="-122"/>
-                <a:cs typeface="Cambria" pitchFamily="34" charset="-120"/>
+                <a:latin typeface="Arial" pitchFamily="34" charset="0"/>
+                <a:ea typeface="Arial" pitchFamily="34" charset="-122"/>
+                <a:cs typeface="Arial" pitchFamily="34" charset="-120"/>
               </a:rPr>
               <a:t>Bài toán và mục tiêu</a:t>
             </a:r>
@@ -14628,7 +14909,7 @@
                   <a:schemeClr val="tx1"/>
                 </a:solidFill>
               </a:rPr>
-              <a:t>Access log là nguồn dữ liệu sẵn có, không cần sửa ứng dụng, để nhận diện SQLi, XSS, Path Traversal…</a:t>
+              <a:t>Access log là nguồn dữ liệu sẵn có, không cần sửa ứng dụng, để nhận diện SQLi, XSS, Path Traversal.</a:t>
             </a:r>
             <a:endParaRPr lang="en-US" sz="1500" dirty="0"/>
           </a:p>
@@ -14681,7 +14962,7 @@
                   <a:schemeClr val="tx1"/>
                 </a:solidFill>
               </a:rPr>
-              <a:t>Rule engine tự viết – không dùng lại OWASP CRS</a:t>
+              <a:t>Rule engine tự viết, không dùng lại OWASP CRS</a:t>
             </a:r>
             <a:endParaRPr lang="en-US" sz="1500" dirty="0"/>
           </a:p>
@@ -14699,7 +14980,7 @@
                   <a:schemeClr val="tx1"/>
                 </a:solidFill>
               </a:rPr>
-              <a:t>Chấm điểm bất thường: rule + tín hiệu hành vi</a:t>
+              <a:t>Chấm điểm bất thường theo rule và tín hiệu hành vi</a:t>
             </a:r>
             <a:endParaRPr lang="en-US" sz="1500" dirty="0"/>
           </a:p>
@@ -14735,7 +15016,7 @@
                   <a:schemeClr val="tx1"/>
                 </a:solidFill>
               </a:rPr>
-              <a:t>Chỉ phát hiện &amp; cảnh báo – không tự chặn IP; chỉ xử lý domain trong scope</a:t>
+              <a:t>Chỉ phát hiện và cảnh báo, không tự chặn IP; chỉ xử lý domain trong scope</a:t>
             </a:r>
             <a:endParaRPr lang="en-US" sz="1500" dirty="0"/>
           </a:p>
@@ -14800,13 +15081,13 @@
               <a:buNone/>
             </a:pPr>
             <a:r>
-              <a:rPr lang="en-US" sz="3600" b="1" dirty="0">
+              <a:rPr lang="en-US" sz="3600" dirty="0">
                 <a:solidFill>
                   <a:srgbClr val="F59E0B"/>
                 </a:solidFill>
-                <a:latin typeface="Cambria" pitchFamily="34" charset="0"/>
-                <a:ea typeface="Cambria" pitchFamily="34" charset="-122"/>
-                <a:cs typeface="Cambria" pitchFamily="34" charset="-120"/>
+                <a:latin typeface="Arial" pitchFamily="34" charset="0"/>
+                <a:ea typeface="Arial" pitchFamily="34" charset="-122"/>
+                <a:cs typeface="Arial" pitchFamily="34" charset="-120"/>
               </a:rPr>
               <a:t>20</a:t>
             </a:r>
@@ -14839,7 +15120,7 @@
               <a:buNone/>
             </a:pPr>
             <a:r>
-              <a:rPr lang="en-US" sz="1200" dirty="0">
+              <a:rPr lang="en-US" sz="1300" dirty="0">
                 <a:solidFill>
                   <a:srgbClr val="E2E8F0"/>
                 </a:solidFill>
@@ -14909,13 +15190,13 @@
               <a:buNone/>
             </a:pPr>
             <a:r>
-              <a:rPr lang="en-US" sz="3600" b="1" dirty="0">
+              <a:rPr lang="en-US" sz="3600" dirty="0">
                 <a:solidFill>
                   <a:srgbClr val="0E7490"/>
                 </a:solidFill>
-                <a:latin typeface="Cambria" pitchFamily="34" charset="0"/>
-                <a:ea typeface="Cambria" pitchFamily="34" charset="-122"/>
-                <a:cs typeface="Cambria" pitchFamily="34" charset="-120"/>
+                <a:latin typeface="Arial" pitchFamily="34" charset="0"/>
+                <a:ea typeface="Arial" pitchFamily="34" charset="-122"/>
+                <a:cs typeface="Arial" pitchFamily="34" charset="-120"/>
               </a:rPr>
               <a:t>10</a:t>
             </a:r>
@@ -14948,7 +15229,7 @@
               <a:buNone/>
             </a:pPr>
             <a:r>
-              <a:rPr lang="en-US" sz="1200" dirty="0">
+              <a:rPr lang="en-US" sz="1300" dirty="0">
                 <a:solidFill>
                   <a:srgbClr val="1E293B"/>
                 </a:solidFill>
@@ -15018,13 +15299,13 @@
               <a:buNone/>
             </a:pPr>
             <a:r>
-              <a:rPr lang="en-US" sz="3600" b="1" dirty="0">
+              <a:rPr lang="en-US" sz="3600" dirty="0">
                 <a:solidFill>
                   <a:srgbClr val="0E7490"/>
                 </a:solidFill>
-                <a:latin typeface="Cambria" pitchFamily="34" charset="0"/>
-                <a:ea typeface="Cambria" pitchFamily="34" charset="-122"/>
-                <a:cs typeface="Cambria" pitchFamily="34" charset="-120"/>
+                <a:latin typeface="Arial" pitchFamily="34" charset="0"/>
+                <a:ea typeface="Arial" pitchFamily="34" charset="-122"/>
+                <a:cs typeface="Arial" pitchFamily="34" charset="-120"/>
               </a:rPr>
               <a:t>13</a:t>
             </a:r>
@@ -15057,7 +15338,7 @@
               <a:buNone/>
             </a:pPr>
             <a:r>
-              <a:rPr lang="en-US" sz="1200" dirty="0">
+              <a:rPr lang="en-US" sz="1300" dirty="0">
                 <a:solidFill>
                   <a:srgbClr val="1E293B"/>
                 </a:solidFill>
@@ -15127,15 +15408,15 @@
               <a:buNone/>
             </a:pPr>
             <a:r>
-              <a:rPr lang="en-US" sz="3600" b="1" dirty="0">
+              <a:rPr lang="en-US" sz="3600" dirty="0">
                 <a:solidFill>
                   <a:srgbClr val="F59E0B"/>
                 </a:solidFill>
-                <a:latin typeface="Cambria" pitchFamily="34" charset="0"/>
-                <a:ea typeface="Cambria" pitchFamily="34" charset="-122"/>
-                <a:cs typeface="Cambria" pitchFamily="34" charset="-120"/>
+                <a:latin typeface="Arial" pitchFamily="34" charset="0"/>
+                <a:ea typeface="Arial" pitchFamily="34" charset="-122"/>
+                <a:cs typeface="Arial" pitchFamily="34" charset="-120"/>
               </a:rPr>
-              <a:t>153</a:t>
+              <a:t>173</a:t>
             </a:r>
             <a:endParaRPr lang="en-US" sz="3600" dirty="0"/>
           </a:p>
@@ -15166,7 +15447,7 @@
               <a:buNone/>
             </a:pPr>
             <a:r>
-              <a:rPr lang="en-US" sz="1200" dirty="0">
+              <a:rPr lang="en-US" sz="1300" dirty="0">
                 <a:solidFill>
                   <a:srgbClr val="E2E8F0"/>
                 </a:solidFill>
@@ -15278,11 +15559,11 @@
                 <a:solidFill>
                   <a:schemeClr val="tx1"/>
                 </a:solidFill>
-                <a:latin typeface="Cambria" pitchFamily="34" charset="0"/>
-                <a:ea typeface="Cambria" pitchFamily="34" charset="-122"/>
-                <a:cs typeface="Cambria" pitchFamily="34" charset="-120"/>
+                <a:latin typeface="Arial" pitchFamily="34" charset="0"/>
+                <a:ea typeface="Arial" pitchFamily="34" charset="-122"/>
+                <a:cs typeface="Arial" pitchFamily="34" charset="-120"/>
               </a:rPr>
-              <a:t>Kiến trúc tổng thể – microservice hướng sự kiện</a:t>
+              <a:t>Kiến trúc tổng thể: microservice hướng sự kiện</a:t>
             </a:r>
             <a:endParaRPr lang="en-US" sz="2600" dirty="0"/>
           </a:p>
@@ -15337,7 +15618,7 @@
               <a:buNone/>
             </a:pPr>
             <a:r>
-              <a:rPr lang="en-US" sz="1250" b="1" dirty="0">
+              <a:rPr lang="en-US" sz="1400" dirty="0">
                 <a:solidFill>
                   <a:srgbClr val="0E7490"/>
                 </a:solidFill>
@@ -15351,12 +15632,12 @@
               <a:buNone/>
             </a:pPr>
             <a:r>
-              <a:rPr lang="en-US" sz="1250" dirty="0">
+              <a:rPr lang="en-US" sz="1400" dirty="0">
                 <a:solidFill>
                   <a:schemeClr val="tx1"/>
                 </a:solidFill>
               </a:rPr>
-              <a:t>Nguồn log → Thu thập → Event bus → Phát hiện → Nền tảng → Dữ liệu</a:t>
+              <a:t>Nguồn log, thu thập, event bus, phát hiện, nền tảng, dữ liệu</a:t>
             </a:r>
             <a:endParaRPr lang="en-US" sz="1250" dirty="0"/>
           </a:p>
@@ -15379,12 +15660,12 @@
               <a:buNone/>
             </a:pPr>
             <a:r>
-              <a:rPr lang="en-US" sz="1250" b="1" dirty="0">
+              <a:rPr lang="en-US" sz="1400" dirty="0">
                 <a:solidFill>
                   <a:srgbClr val="0E7490"/>
                 </a:solidFill>
               </a:rPr>
-              <a:t>Kafka làm xương sống</a:t>
+              <a:t>Kafka là kênh giao tiếp chung</a:t>
             </a:r>
             <a:endParaRPr lang="en-US" sz="1250" dirty="0"/>
           </a:p>
@@ -15393,12 +15674,12 @@
               <a:buNone/>
             </a:pPr>
             <a:r>
-              <a:rPr lang="en-US" sz="1250" dirty="0">
+              <a:rPr lang="en-US" sz="1400" dirty="0">
                 <a:solidFill>
                   <a:schemeClr val="tx1"/>
                 </a:solidFill>
               </a:rPr>
-              <a:t>Topic = tên sự kiện, key domain|src_ip, at-least-once</a:t>
+              <a:t>Tên topic trùng tên sự kiện, key domain|src_ip, at-least-once</a:t>
             </a:r>
             <a:endParaRPr lang="en-US" sz="1250" dirty="0"/>
           </a:p>
@@ -15421,7 +15702,7 @@
               <a:buNone/>
             </a:pPr>
             <a:r>
-              <a:rPr lang="en-US" sz="1250" b="1" dirty="0">
+              <a:rPr lang="en-US" sz="1400" dirty="0">
                 <a:solidFill>
                   <a:srgbClr val="0E7490"/>
                 </a:solidFill>
@@ -15435,12 +15716,12 @@
               <a:buNone/>
             </a:pPr>
             <a:r>
-              <a:rPr lang="en-US" sz="1250" dirty="0">
+              <a:rPr lang="en-US" sz="1400" dirty="0">
                 <a:solidFill>
                   <a:schemeClr val="tx1"/>
                 </a:solidFill>
               </a:rPr>
-              <a:t>C1–C3 và detector gọi GET /scope/check trước khi xử lý (fail-closed)</a:t>
+              <a:t>C1-C3 và detector gọi GET /scope/check trước khi xử lý (fail-closed)</a:t>
             </a:r>
             <a:endParaRPr lang="en-US" sz="1250" dirty="0"/>
           </a:p>
@@ -15547,9 +15828,9 @@
                 <a:solidFill>
                   <a:schemeClr val="tx1"/>
                 </a:solidFill>
-                <a:latin typeface="Cambria" pitchFamily="34" charset="0"/>
-                <a:ea typeface="Cambria" pitchFamily="34" charset="-122"/>
-                <a:cs typeface="Cambria" pitchFamily="34" charset="-120"/>
+                <a:latin typeface="Arial" pitchFamily="34" charset="0"/>
+                <a:ea typeface="Arial" pitchFamily="34" charset="-122"/>
+                <a:cs typeface="Arial" pitchFamily="34" charset="-120"/>
               </a:rPr>
               <a:t>Luồng sự kiện qua Kafka</a:t>
             </a:r>
@@ -15616,13 +15897,13 @@
               <a:buNone/>
             </a:pPr>
             <a:r>
-              <a:rPr lang="en-US" sz="1800" b="1" dirty="0">
+              <a:rPr lang="en-US" sz="1800" dirty="0">
                 <a:solidFill>
                   <a:srgbClr val="0E7490"/>
                 </a:solidFill>
-                <a:latin typeface="Cambria" pitchFamily="34" charset="0"/>
-                <a:ea typeface="Cambria" pitchFamily="34" charset="-122"/>
-                <a:cs typeface="Cambria" pitchFamily="34" charset="-120"/>
+                <a:latin typeface="Arial" pitchFamily="34" charset="0"/>
+                <a:ea typeface="Arial" pitchFamily="34" charset="-122"/>
+                <a:cs typeface="Arial" pitchFamily="34" charset="-120"/>
               </a:rPr>
               <a:t>C1</a:t>
             </a:r>
@@ -15655,7 +15936,7 @@
               <a:buNone/>
             </a:pPr>
             <a:r>
-              <a:rPr lang="en-US" sz="1300" b="1" dirty="0">
+              <a:rPr lang="en-US" sz="1400" dirty="0">
                 <a:solidFill>
                   <a:srgbClr val="0F172A"/>
                 </a:solidFill>
@@ -15691,7 +15972,7 @@
               <a:buNone/>
             </a:pPr>
             <a:r>
-              <a:rPr lang="en-US" sz="1200" dirty="0">
+              <a:rPr lang="en-US" sz="1300" dirty="0">
                 <a:solidFill>
                   <a:srgbClr val="64748B"/>
                 </a:solidFill>
@@ -15756,9 +16037,9 @@
                 <a:solidFill>
                   <a:srgbClr val="B45309"/>
                 </a:solidFill>
-                <a:latin typeface="Courier New" pitchFamily="34" charset="0"/>
-                <a:ea typeface="Courier New" pitchFamily="34" charset="-122"/>
-                <a:cs typeface="Courier New" pitchFamily="34" charset="-120"/>
+                <a:latin typeface="Arial" pitchFamily="34" charset="0"/>
+                <a:ea typeface="Arial" pitchFamily="34" charset="-122"/>
+                <a:cs typeface="Arial" pitchFamily="34" charset="-120"/>
               </a:rPr>
               <a:t>log.raw.ingested</a:t>
             </a:r>
@@ -15825,13 +16106,13 @@
               <a:buNone/>
             </a:pPr>
             <a:r>
-              <a:rPr lang="en-US" sz="1800" b="1" dirty="0">
+              <a:rPr lang="en-US" sz="1800" dirty="0">
                 <a:solidFill>
                   <a:srgbClr val="0E7490"/>
                 </a:solidFill>
-                <a:latin typeface="Cambria" pitchFamily="34" charset="0"/>
-                <a:ea typeface="Cambria" pitchFamily="34" charset="-122"/>
-                <a:cs typeface="Cambria" pitchFamily="34" charset="-120"/>
+                <a:latin typeface="Arial" pitchFamily="34" charset="0"/>
+                <a:ea typeface="Arial" pitchFamily="34" charset="-122"/>
+                <a:cs typeface="Arial" pitchFamily="34" charset="-120"/>
               </a:rPr>
               <a:t>C2</a:t>
             </a:r>
@@ -15864,7 +16145,7 @@
               <a:buNone/>
             </a:pPr>
             <a:r>
-              <a:rPr lang="en-US" sz="1300" b="1" dirty="0">
+              <a:rPr lang="en-US" sz="1400" dirty="0">
                 <a:solidFill>
                   <a:srgbClr val="0F172A"/>
                 </a:solidFill>
@@ -15900,7 +16181,7 @@
               <a:buNone/>
             </a:pPr>
             <a:r>
-              <a:rPr lang="en-US" sz="1200" dirty="0">
+              <a:rPr lang="en-US" sz="1300" dirty="0">
                 <a:solidFill>
                   <a:srgbClr val="64748B"/>
                 </a:solidFill>
@@ -15965,9 +16246,9 @@
                 <a:solidFill>
                   <a:srgbClr val="B45309"/>
                 </a:solidFill>
-                <a:latin typeface="Courier New" pitchFamily="34" charset="0"/>
-                <a:ea typeface="Courier New" pitchFamily="34" charset="-122"/>
-                <a:cs typeface="Courier New" pitchFamily="34" charset="-120"/>
+                <a:latin typeface="Arial" pitchFamily="34" charset="0"/>
+                <a:ea typeface="Arial" pitchFamily="34" charset="-122"/>
+                <a:cs typeface="Arial" pitchFamily="34" charset="-120"/>
               </a:rPr>
               <a:t>log.normalized</a:t>
             </a:r>
@@ -16034,13 +16315,13 @@
               <a:buNone/>
             </a:pPr>
             <a:r>
-              <a:rPr lang="en-US" sz="1800" b="1" dirty="0">
+              <a:rPr lang="en-US" sz="1800" dirty="0">
                 <a:solidFill>
                   <a:srgbClr val="0E7490"/>
                 </a:solidFill>
-                <a:latin typeface="Cambria" pitchFamily="34" charset="0"/>
-                <a:ea typeface="Cambria" pitchFamily="34" charset="-122"/>
-                <a:cs typeface="Cambria" pitchFamily="34" charset="-120"/>
+                <a:latin typeface="Arial" pitchFamily="34" charset="0"/>
+                <a:ea typeface="Arial" pitchFamily="34" charset="-122"/>
+                <a:cs typeface="Arial" pitchFamily="34" charset="-120"/>
               </a:rPr>
               <a:t>C3</a:t>
             </a:r>
@@ -16073,7 +16354,7 @@
               <a:buNone/>
             </a:pPr>
             <a:r>
-              <a:rPr lang="en-US" sz="1300" b="1" dirty="0">
+              <a:rPr lang="en-US" sz="1400" dirty="0">
                 <a:solidFill>
                   <a:srgbClr val="0F172A"/>
                 </a:solidFill>
@@ -16109,12 +16390,12 @@
               <a:buNone/>
             </a:pPr>
             <a:r>
-              <a:rPr lang="en-US" sz="1200" dirty="0">
+              <a:rPr lang="en-US" sz="1300" dirty="0">
                 <a:solidFill>
                   <a:srgbClr val="64748B"/>
                 </a:solidFill>
               </a:rPr>
-              <a:t>GeoIP · phiên</a:t>
+              <a:t>GeoIP, phiên</a:t>
             </a:r>
             <a:endParaRPr lang="en-US" sz="1200" dirty="0"/>
           </a:p>
@@ -16174,9 +16455,9 @@
                 <a:solidFill>
                   <a:srgbClr val="B45309"/>
                 </a:solidFill>
-                <a:latin typeface="Courier New" pitchFamily="34" charset="0"/>
-                <a:ea typeface="Courier New" pitchFamily="34" charset="-122"/>
-                <a:cs typeface="Courier New" pitchFamily="34" charset="-120"/>
+                <a:latin typeface="Arial" pitchFamily="34" charset="0"/>
+                <a:ea typeface="Arial" pitchFamily="34" charset="-122"/>
+                <a:cs typeface="Arial" pitchFamily="34" charset="-120"/>
               </a:rPr>
               <a:t>log.enriched</a:t>
             </a:r>
@@ -16243,15 +16524,15 @@
               <a:buNone/>
             </a:pPr>
             <a:r>
-              <a:rPr lang="en-US" sz="1800" b="1" dirty="0">
+              <a:rPr lang="en-US" sz="1800" dirty="0">
                 <a:solidFill>
                   <a:srgbClr val="F59E0B"/>
                 </a:solidFill>
-                <a:latin typeface="Cambria" pitchFamily="34" charset="0"/>
-                <a:ea typeface="Cambria" pitchFamily="34" charset="-122"/>
-                <a:cs typeface="Cambria" pitchFamily="34" charset="-120"/>
+                <a:latin typeface="Arial" pitchFamily="34" charset="0"/>
+                <a:ea typeface="Arial" pitchFamily="34" charset="-122"/>
+                <a:cs typeface="Arial" pitchFamily="34" charset="-120"/>
               </a:rPr>
-              <a:t>D1+D3</a:t>
+              <a:t>D1, D3</a:t>
             </a:r>
             <a:endParaRPr lang="en-US" sz="1800" dirty="0"/>
           </a:p>
@@ -16282,7 +16563,7 @@
               <a:buNone/>
             </a:pPr>
             <a:r>
-              <a:rPr lang="en-US" sz="1300" b="1" dirty="0">
+              <a:rPr lang="en-US" sz="1400" dirty="0">
                 <a:solidFill>
                   <a:srgbClr val="FFFFFF"/>
                 </a:solidFill>
@@ -16318,12 +16599,12 @@
               <a:buNone/>
             </a:pPr>
             <a:r>
-              <a:rPr lang="en-US" sz="1200" dirty="0">
+              <a:rPr lang="en-US" sz="1300" dirty="0">
                 <a:solidFill>
                   <a:srgbClr val="CBD5E1"/>
                 </a:solidFill>
               </a:rPr>
-              <a:t>rule + điểm</a:t>
+              <a:t>rule và điểm</a:t>
             </a:r>
             <a:endParaRPr lang="en-US" sz="1200" dirty="0"/>
           </a:p>
@@ -16383,9 +16664,9 @@
                 <a:solidFill>
                   <a:srgbClr val="B45309"/>
                 </a:solidFill>
-                <a:latin typeface="Courier New" pitchFamily="34" charset="0"/>
-                <a:ea typeface="Courier New" pitchFamily="34" charset="-122"/>
-                <a:cs typeface="Courier New" pitchFamily="34" charset="-120"/>
+                <a:latin typeface="Arial" pitchFamily="34" charset="0"/>
+                <a:ea typeface="Arial" pitchFamily="34" charset="-122"/>
+                <a:cs typeface="Arial" pitchFamily="34" charset="-120"/>
               </a:rPr>
               <a:t>alert.triggered</a:t>
             </a:r>
@@ -16400,9 +16681,9 @@
                 <a:solidFill>
                   <a:srgbClr val="B45309"/>
                 </a:solidFill>
-                <a:latin typeface="Courier New" pitchFamily="34" charset="0"/>
-                <a:ea typeface="Courier New" pitchFamily="34" charset="-122"/>
-                <a:cs typeface="Courier New" pitchFamily="34" charset="-120"/>
+                <a:latin typeface="Arial" pitchFamily="34" charset="0"/>
+                <a:ea typeface="Arial" pitchFamily="34" charset="-122"/>
+                <a:cs typeface="Arial" pitchFamily="34" charset="-120"/>
               </a:rPr>
               <a:t>attack.detected</a:t>
             </a:r>
@@ -16469,15 +16750,15 @@
               <a:buNone/>
             </a:pPr>
             <a:r>
-              <a:rPr lang="en-US" sz="1800" b="1" dirty="0">
+              <a:rPr lang="en-US" sz="1800" dirty="0">
                 <a:solidFill>
                   <a:srgbClr val="0E7490"/>
                 </a:solidFill>
-                <a:latin typeface="Cambria" pitchFamily="34" charset="0"/>
-                <a:ea typeface="Cambria" pitchFamily="34" charset="-122"/>
-                <a:cs typeface="Cambria" pitchFamily="34" charset="-120"/>
+                <a:latin typeface="Arial" pitchFamily="34" charset="0"/>
+                <a:ea typeface="Arial" pitchFamily="34" charset="-122"/>
+                <a:cs typeface="Arial" pitchFamily="34" charset="-120"/>
               </a:rPr>
-              <a:t>P4 · P5</a:t>
+              <a:t>P4, P5</a:t>
             </a:r>
             <a:endParaRPr lang="en-US" sz="1800" dirty="0"/>
           </a:p>
@@ -16508,12 +16789,12 @@
               <a:buNone/>
             </a:pPr>
             <a:r>
-              <a:rPr lang="en-US" sz="1300" b="1" dirty="0">
+              <a:rPr lang="en-US" sz="1400" dirty="0">
                 <a:solidFill>
                   <a:srgbClr val="0F172A"/>
                 </a:solidFill>
               </a:rPr>
-              <a:t>Alert · Dash</a:t>
+              <a:t>Alert, UI</a:t>
             </a:r>
             <a:endParaRPr lang="en-US" sz="1300" dirty="0"/>
           </a:p>
@@ -16544,12 +16825,12 @@
               <a:buNone/>
             </a:pPr>
             <a:r>
-              <a:rPr lang="en-US" sz="1200" dirty="0">
+              <a:rPr lang="en-US" sz="1300" dirty="0">
                 <a:solidFill>
                   <a:srgbClr val="64748B"/>
                 </a:solidFill>
               </a:rPr>
-              <a:t>email · SSE</a:t>
+              <a:t>email, SSE</a:t>
             </a:r>
             <a:endParaRPr lang="en-US" sz="1200" dirty="0"/>
           </a:p>
@@ -16563,8 +16844,8 @@
         </p:nvSpPr>
         <p:spPr>
           <a:xfrm>
-            <a:off x="457200" y="3246120"/>
-            <a:ext cx="8229600" cy="1325880"/>
+            <a:off x="457200" y="3017520"/>
+            <a:ext cx="8229600" cy="1554480"/>
           </a:xfrm>
           <a:prstGeom prst="roundRect">
             <a:avLst>
@@ -16597,8 +16878,8 @@
         </p:nvSpPr>
         <p:spPr>
           <a:xfrm>
-            <a:off x="685800" y="3383280"/>
-            <a:ext cx="7772400" cy="1097280"/>
+            <a:off x="685800" y="3154680"/>
+            <a:ext cx="7772400" cy="1325880"/>
           </a:xfrm>
           <a:prstGeom prst="rect">
             <a:avLst/>
@@ -16617,7 +16898,7 @@
               <a:buNone/>
             </a:pPr>
             <a:r>
-              <a:rPr lang="en-US" sz="1250" b="1" dirty="0">
+              <a:rPr lang="en-US" sz="1400" dirty="0">
                 <a:solidFill>
                   <a:schemeClr val="tx1"/>
                 </a:solidFill>
@@ -16631,13 +16912,13 @@
               <a:buNone/>
             </a:pPr>
             <a:r>
-              <a:rPr lang="en-US" sz="1100" dirty="0">
+              <a:rPr lang="en-US" sz="1050" dirty="0">
                 <a:solidFill>
                   <a:schemeClr val="tx1"/>
                 </a:solidFill>
-                <a:latin typeface="Courier New" pitchFamily="34" charset="0"/>
-                <a:ea typeface="Courier New" pitchFamily="34" charset="-122"/>
-                <a:cs typeface="Courier New" pitchFamily="34" charset="-120"/>
+                <a:latin typeface="Arial" pitchFamily="34" charset="0"/>
+                <a:ea typeface="Arial" pitchFamily="34" charset="-122"/>
+                <a:cs typeface="Arial" pitchFamily="34" charset="-120"/>
               </a:rPr>
               <a:t>{ event, event_id, schema_version, request_id | session_id, timestamp, source, domain, data }</a:t>
             </a:r>
@@ -16651,12 +16932,12 @@
               <a:buNone/>
             </a:pPr>
             <a:r>
-              <a:rPr lang="en-US" sz="1250" dirty="0">
+              <a:rPr lang="en-US" sz="1400" dirty="0">
                 <a:solidFill>
                   <a:schemeClr val="tx1"/>
                 </a:solidFill>
               </a:rPr>
-              <a:t>Kafka 4.1 KRaft · 3 partition/topic sự kiện · retention 3 ngày · </a:t>
+              <a:t>Kafka 4.1 KRaft, 3 partition mỗi topic sự kiện, retention 3 ngày; </a:t>
             </a:r>
             <a:pPr indent="0" marL="0">
               <a:spcAft>
@@ -16665,13 +16946,13 @@
               <a:buNone/>
             </a:pPr>
             <a:r>
-              <a:rPr lang="en-US" sz="1100" dirty="0">
+              <a:rPr lang="en-US" sz="1050" dirty="0">
                 <a:solidFill>
                   <a:schemeClr val="tx1"/>
                 </a:solidFill>
-                <a:latin typeface="Courier New" pitchFamily="34" charset="0"/>
-                <a:ea typeface="Courier New" pitchFamily="34" charset="-122"/>
-                <a:cs typeface="Courier New" pitchFamily="34" charset="-120"/>
+                <a:latin typeface="Arial" pitchFamily="34" charset="0"/>
+                <a:ea typeface="Arial" pitchFamily="34" charset="-122"/>
+                <a:cs typeface="Arial" pitchFamily="34" charset="-120"/>
               </a:rPr>
               <a:t>rules.changed</a:t>
             </a:r>
@@ -16682,12 +16963,12 @@
               <a:buNone/>
             </a:pPr>
             <a:r>
-              <a:rPr lang="en-US" sz="1250" dirty="0">
+              <a:rPr lang="en-US" sz="1400" dirty="0">
                 <a:solidFill>
                   <a:schemeClr val="tx1"/>
                 </a:solidFill>
               </a:rPr>
-              <a:t> (compacted) · </a:t>
+              <a:t> (compacted), </a:t>
             </a:r>
             <a:pPr indent="0" marL="0">
               <a:spcAft>
@@ -16696,13 +16977,13 @@
               <a:buNone/>
             </a:pPr>
             <a:r>
-              <a:rPr lang="en-US" sz="1100" dirty="0">
+              <a:rPr lang="en-US" sz="1050" dirty="0">
                 <a:solidFill>
                   <a:schemeClr val="tx1"/>
                 </a:solidFill>
-                <a:latin typeface="Courier New" pitchFamily="34" charset="0"/>
-                <a:ea typeface="Courier New" pitchFamily="34" charset="-122"/>
-                <a:cs typeface="Courier New" pitchFamily="34" charset="-120"/>
+                <a:latin typeface="Arial" pitchFamily="34" charset="0"/>
+                <a:ea typeface="Arial" pitchFamily="34" charset="-122"/>
+                <a:cs typeface="Arial" pitchFamily="34" charset="-120"/>
               </a:rPr>
               <a:t>waf.deadletter</a:t>
             </a:r>
@@ -16713,7 +16994,7 @@
               <a:buNone/>
             </a:pPr>
             <a:r>
-              <a:rPr lang="en-US" sz="1250" dirty="0">
+              <a:rPr lang="en-US" sz="1400" dirty="0">
                 <a:solidFill>
                   <a:schemeClr val="tx1"/>
                 </a:solidFill>
@@ -16730,12 +17011,12 @@
               <a:buNone/>
             </a:pPr>
             <a:r>
-              <a:rPr lang="en-US" sz="1250" dirty="0">
+              <a:rPr lang="en-US" sz="1400" dirty="0">
                 <a:solidFill>
                   <a:schemeClr val="tx1"/>
                 </a:solidFill>
               </a:rPr>
-              <a:t>Commit offset chỉ sau khi broker xác nhận mọi output → at-least-once; event_id do detector sinh xác định theo input → không trùng khi xử lý lại</a:t>
+              <a:t>Commit offset chỉ sau khi broker xác nhận mọi output, bảo đảm at-least-once; event_id do detector sinh xác định theo input nên không trùng khi xử lý lại</a:t>
             </a:r>
             <a:endParaRPr lang="en-US" sz="1250" dirty="0"/>
           </a:p>
@@ -16842,11 +17123,11 @@
                 <a:solidFill>
                   <a:schemeClr val="tx1"/>
                 </a:solidFill>
-                <a:latin typeface="Cambria" pitchFamily="34" charset="0"/>
-                <a:ea typeface="Cambria" pitchFamily="34" charset="-122"/>
-                <a:cs typeface="Cambria" pitchFamily="34" charset="-120"/>
+                <a:latin typeface="Arial" pitchFamily="34" charset="0"/>
+                <a:ea typeface="Arial" pitchFamily="34" charset="-122"/>
+                <a:cs typeface="Arial" pitchFamily="34" charset="-120"/>
               </a:rPr>
-              <a:t>Mô hình triển khai: 3 stack độc lập + giám sát</a:t>
+              <a:t>Mô hình triển khai: 3 stack và giám sát</a:t>
             </a:r>
             <a:endParaRPr lang="en-US" sz="2600" dirty="0"/>
           </a:p>
@@ -16901,13 +17182,13 @@
               <a:buNone/>
             </a:pPr>
             <a:r>
-              <a:rPr lang="en-US" sz="1200" b="1" dirty="0">
+              <a:rPr lang="en-US" sz="1200" dirty="0">
                 <a:solidFill>
                   <a:schemeClr val="tx2"/>
                 </a:solidFill>
-                <a:latin typeface="Courier New" pitchFamily="34" charset="0"/>
-                <a:ea typeface="Courier New" pitchFamily="34" charset="-122"/>
-                <a:cs typeface="Courier New" pitchFamily="34" charset="-120"/>
+                <a:latin typeface="Arial" pitchFamily="34" charset="0"/>
+                <a:ea typeface="Arial" pitchFamily="34" charset="-122"/>
+                <a:cs typeface="Arial" pitchFamily="34" charset="-120"/>
               </a:rPr>
               <a:t>make up</a:t>
             </a:r>
@@ -16920,19 +17201,19 @@
                   <a:schemeClr val="tx2"/>
                 </a:solidFill>
               </a:rPr>
-              <a:t> – demo 1 stack   ·   </a:t>
+              <a:t>: demo 1 stack;   </a:t>
             </a:r>
             <a:pPr algn="ctr" indent="0" marL="0">
               <a:buNone/>
             </a:pPr>
             <a:r>
-              <a:rPr lang="en-US" sz="1200" b="1" dirty="0">
+              <a:rPr lang="en-US" sz="1200" dirty="0">
                 <a:solidFill>
                   <a:schemeClr val="tx2"/>
                 </a:solidFill>
-                <a:latin typeface="Courier New" pitchFamily="34" charset="0"/>
-                <a:ea typeface="Courier New" pitchFamily="34" charset="-122"/>
-                <a:cs typeface="Courier New" pitchFamily="34" charset="-120"/>
+                <a:latin typeface="Arial" pitchFamily="34" charset="0"/>
+                <a:ea typeface="Arial" pitchFamily="34" charset="-122"/>
+                <a:cs typeface="Arial" pitchFamily="34" charset="-120"/>
               </a:rPr>
               <a:t>make deploy-up</a:t>
             </a:r>
@@ -16945,19 +17226,19 @@
                   <a:schemeClr val="tx2"/>
                 </a:solidFill>
               </a:rPr>
-              <a:t> – 3 stack   ·   </a:t>
+              <a:t>: 3 stack;   </a:t>
             </a:r>
             <a:pPr algn="ctr" indent="0" marL="0">
               <a:buNone/>
             </a:pPr>
             <a:r>
-              <a:rPr lang="en-US" sz="1200" b="1" dirty="0">
+              <a:rPr lang="en-US" sz="1200" dirty="0">
                 <a:solidFill>
                   <a:schemeClr val="tx2"/>
                 </a:solidFill>
-                <a:latin typeface="Courier New" pitchFamily="34" charset="0"/>
-                <a:ea typeface="Courier New" pitchFamily="34" charset="-122"/>
-                <a:cs typeface="Courier New" pitchFamily="34" charset="-120"/>
+                <a:latin typeface="Arial" pitchFamily="34" charset="0"/>
+                <a:ea typeface="Arial" pitchFamily="34" charset="-122"/>
+                <a:cs typeface="Arial" pitchFamily="34" charset="-120"/>
               </a:rPr>
               <a:t>make obs-up</a:t>
             </a:r>
@@ -16970,19 +17251,19 @@
                   <a:schemeClr val="tx2"/>
                 </a:solidFill>
               </a:rPr>
-              <a:t> – Grafana   ·   </a:t>
+              <a:t>: Grafana;   </a:t>
             </a:r>
             <a:pPr algn="ctr" indent="0" marL="0">
               <a:buNone/>
             </a:pPr>
             <a:r>
-              <a:rPr lang="en-US" sz="1200" b="1" dirty="0">
+              <a:rPr lang="en-US" sz="1200" dirty="0">
                 <a:solidFill>
                   <a:schemeClr val="tx2"/>
                 </a:solidFill>
-                <a:latin typeface="Courier New" pitchFamily="34" charset="0"/>
-                <a:ea typeface="Courier New" pitchFamily="34" charset="-122"/>
-                <a:cs typeface="Courier New" pitchFamily="34" charset="-120"/>
+                <a:latin typeface="Arial" pitchFamily="34" charset="0"/>
+                <a:ea typeface="Arial" pitchFamily="34" charset="-122"/>
+                <a:cs typeface="Arial" pitchFamily="34" charset="-120"/>
               </a:rPr>
               <a:t>make server-up</a:t>
             </a:r>
@@ -16995,7 +17276,7 @@
                   <a:schemeClr val="tx2"/>
                 </a:solidFill>
               </a:rPr>
-              <a:t> – server thật</a:t>
+              <a:t>: server thật</a:t>
             </a:r>
             <a:endParaRPr lang="en-US" sz="1200" dirty="0"/>
           </a:p>
@@ -17102,9 +17383,9 @@
                 <a:solidFill>
                   <a:schemeClr val="tx1"/>
                 </a:solidFill>
-                <a:latin typeface="Cambria" pitchFamily="34" charset="0"/>
-                <a:ea typeface="Cambria" pitchFamily="34" charset="-122"/>
-                <a:cs typeface="Cambria" pitchFamily="34" charset="-120"/>
+                <a:latin typeface="Arial" pitchFamily="34" charset="0"/>
+                <a:ea typeface="Arial" pitchFamily="34" charset="-122"/>
+                <a:cs typeface="Arial" pitchFamily="34" charset="-120"/>
               </a:rPr>
               <a:t>Môi trường triển khai: hệ điều hành và runtime</a:t>
             </a:r>
@@ -17149,20 +17430,20 @@
                         <a:buNone/>
                       </a:pPr>
                       <a:r>
-                        <a:rPr lang="en-US" sz="1050" b="1" dirty="0">
+                        <a:rPr lang="en-US" sz="1200" dirty="0">
                           <a:solidFill>
                             <a:srgbClr val="FFFFFF"/>
                           </a:solidFill>
-                          <a:latin typeface="Calibri" pitchFamily="34" charset="0"/>
-                          <a:ea typeface="Calibri" pitchFamily="34" charset="-122"/>
-                          <a:cs typeface="Calibri" pitchFamily="34" charset="-120"/>
+                          <a:latin typeface="Arial" pitchFamily="34" charset="0"/>
+                          <a:ea typeface="Arial" pitchFamily="34" charset="-122"/>
+                          <a:cs typeface="Arial" pitchFamily="34" charset="-120"/>
                         </a:rPr>
                         <a:t>Mức</a:t>
                       </a:r>
                       <a:endParaRPr lang="en-US" sz="1050" dirty="0">
-                        <a:latin typeface="Calibri" charset="0"/>
-                        <a:ea typeface="Calibri" charset="0"/>
-                        <a:cs typeface="Calibri" charset="0"/>
+                        <a:latin typeface="Arial" charset="0"/>
+                        <a:ea typeface="Arial" charset="0"/>
+                        <a:cs typeface="Arial" charset="0"/>
                       </a:endParaRPr>
                     </a:p>
                   </a:txBody>
@@ -17217,20 +17498,20 @@
                         <a:buNone/>
                       </a:pPr>
                       <a:r>
-                        <a:rPr lang="en-US" sz="1050" b="1" dirty="0">
+                        <a:rPr lang="en-US" sz="1200" dirty="0">
                           <a:solidFill>
                             <a:srgbClr val="FFFFFF"/>
                           </a:solidFill>
-                          <a:latin typeface="Calibri" pitchFamily="34" charset="0"/>
-                          <a:ea typeface="Calibri" pitchFamily="34" charset="-122"/>
-                          <a:cs typeface="Calibri" pitchFamily="34" charset="-120"/>
+                          <a:latin typeface="Arial" pitchFamily="34" charset="0"/>
+                          <a:ea typeface="Arial" pitchFamily="34" charset="-122"/>
+                          <a:cs typeface="Arial" pitchFamily="34" charset="-120"/>
                         </a:rPr>
                         <a:t>Thành phần</a:t>
                       </a:r>
                       <a:endParaRPr lang="en-US" sz="1050" dirty="0">
-                        <a:latin typeface="Calibri" charset="0"/>
-                        <a:ea typeface="Calibri" charset="0"/>
-                        <a:cs typeface="Calibri" charset="0"/>
+                        <a:latin typeface="Arial" charset="0"/>
+                        <a:ea typeface="Arial" charset="0"/>
+                        <a:cs typeface="Arial" charset="0"/>
                       </a:endParaRPr>
                     </a:p>
                   </a:txBody>
@@ -17285,20 +17566,20 @@
                         <a:buNone/>
                       </a:pPr>
                       <a:r>
-                        <a:rPr lang="en-US" sz="1050" b="1" dirty="0">
+                        <a:rPr lang="en-US" sz="1200" dirty="0">
                           <a:solidFill>
                             <a:srgbClr val="FFFFFF"/>
                           </a:solidFill>
-                          <a:latin typeface="Calibri" pitchFamily="34" charset="0"/>
-                          <a:ea typeface="Calibri" pitchFamily="34" charset="-122"/>
-                          <a:cs typeface="Calibri" pitchFamily="34" charset="-120"/>
+                          <a:latin typeface="Arial" pitchFamily="34" charset="0"/>
+                          <a:ea typeface="Arial" pitchFamily="34" charset="-122"/>
+                          <a:cs typeface="Arial" pitchFamily="34" charset="-120"/>
                         </a:rPr>
                         <a:t>Hệ điều hành / phiên bản</a:t>
                       </a:r>
                       <a:endParaRPr lang="en-US" sz="1050" dirty="0">
-                        <a:latin typeface="Calibri" charset="0"/>
-                        <a:ea typeface="Calibri" charset="0"/>
-                        <a:cs typeface="Calibri" charset="0"/>
+                        <a:latin typeface="Arial" charset="0"/>
+                        <a:ea typeface="Arial" charset="0"/>
+                        <a:cs typeface="Arial" charset="0"/>
                       </a:endParaRPr>
                     </a:p>
                   </a:txBody>
@@ -17355,20 +17636,20 @@
                         <a:buNone/>
                       </a:pPr>
                       <a:r>
-                        <a:rPr lang="en-US" sz="1050" dirty="0">
+                        <a:rPr lang="en-US" sz="1200" dirty="0">
                           <a:solidFill>
                             <a:srgbClr val="0F172A"/>
                           </a:solidFill>
-                          <a:latin typeface="Calibri" pitchFamily="34" charset="0"/>
-                          <a:ea typeface="Calibri" pitchFamily="34" charset="-122"/>
-                          <a:cs typeface="Calibri" pitchFamily="34" charset="-120"/>
+                          <a:latin typeface="Arial" pitchFamily="34" charset="0"/>
+                          <a:ea typeface="Arial" pitchFamily="34" charset="-122"/>
+                          <a:cs typeface="Arial" pitchFamily="34" charset="-120"/>
                         </a:rPr>
                         <a:t>Host</a:t>
                       </a:r>
                       <a:endParaRPr lang="en-US" sz="1050" dirty="0">
-                        <a:latin typeface="Calibri" charset="0"/>
-                        <a:ea typeface="Calibri" charset="0"/>
-                        <a:cs typeface="Calibri" charset="0"/>
+                        <a:latin typeface="Arial" charset="0"/>
+                        <a:ea typeface="Arial" charset="0"/>
+                        <a:cs typeface="Arial" charset="0"/>
                       </a:endParaRPr>
                     </a:p>
                   </a:txBody>
@@ -17423,20 +17704,20 @@
                         <a:buNone/>
                       </a:pPr>
                       <a:r>
-                        <a:rPr lang="en-US" sz="1050" dirty="0">
+                        <a:rPr lang="en-US" sz="1200" dirty="0">
                           <a:solidFill>
                             <a:srgbClr val="0F172A"/>
                           </a:solidFill>
-                          <a:latin typeface="Calibri" pitchFamily="34" charset="0"/>
-                          <a:ea typeface="Calibri" pitchFamily="34" charset="-122"/>
-                          <a:cs typeface="Calibri" pitchFamily="34" charset="-120"/>
+                          <a:latin typeface="Arial" pitchFamily="34" charset="0"/>
+                          <a:ea typeface="Arial" pitchFamily="34" charset="-122"/>
+                          <a:cs typeface="Arial" pitchFamily="34" charset="-120"/>
                         </a:rPr>
                         <a:t>Máy chủ</a:t>
                       </a:r>
                       <a:endParaRPr lang="en-US" sz="1050" dirty="0">
-                        <a:latin typeface="Calibri" charset="0"/>
-                        <a:ea typeface="Calibri" charset="0"/>
-                        <a:cs typeface="Calibri" charset="0"/>
+                        <a:latin typeface="Arial" charset="0"/>
+                        <a:ea typeface="Arial" charset="0"/>
+                        <a:cs typeface="Arial" charset="0"/>
                       </a:endParaRPr>
                     </a:p>
                   </a:txBody>
@@ -17491,20 +17772,20 @@
                         <a:buNone/>
                       </a:pPr>
                       <a:r>
-                        <a:rPr lang="en-US" sz="1050" dirty="0">
+                        <a:rPr lang="en-US" sz="1200" dirty="0">
                           <a:solidFill>
                             <a:srgbClr val="0F172A"/>
                           </a:solidFill>
-                          <a:latin typeface="Calibri" pitchFamily="34" charset="0"/>
-                          <a:ea typeface="Calibri" pitchFamily="34" charset="-122"/>
-                          <a:cs typeface="Calibri" pitchFamily="34" charset="-120"/>
+                          <a:latin typeface="Arial" pitchFamily="34" charset="0"/>
+                          <a:ea typeface="Arial" pitchFamily="34" charset="-122"/>
+                          <a:cs typeface="Arial" pitchFamily="34" charset="-120"/>
                         </a:rPr>
-                        <a:t>Linux 64-bit (Ubuntu 22.04/24.04 LTS) + Docker Engine; hoặc macOS / Windows (WSL2) + Docker Desktop</a:t>
+                        <a:t>Linux 64-bit (Ubuntu 22.04/24.04 LTS) với Docker Engine; hoặc macOS, Windows (WSL2) với Docker Desktop</a:t>
                       </a:r>
                       <a:endParaRPr lang="en-US" sz="1050" dirty="0">
-                        <a:latin typeface="Calibri" charset="0"/>
-                        <a:ea typeface="Calibri" charset="0"/>
-                        <a:cs typeface="Calibri" charset="0"/>
+                        <a:latin typeface="Arial" charset="0"/>
+                        <a:ea typeface="Arial" charset="0"/>
+                        <a:cs typeface="Arial" charset="0"/>
                       </a:endParaRPr>
                     </a:p>
                   </a:txBody>
@@ -17561,20 +17842,20 @@
                         <a:buNone/>
                       </a:pPr>
                       <a:r>
-                        <a:rPr lang="en-US" sz="1050" dirty="0">
+                        <a:rPr lang="en-US" sz="1200" dirty="0">
                           <a:solidFill>
                             <a:srgbClr val="0F172A"/>
                           </a:solidFill>
-                          <a:latin typeface="Calibri" pitchFamily="34" charset="0"/>
-                          <a:ea typeface="Calibri" pitchFamily="34" charset="-122"/>
-                          <a:cs typeface="Calibri" pitchFamily="34" charset="-120"/>
+                          <a:latin typeface="Arial" pitchFamily="34" charset="0"/>
+                          <a:ea typeface="Arial" pitchFamily="34" charset="-122"/>
+                          <a:cs typeface="Arial" pitchFamily="34" charset="-120"/>
                         </a:rPr>
                         <a:t>Host (đo)</a:t>
                       </a:r>
                       <a:endParaRPr lang="en-US" sz="1050" dirty="0">
-                        <a:latin typeface="Calibri" charset="0"/>
-                        <a:ea typeface="Calibri" charset="0"/>
-                        <a:cs typeface="Calibri" charset="0"/>
+                        <a:latin typeface="Arial" charset="0"/>
+                        <a:ea typeface="Arial" charset="0"/>
+                        <a:cs typeface="Arial" charset="0"/>
                       </a:endParaRPr>
                     </a:p>
                   </a:txBody>
@@ -17629,20 +17910,20 @@
                         <a:buNone/>
                       </a:pPr>
                       <a:r>
-                        <a:rPr lang="en-US" sz="1050" dirty="0">
+                        <a:rPr lang="en-US" sz="1200" dirty="0">
                           <a:solidFill>
                             <a:srgbClr val="0F172A"/>
                           </a:solidFill>
-                          <a:latin typeface="Calibri" pitchFamily="34" charset="0"/>
-                          <a:ea typeface="Calibri" pitchFamily="34" charset="-122"/>
-                          <a:cs typeface="Calibri" pitchFamily="34" charset="-120"/>
+                          <a:latin typeface="Arial" pitchFamily="34" charset="0"/>
+                          <a:ea typeface="Arial" pitchFamily="34" charset="-122"/>
+                          <a:cs typeface="Arial" pitchFamily="34" charset="-120"/>
                         </a:rPr>
                         <a:t>Máy thực nghiệm</a:t>
                       </a:r>
                       <a:endParaRPr lang="en-US" sz="1050" dirty="0">
-                        <a:latin typeface="Calibri" charset="0"/>
-                        <a:ea typeface="Calibri" charset="0"/>
-                        <a:cs typeface="Calibri" charset="0"/>
+                        <a:latin typeface="Arial" charset="0"/>
+                        <a:ea typeface="Arial" charset="0"/>
+                        <a:cs typeface="Arial" charset="0"/>
                       </a:endParaRPr>
                     </a:p>
                   </a:txBody>
@@ -17697,20 +17978,20 @@
                         <a:buNone/>
                       </a:pPr>
                       <a:r>
-                        <a:rPr lang="en-US" sz="1050" dirty="0">
+                        <a:rPr lang="en-US" sz="1200" dirty="0">
                           <a:solidFill>
                             <a:srgbClr val="0F172A"/>
                           </a:solidFill>
-                          <a:latin typeface="Calibri" pitchFamily="34" charset="0"/>
-                          <a:ea typeface="Calibri" pitchFamily="34" charset="-122"/>
-                          <a:cs typeface="Calibri" pitchFamily="34" charset="-120"/>
+                          <a:latin typeface="Arial" pitchFamily="34" charset="0"/>
+                          <a:ea typeface="Arial" pitchFamily="34" charset="-122"/>
+                          <a:cs typeface="Arial" pitchFamily="34" charset="-120"/>
                         </a:rPr>
-                        <a:t>macOS, Apple M4 (arm64) · Docker Desktop 10 CPU / 8 GB RAM</a:t>
+                        <a:t>macOS, Apple M4 (arm64), Docker Desktop 10 CPU, 8 GB RAM</a:t>
                       </a:r>
                       <a:endParaRPr lang="en-US" sz="1050" dirty="0">
-                        <a:latin typeface="Calibri" charset="0"/>
-                        <a:ea typeface="Calibri" charset="0"/>
-                        <a:cs typeface="Calibri" charset="0"/>
+                        <a:latin typeface="Arial" charset="0"/>
+                        <a:ea typeface="Arial" charset="0"/>
+                        <a:cs typeface="Arial" charset="0"/>
                       </a:endParaRPr>
                     </a:p>
                   </a:txBody>
@@ -17767,20 +18048,20 @@
                         <a:buNone/>
                       </a:pPr>
                       <a:r>
-                        <a:rPr lang="en-US" sz="1050" dirty="0">
+                        <a:rPr lang="en-US" sz="1200" dirty="0">
                           <a:solidFill>
                             <a:srgbClr val="0F172A"/>
                           </a:solidFill>
-                          <a:latin typeface="Calibri" pitchFamily="34" charset="0"/>
-                          <a:ea typeface="Calibri" pitchFamily="34" charset="-122"/>
-                          <a:cs typeface="Calibri" pitchFamily="34" charset="-120"/>
+                          <a:latin typeface="Arial" pitchFamily="34" charset="0"/>
+                          <a:ea typeface="Arial" pitchFamily="34" charset="-122"/>
+                          <a:cs typeface="Arial" pitchFamily="34" charset="-120"/>
                         </a:rPr>
                         <a:t>Container</a:t>
                       </a:r>
                       <a:endParaRPr lang="en-US" sz="1050" dirty="0">
-                        <a:latin typeface="Calibri" charset="0"/>
-                        <a:ea typeface="Calibri" charset="0"/>
-                        <a:cs typeface="Calibri" charset="0"/>
+                        <a:latin typeface="Arial" charset="0"/>
+                        <a:ea typeface="Arial" charset="0"/>
+                        <a:cs typeface="Arial" charset="0"/>
                       </a:endParaRPr>
                     </a:p>
                   </a:txBody>
@@ -17835,20 +18116,20 @@
                         <a:buNone/>
                       </a:pPr>
                       <a:r>
-                        <a:rPr lang="en-US" sz="1050" dirty="0">
+                        <a:rPr lang="en-US" sz="1200" dirty="0">
                           <a:solidFill>
                             <a:srgbClr val="0F172A"/>
                           </a:solidFill>
-                          <a:latin typeface="Calibri" pitchFamily="34" charset="0"/>
-                          <a:ea typeface="Calibri" pitchFamily="34" charset="-122"/>
-                          <a:cs typeface="Calibri" pitchFamily="34" charset="-120"/>
+                          <a:latin typeface="Arial" pitchFamily="34" charset="0"/>
+                          <a:ea typeface="Arial" pitchFamily="34" charset="-122"/>
+                          <a:cs typeface="Arial" pitchFamily="34" charset="-120"/>
                         </a:rPr>
-                        <a:t>C1–C3, P1–P5</a:t>
+                        <a:t>C1-C3, P1-P5</a:t>
                       </a:r>
                       <a:endParaRPr lang="en-US" sz="1050" dirty="0">
-                        <a:latin typeface="Calibri" charset="0"/>
-                        <a:ea typeface="Calibri" charset="0"/>
-                        <a:cs typeface="Calibri" charset="0"/>
+                        <a:latin typeface="Arial" charset="0"/>
+                        <a:ea typeface="Arial" charset="0"/>
+                        <a:cs typeface="Arial" charset="0"/>
                       </a:endParaRPr>
                     </a:p>
                   </a:txBody>
@@ -17903,20 +18184,20 @@
                         <a:buNone/>
                       </a:pPr>
                       <a:r>
-                        <a:rPr lang="en-US" sz="1050" dirty="0">
+                        <a:rPr lang="en-US" sz="1200" dirty="0">
                           <a:solidFill>
                             <a:srgbClr val="0F172A"/>
                           </a:solidFill>
-                          <a:latin typeface="Calibri" pitchFamily="34" charset="0"/>
-                          <a:ea typeface="Calibri" pitchFamily="34" charset="-122"/>
-                          <a:cs typeface="Calibri" pitchFamily="34" charset="-120"/>
+                          <a:latin typeface="Arial" pitchFamily="34" charset="0"/>
+                          <a:ea typeface="Arial" pitchFamily="34" charset="-122"/>
+                          <a:cs typeface="Arial" pitchFamily="34" charset="-120"/>
                         </a:rPr>
-                        <a:t>Debian GNU/Linux – python:3.12-slim</a:t>
+                        <a:t>Debian GNU/Linux, python:3.12-slim</a:t>
                       </a:r>
                       <a:endParaRPr lang="en-US" sz="1050" dirty="0">
-                        <a:latin typeface="Calibri" charset="0"/>
-                        <a:ea typeface="Calibri" charset="0"/>
-                        <a:cs typeface="Calibri" charset="0"/>
+                        <a:latin typeface="Arial" charset="0"/>
+                        <a:ea typeface="Arial" charset="0"/>
+                        <a:cs typeface="Arial" charset="0"/>
                       </a:endParaRPr>
                     </a:p>
                   </a:txBody>
@@ -17973,20 +18254,20 @@
                         <a:buNone/>
                       </a:pPr>
                       <a:r>
-                        <a:rPr lang="en-US" sz="1050" dirty="0">
+                        <a:rPr lang="en-US" sz="1200" dirty="0">
                           <a:solidFill>
                             <a:srgbClr val="0F172A"/>
                           </a:solidFill>
-                          <a:latin typeface="Calibri" pitchFamily="34" charset="0"/>
-                          <a:ea typeface="Calibri" pitchFamily="34" charset="-122"/>
-                          <a:cs typeface="Calibri" pitchFamily="34" charset="-120"/>
+                          <a:latin typeface="Arial" pitchFamily="34" charset="0"/>
+                          <a:ea typeface="Arial" pitchFamily="34" charset="-122"/>
+                          <a:cs typeface="Arial" pitchFamily="34" charset="-120"/>
                         </a:rPr>
                         <a:t>Container</a:t>
                       </a:r>
                       <a:endParaRPr lang="en-US" sz="1050" dirty="0">
-                        <a:latin typeface="Calibri" charset="0"/>
-                        <a:ea typeface="Calibri" charset="0"/>
-                        <a:cs typeface="Calibri" charset="0"/>
+                        <a:latin typeface="Arial" charset="0"/>
+                        <a:ea typeface="Arial" charset="0"/>
+                        <a:cs typeface="Arial" charset="0"/>
                       </a:endParaRPr>
                     </a:p>
                   </a:txBody>
@@ -18041,20 +18322,20 @@
                         <a:buNone/>
                       </a:pPr>
                       <a:r>
-                        <a:rPr lang="en-US" sz="1050" dirty="0">
+                        <a:rPr lang="en-US" sz="1200" dirty="0">
                           <a:solidFill>
                             <a:srgbClr val="0F172A"/>
                           </a:solidFill>
-                          <a:latin typeface="Calibri" pitchFamily="34" charset="0"/>
-                          <a:ea typeface="Calibri" pitchFamily="34" charset="-122"/>
-                          <a:cs typeface="Calibri" pitchFamily="34" charset="-120"/>
+                          <a:latin typeface="Arial" pitchFamily="34" charset="0"/>
+                          <a:ea typeface="Arial" pitchFamily="34" charset="-122"/>
+                          <a:cs typeface="Arial" pitchFamily="34" charset="-120"/>
                         </a:rPr>
                         <a:t>detector, rule-api</a:t>
                       </a:r>
                       <a:endParaRPr lang="en-US" sz="1050" dirty="0">
-                        <a:latin typeface="Calibri" charset="0"/>
-                        <a:ea typeface="Calibri" charset="0"/>
-                        <a:cs typeface="Calibri" charset="0"/>
+                        <a:latin typeface="Arial" charset="0"/>
+                        <a:ea typeface="Arial" charset="0"/>
+                        <a:cs typeface="Arial" charset="0"/>
                       </a:endParaRPr>
                     </a:p>
                   </a:txBody>
@@ -18109,20 +18390,20 @@
                         <a:buNone/>
                       </a:pPr>
                       <a:r>
-                        <a:rPr lang="en-US" sz="1050" dirty="0">
+                        <a:rPr lang="en-US" sz="1200" dirty="0">
                           <a:solidFill>
                             <a:srgbClr val="0F172A"/>
                           </a:solidFill>
-                          <a:latin typeface="Calibri" pitchFamily="34" charset="0"/>
-                          <a:ea typeface="Calibri" pitchFamily="34" charset="-122"/>
-                          <a:cs typeface="Calibri" pitchFamily="34" charset="-120"/>
+                          <a:latin typeface="Arial" pitchFamily="34" charset="0"/>
+                          <a:ea typeface="Arial" pitchFamily="34" charset="-122"/>
+                          <a:cs typeface="Arial" pitchFamily="34" charset="-120"/>
                         </a:rPr>
-                        <a:t>Ubuntu LTS – eclipse-temurin:17-jre</a:t>
+                        <a:t>Ubuntu LTS, eclipse-temurin:17-jre</a:t>
                       </a:r>
                       <a:endParaRPr lang="en-US" sz="1050" dirty="0">
-                        <a:latin typeface="Calibri" charset="0"/>
-                        <a:ea typeface="Calibri" charset="0"/>
-                        <a:cs typeface="Calibri" charset="0"/>
+                        <a:latin typeface="Arial" charset="0"/>
+                        <a:ea typeface="Arial" charset="0"/>
+                        <a:cs typeface="Arial" charset="0"/>
                       </a:endParaRPr>
                     </a:p>
                   </a:txBody>
@@ -18179,20 +18460,20 @@
                         <a:buNone/>
                       </a:pPr>
                       <a:r>
-                        <a:rPr lang="en-US" sz="1050" dirty="0">
+                        <a:rPr lang="en-US" sz="1200" dirty="0">
                           <a:solidFill>
                             <a:srgbClr val="0F172A"/>
                           </a:solidFill>
-                          <a:latin typeface="Calibri" pitchFamily="34" charset="0"/>
-                          <a:ea typeface="Calibri" pitchFamily="34" charset="-122"/>
-                          <a:cs typeface="Calibri" pitchFamily="34" charset="-120"/>
+                          <a:latin typeface="Arial" pitchFamily="34" charset="0"/>
+                          <a:ea typeface="Arial" pitchFamily="34" charset="-122"/>
+                          <a:cs typeface="Arial" pitchFamily="34" charset="-120"/>
                         </a:rPr>
                         <a:t>Container</a:t>
                       </a:r>
                       <a:endParaRPr lang="en-US" sz="1050" dirty="0">
-                        <a:latin typeface="Calibri" charset="0"/>
-                        <a:ea typeface="Calibri" charset="0"/>
-                        <a:cs typeface="Calibri" charset="0"/>
+                        <a:latin typeface="Arial" charset="0"/>
+                        <a:ea typeface="Arial" charset="0"/>
+                        <a:cs typeface="Arial" charset="0"/>
                       </a:endParaRPr>
                     </a:p>
                   </a:txBody>
@@ -18247,20 +18528,20 @@
                         <a:buNone/>
                       </a:pPr>
                       <a:r>
-                        <a:rPr lang="en-US" sz="1050" dirty="0">
+                        <a:rPr lang="en-US" sz="1200" dirty="0">
                           <a:solidFill>
                             <a:srgbClr val="0F172A"/>
                           </a:solidFill>
-                          <a:latin typeface="Calibri" pitchFamily="34" charset="0"/>
-                          <a:ea typeface="Calibri" pitchFamily="34" charset="-122"/>
-                          <a:cs typeface="Calibri" pitchFamily="34" charset="-120"/>
+                          <a:latin typeface="Arial" pitchFamily="34" charset="0"/>
+                          <a:ea typeface="Arial" pitchFamily="34" charset="-122"/>
+                          <a:cs typeface="Arial" pitchFamily="34" charset="-120"/>
                         </a:rPr>
                         <a:t>nginx, gateway, postgres</a:t>
                       </a:r>
                       <a:endParaRPr lang="en-US" sz="1050" dirty="0">
-                        <a:latin typeface="Calibri" charset="0"/>
-                        <a:ea typeface="Calibri" charset="0"/>
-                        <a:cs typeface="Calibri" charset="0"/>
+                        <a:latin typeface="Arial" charset="0"/>
+                        <a:ea typeface="Arial" charset="0"/>
+                        <a:cs typeface="Arial" charset="0"/>
                       </a:endParaRPr>
                     </a:p>
                   </a:txBody>
@@ -18315,20 +18596,20 @@
                         <a:buNone/>
                       </a:pPr>
                       <a:r>
-                        <a:rPr lang="en-US" sz="1050" dirty="0">
+                        <a:rPr lang="en-US" sz="1200" dirty="0">
                           <a:solidFill>
                             <a:srgbClr val="0F172A"/>
                           </a:solidFill>
-                          <a:latin typeface="Calibri" pitchFamily="34" charset="0"/>
-                          <a:ea typeface="Calibri" pitchFamily="34" charset="-122"/>
-                          <a:cs typeface="Calibri" pitchFamily="34" charset="-120"/>
+                          <a:latin typeface="Arial" pitchFamily="34" charset="0"/>
+                          <a:ea typeface="Arial" pitchFamily="34" charset="-122"/>
+                          <a:cs typeface="Arial" pitchFamily="34" charset="-120"/>
                         </a:rPr>
-                        <a:t>Alpine Linux – nginx:1.28-alpine, postgres:17-alpine</a:t>
+                        <a:t>Alpine Linux, nginx:1.28-alpine, postgres:17-alpine</a:t>
                       </a:r>
                       <a:endParaRPr lang="en-US" sz="1050" dirty="0">
-                        <a:latin typeface="Calibri" charset="0"/>
-                        <a:ea typeface="Calibri" charset="0"/>
-                        <a:cs typeface="Calibri" charset="0"/>
+                        <a:latin typeface="Arial" charset="0"/>
+                        <a:ea typeface="Arial" charset="0"/>
+                        <a:cs typeface="Arial" charset="0"/>
                       </a:endParaRPr>
                     </a:p>
                   </a:txBody>
@@ -18438,12 +18719,12 @@
               <a:buNone/>
             </a:pPr>
             <a:r>
-              <a:rPr lang="en-US" sz="1500" b="1" dirty="0">
+              <a:rPr lang="en-US" sz="1500" dirty="0">
                 <a:solidFill>
                   <a:srgbClr val="F59E0B"/>
                 </a:solidFill>
               </a:rPr>
-              <a:t>Runtime &amp; công cụ</a:t>
+              <a:t>Runtime và công cụ</a:t>
             </a:r>
             <a:endParaRPr lang="en-US" sz="1500" dirty="0"/>
           </a:p>
@@ -18474,7 +18755,7 @@
               <a:buNone/>
             </a:pPr>
             <a:r>
-              <a:rPr lang="en-US" sz="1300" dirty="0">
+              <a:rPr lang="en-US" sz="1400" dirty="0">
                 <a:solidFill>
                   <a:srgbClr val="E2E8F0"/>
                 </a:solidFill>
@@ -18510,7 +18791,7 @@
               <a:buNone/>
             </a:pPr>
             <a:r>
-              <a:rPr lang="en-US" sz="1600" b="1" dirty="0">
+              <a:rPr lang="en-US" sz="1600" dirty="0">
                 <a:solidFill>
                   <a:srgbClr val="FFFFFF"/>
                 </a:solidFill>
@@ -18546,7 +18827,7 @@
               <a:buNone/>
             </a:pPr>
             <a:r>
-              <a:rPr lang="en-US" sz="1300" dirty="0">
+              <a:rPr lang="en-US" sz="1400" dirty="0">
                 <a:solidFill>
                   <a:srgbClr val="E2E8F0"/>
                 </a:solidFill>
@@ -18582,7 +18863,7 @@
               <a:buNone/>
             </a:pPr>
             <a:r>
-              <a:rPr lang="en-US" sz="1600" b="1" dirty="0">
+              <a:rPr lang="en-US" sz="1600" dirty="0">
                 <a:solidFill>
                   <a:srgbClr val="FFFFFF"/>
                 </a:solidFill>
@@ -18618,7 +18899,7 @@
               <a:buNone/>
             </a:pPr>
             <a:r>
-              <a:rPr lang="en-US" sz="1300" dirty="0">
+              <a:rPr lang="en-US" sz="1400" dirty="0">
                 <a:solidFill>
                   <a:srgbClr val="E2E8F0"/>
                 </a:solidFill>
@@ -18654,7 +18935,7 @@
               <a:buNone/>
             </a:pPr>
             <a:r>
-              <a:rPr lang="en-US" sz="1600" b="1" dirty="0">
+              <a:rPr lang="en-US" sz="1600" dirty="0">
                 <a:solidFill>
                   <a:srgbClr val="FFFFFF"/>
                 </a:solidFill>
@@ -18690,7 +18971,7 @@
               <a:buNone/>
             </a:pPr>
             <a:r>
-              <a:rPr lang="en-US" sz="1300" dirty="0">
+              <a:rPr lang="en-US" sz="1400" dirty="0">
                 <a:solidFill>
                   <a:srgbClr val="E2E8F0"/>
                 </a:solidFill>
@@ -18726,7 +19007,7 @@
               <a:buNone/>
             </a:pPr>
             <a:r>
-              <a:rPr lang="en-US" sz="1600" b="1" dirty="0">
+              <a:rPr lang="en-US" sz="1600" dirty="0">
                 <a:solidFill>
                   <a:srgbClr val="FFFFFF"/>
                 </a:solidFill>
@@ -18762,7 +19043,7 @@
               <a:buNone/>
             </a:pPr>
             <a:r>
-              <a:rPr lang="en-US" sz="1300" dirty="0">
+              <a:rPr lang="en-US" sz="1400" dirty="0">
                 <a:solidFill>
                   <a:srgbClr val="E2E8F0"/>
                 </a:solidFill>
@@ -18798,7 +19079,7 @@
               <a:buNone/>
             </a:pPr>
             <a:r>
-              <a:rPr lang="en-US" sz="1600" b="1" dirty="0">
+              <a:rPr lang="en-US" sz="1600" dirty="0">
                 <a:solidFill>
                   <a:srgbClr val="FFFFFF"/>
                 </a:solidFill>
@@ -18834,7 +19115,7 @@
               <a:buNone/>
             </a:pPr>
             <a:r>
-              <a:rPr lang="en-US" sz="1300" dirty="0">
+              <a:rPr lang="en-US" sz="1400" dirty="0">
                 <a:solidFill>
                   <a:srgbClr val="E2E8F0"/>
                 </a:solidFill>
@@ -18870,7 +19151,7 @@
               <a:buNone/>
             </a:pPr>
             <a:r>
-              <a:rPr lang="en-US" sz="1600" b="1" dirty="0">
+              <a:rPr lang="en-US" sz="1600" dirty="0">
                 <a:solidFill>
                   <a:srgbClr val="FFFFFF"/>
                 </a:solidFill>
@@ -18906,12 +19187,12 @@
               <a:buNone/>
             </a:pPr>
             <a:r>
-              <a:rPr lang="en-US" sz="1150" dirty="0">
+              <a:rPr lang="en-US" sz="1300" dirty="0">
                 <a:solidFill>
                   <a:schemeClr val="tx2"/>
                 </a:solidFill>
               </a:rPr>
-              <a:t>Tiện ích: make, curl, jq, openssl · Redocly CLI 1.34.5 · GeoIP DB-IP City Lite</a:t>
+              <a:t>Tiện ích: make, curl, jq, openssl, Redocly CLI 1.34.5, GeoIP DB-IP City Lite</a:t>
             </a:r>
             <a:endParaRPr lang="en-US" sz="1150" dirty="0"/>
           </a:p>
@@ -19018,9 +19299,9 @@
                 <a:solidFill>
                   <a:schemeClr val="tx1"/>
                 </a:solidFill>
-                <a:latin typeface="Cambria" pitchFamily="34" charset="0"/>
-                <a:ea typeface="Cambria" pitchFamily="34" charset="-122"/>
-                <a:cs typeface="Cambria" pitchFamily="34" charset="-120"/>
+                <a:latin typeface="Arial" pitchFamily="34" charset="0"/>
+                <a:ea typeface="Arial" pitchFamily="34" charset="-122"/>
+                <a:cs typeface="Arial" pitchFamily="34" charset="-120"/>
               </a:rPr>
               <a:t>Thư viện, công cụ và phiên bản</a:t>
             </a:r>
@@ -19064,20 +19345,20 @@
                         <a:buNone/>
                       </a:pPr>
                       <a:r>
-                        <a:rPr lang="en-US" sz="1050" b="1" dirty="0">
+                        <a:rPr lang="en-US" sz="1200" dirty="0">
                           <a:solidFill>
                             <a:srgbClr val="FFFFFF"/>
                           </a:solidFill>
-                          <a:latin typeface="Calibri" pitchFamily="34" charset="0"/>
-                          <a:ea typeface="Calibri" pitchFamily="34" charset="-122"/>
-                          <a:cs typeface="Calibri" pitchFamily="34" charset="-120"/>
+                          <a:latin typeface="Arial" pitchFamily="34" charset="0"/>
+                          <a:ea typeface="Arial" pitchFamily="34" charset="-122"/>
+                          <a:cs typeface="Arial" pitchFamily="34" charset="-120"/>
                         </a:rPr>
                         <a:t>Thư viện Python</a:t>
                       </a:r>
                       <a:endParaRPr lang="en-US" sz="1050" dirty="0">
-                        <a:latin typeface="Calibri" charset="0"/>
-                        <a:ea typeface="Calibri" charset="0"/>
-                        <a:cs typeface="Calibri" charset="0"/>
+                        <a:latin typeface="Arial" charset="0"/>
+                        <a:ea typeface="Arial" charset="0"/>
+                        <a:cs typeface="Arial" charset="0"/>
                       </a:endParaRPr>
                     </a:p>
                   </a:txBody>
@@ -19132,20 +19413,20 @@
                         <a:buNone/>
                       </a:pPr>
                       <a:r>
-                        <a:rPr lang="en-US" sz="1050" b="1" dirty="0">
+                        <a:rPr lang="en-US" sz="1200" dirty="0">
                           <a:solidFill>
                             <a:srgbClr val="FFFFFF"/>
                           </a:solidFill>
-                          <a:latin typeface="Calibri" pitchFamily="34" charset="0"/>
-                          <a:ea typeface="Calibri" pitchFamily="34" charset="-122"/>
-                          <a:cs typeface="Calibri" pitchFamily="34" charset="-120"/>
+                          <a:latin typeface="Arial" pitchFamily="34" charset="0"/>
+                          <a:ea typeface="Arial" pitchFamily="34" charset="-122"/>
+                          <a:cs typeface="Arial" pitchFamily="34" charset="-120"/>
                         </a:rPr>
                         <a:t>Phiên bản</a:t>
                       </a:r>
                       <a:endParaRPr lang="en-US" sz="1050" dirty="0">
-                        <a:latin typeface="Calibri" charset="0"/>
-                        <a:ea typeface="Calibri" charset="0"/>
-                        <a:cs typeface="Calibri" charset="0"/>
+                        <a:latin typeface="Arial" charset="0"/>
+                        <a:ea typeface="Arial" charset="0"/>
+                        <a:cs typeface="Arial" charset="0"/>
                       </a:endParaRPr>
                     </a:p>
                   </a:txBody>
@@ -19202,20 +19483,20 @@
                         <a:buNone/>
                       </a:pPr>
                       <a:r>
-                        <a:rPr lang="en-US" sz="1050" dirty="0">
+                        <a:rPr lang="en-US" sz="1200" dirty="0">
                           <a:solidFill>
                             <a:srgbClr val="0F172A"/>
                           </a:solidFill>
-                          <a:latin typeface="Calibri" pitchFamily="34" charset="0"/>
-                          <a:ea typeface="Calibri" pitchFamily="34" charset="-122"/>
-                          <a:cs typeface="Calibri" pitchFamily="34" charset="-120"/>
+                          <a:latin typeface="Arial" pitchFamily="34" charset="0"/>
+                          <a:ea typeface="Arial" pitchFamily="34" charset="-122"/>
+                          <a:cs typeface="Arial" pitchFamily="34" charset="-120"/>
                         </a:rPr>
                         <a:t>confluent-kafka</a:t>
                       </a:r>
                       <a:endParaRPr lang="en-US" sz="1050" dirty="0">
-                        <a:latin typeface="Calibri" charset="0"/>
-                        <a:ea typeface="Calibri" charset="0"/>
-                        <a:cs typeface="Calibri" charset="0"/>
+                        <a:latin typeface="Arial" charset="0"/>
+                        <a:ea typeface="Arial" charset="0"/>
+                        <a:cs typeface="Arial" charset="0"/>
                       </a:endParaRPr>
                     </a:p>
                   </a:txBody>
@@ -19270,20 +19551,20 @@
                         <a:buNone/>
                       </a:pPr>
                       <a:r>
-                        <a:rPr lang="en-US" sz="1050" dirty="0">
+                        <a:rPr lang="en-US" sz="1200" dirty="0">
                           <a:solidFill>
                             <a:srgbClr val="0F172A"/>
                           </a:solidFill>
-                          <a:latin typeface="Calibri" pitchFamily="34" charset="0"/>
-                          <a:ea typeface="Calibri" pitchFamily="34" charset="-122"/>
-                          <a:cs typeface="Calibri" pitchFamily="34" charset="-120"/>
+                          <a:latin typeface="Arial" pitchFamily="34" charset="0"/>
+                          <a:ea typeface="Arial" pitchFamily="34" charset="-122"/>
+                          <a:cs typeface="Arial" pitchFamily="34" charset="-120"/>
                         </a:rPr>
                         <a:t>2.16.0</a:t>
                       </a:r>
                       <a:endParaRPr lang="en-US" sz="1050" dirty="0">
-                        <a:latin typeface="Calibri" charset="0"/>
-                        <a:ea typeface="Calibri" charset="0"/>
-                        <a:cs typeface="Calibri" charset="0"/>
+                        <a:latin typeface="Arial" charset="0"/>
+                        <a:ea typeface="Arial" charset="0"/>
+                        <a:cs typeface="Arial" charset="0"/>
                       </a:endParaRPr>
                     </a:p>
                   </a:txBody>
@@ -19340,20 +19621,20 @@
                         <a:buNone/>
                       </a:pPr>
                       <a:r>
-                        <a:rPr lang="en-US" sz="1050" dirty="0">
+                        <a:rPr lang="en-US" sz="1200" dirty="0">
                           <a:solidFill>
                             <a:srgbClr val="0F172A"/>
                           </a:solidFill>
-                          <a:latin typeface="Calibri" pitchFamily="34" charset="0"/>
-                          <a:ea typeface="Calibri" pitchFamily="34" charset="-122"/>
-                          <a:cs typeface="Calibri" pitchFamily="34" charset="-120"/>
+                          <a:latin typeface="Arial" pitchFamily="34" charset="0"/>
+                          <a:ea typeface="Arial" pitchFamily="34" charset="-122"/>
+                          <a:cs typeface="Arial" pitchFamily="34" charset="-120"/>
                         </a:rPr>
                         <a:t>fastapi</a:t>
                       </a:r>
                       <a:endParaRPr lang="en-US" sz="1050" dirty="0">
-                        <a:latin typeface="Calibri" charset="0"/>
-                        <a:ea typeface="Calibri" charset="0"/>
-                        <a:cs typeface="Calibri" charset="0"/>
+                        <a:latin typeface="Arial" charset="0"/>
+                        <a:ea typeface="Arial" charset="0"/>
+                        <a:cs typeface="Arial" charset="0"/>
                       </a:endParaRPr>
                     </a:p>
                   </a:txBody>
@@ -19408,20 +19689,20 @@
                         <a:buNone/>
                       </a:pPr>
                       <a:r>
-                        <a:rPr lang="en-US" sz="1050" dirty="0">
+                        <a:rPr lang="en-US" sz="1200" dirty="0">
                           <a:solidFill>
                             <a:srgbClr val="0F172A"/>
                           </a:solidFill>
-                          <a:latin typeface="Calibri" pitchFamily="34" charset="0"/>
-                          <a:ea typeface="Calibri" pitchFamily="34" charset="-122"/>
-                          <a:cs typeface="Calibri" pitchFamily="34" charset="-120"/>
+                          <a:latin typeface="Arial" pitchFamily="34" charset="0"/>
+                          <a:ea typeface="Arial" pitchFamily="34" charset="-122"/>
+                          <a:cs typeface="Arial" pitchFamily="34" charset="-120"/>
                         </a:rPr>
                         <a:t>0.115.5</a:t>
                       </a:r>
                       <a:endParaRPr lang="en-US" sz="1050" dirty="0">
-                        <a:latin typeface="Calibri" charset="0"/>
-                        <a:ea typeface="Calibri" charset="0"/>
-                        <a:cs typeface="Calibri" charset="0"/>
+                        <a:latin typeface="Arial" charset="0"/>
+                        <a:ea typeface="Arial" charset="0"/>
+                        <a:cs typeface="Arial" charset="0"/>
                       </a:endParaRPr>
                     </a:p>
                   </a:txBody>
@@ -19478,20 +19759,20 @@
                         <a:buNone/>
                       </a:pPr>
                       <a:r>
-                        <a:rPr lang="en-US" sz="1050" dirty="0">
+                        <a:rPr lang="en-US" sz="1200" dirty="0">
                           <a:solidFill>
                             <a:srgbClr val="0F172A"/>
                           </a:solidFill>
-                          <a:latin typeface="Calibri" pitchFamily="34" charset="0"/>
-                          <a:ea typeface="Calibri" pitchFamily="34" charset="-122"/>
-                          <a:cs typeface="Calibri" pitchFamily="34" charset="-120"/>
+                          <a:latin typeface="Arial" pitchFamily="34" charset="0"/>
+                          <a:ea typeface="Arial" pitchFamily="34" charset="-122"/>
+                          <a:cs typeface="Arial" pitchFamily="34" charset="-120"/>
                         </a:rPr>
                         <a:t>uvicorn[standard]</a:t>
                       </a:r>
                       <a:endParaRPr lang="en-US" sz="1050" dirty="0">
-                        <a:latin typeface="Calibri" charset="0"/>
-                        <a:ea typeface="Calibri" charset="0"/>
-                        <a:cs typeface="Calibri" charset="0"/>
+                        <a:latin typeface="Arial" charset="0"/>
+                        <a:ea typeface="Arial" charset="0"/>
+                        <a:cs typeface="Arial" charset="0"/>
                       </a:endParaRPr>
                     </a:p>
                   </a:txBody>
@@ -19546,20 +19827,20 @@
                         <a:buNone/>
                       </a:pPr>
                       <a:r>
-                        <a:rPr lang="en-US" sz="1050" dirty="0">
+                        <a:rPr lang="en-US" sz="1200" dirty="0">
                           <a:solidFill>
                             <a:srgbClr val="0F172A"/>
                           </a:solidFill>
-                          <a:latin typeface="Calibri" pitchFamily="34" charset="0"/>
-                          <a:ea typeface="Calibri" pitchFamily="34" charset="-122"/>
-                          <a:cs typeface="Calibri" pitchFamily="34" charset="-120"/>
+                          <a:latin typeface="Arial" pitchFamily="34" charset="0"/>
+                          <a:ea typeface="Arial" pitchFamily="34" charset="-122"/>
+                          <a:cs typeface="Arial" pitchFamily="34" charset="-120"/>
                         </a:rPr>
                         <a:t>0.32.1</a:t>
                       </a:r>
                       <a:endParaRPr lang="en-US" sz="1050" dirty="0">
-                        <a:latin typeface="Calibri" charset="0"/>
-                        <a:ea typeface="Calibri" charset="0"/>
-                        <a:cs typeface="Calibri" charset="0"/>
+                        <a:latin typeface="Arial" charset="0"/>
+                        <a:ea typeface="Arial" charset="0"/>
+                        <a:cs typeface="Arial" charset="0"/>
                       </a:endParaRPr>
                     </a:p>
                   </a:txBody>
@@ -19616,20 +19897,20 @@
                         <a:buNone/>
                       </a:pPr>
                       <a:r>
-                        <a:rPr lang="en-US" sz="1050" dirty="0">
+                        <a:rPr lang="en-US" sz="1200" dirty="0">
                           <a:solidFill>
                             <a:srgbClr val="0F172A"/>
                           </a:solidFill>
-                          <a:latin typeface="Calibri" pitchFamily="34" charset="0"/>
-                          <a:ea typeface="Calibri" pitchFamily="34" charset="-122"/>
-                          <a:cs typeface="Calibri" pitchFamily="34" charset="-120"/>
+                          <a:latin typeface="Arial" pitchFamily="34" charset="0"/>
+                          <a:ea typeface="Arial" pitchFamily="34" charset="-122"/>
+                          <a:cs typeface="Arial" pitchFamily="34" charset="-120"/>
                         </a:rPr>
                         <a:t>psycopg[binary] / pool</a:t>
                       </a:r>
                       <a:endParaRPr lang="en-US" sz="1050" dirty="0">
-                        <a:latin typeface="Calibri" charset="0"/>
-                        <a:ea typeface="Calibri" charset="0"/>
-                        <a:cs typeface="Calibri" charset="0"/>
+                        <a:latin typeface="Arial" charset="0"/>
+                        <a:ea typeface="Arial" charset="0"/>
+                        <a:cs typeface="Arial" charset="0"/>
                       </a:endParaRPr>
                     </a:p>
                   </a:txBody>
@@ -19684,20 +19965,20 @@
                         <a:buNone/>
                       </a:pPr>
                       <a:r>
-                        <a:rPr lang="en-US" sz="1050" dirty="0">
+                        <a:rPr lang="en-US" sz="1200" dirty="0">
                           <a:solidFill>
                             <a:srgbClr val="0F172A"/>
                           </a:solidFill>
-                          <a:latin typeface="Calibri" pitchFamily="34" charset="0"/>
-                          <a:ea typeface="Calibri" pitchFamily="34" charset="-122"/>
-                          <a:cs typeface="Calibri" pitchFamily="34" charset="-120"/>
+                          <a:latin typeface="Arial" pitchFamily="34" charset="0"/>
+                          <a:ea typeface="Arial" pitchFamily="34" charset="-122"/>
+                          <a:cs typeface="Arial" pitchFamily="34" charset="-120"/>
                         </a:rPr>
                         <a:t>3.2.3 / 3.2.4</a:t>
                       </a:r>
                       <a:endParaRPr lang="en-US" sz="1050" dirty="0">
-                        <a:latin typeface="Calibri" charset="0"/>
-                        <a:ea typeface="Calibri" charset="0"/>
-                        <a:cs typeface="Calibri" charset="0"/>
+                        <a:latin typeface="Arial" charset="0"/>
+                        <a:ea typeface="Arial" charset="0"/>
+                        <a:cs typeface="Arial" charset="0"/>
                       </a:endParaRPr>
                     </a:p>
                   </a:txBody>
@@ -19754,20 +20035,20 @@
                         <a:buNone/>
                       </a:pPr>
                       <a:r>
-                        <a:rPr lang="en-US" sz="1050" dirty="0">
+                        <a:rPr lang="en-US" sz="1200" dirty="0">
                           <a:solidFill>
                             <a:srgbClr val="0F172A"/>
                           </a:solidFill>
-                          <a:latin typeface="Calibri" pitchFamily="34" charset="0"/>
-                          <a:ea typeface="Calibri" pitchFamily="34" charset="-122"/>
-                          <a:cs typeface="Calibri" pitchFamily="34" charset="-120"/>
+                          <a:latin typeface="Arial" pitchFamily="34" charset="0"/>
+                          <a:ea typeface="Arial" pitchFamily="34" charset="-122"/>
+                          <a:cs typeface="Arial" pitchFamily="34" charset="-120"/>
                         </a:rPr>
                         <a:t>PyJWT</a:t>
                       </a:r>
                       <a:endParaRPr lang="en-US" sz="1050" dirty="0">
-                        <a:latin typeface="Calibri" charset="0"/>
-                        <a:ea typeface="Calibri" charset="0"/>
-                        <a:cs typeface="Calibri" charset="0"/>
+                        <a:latin typeface="Arial" charset="0"/>
+                        <a:ea typeface="Arial" charset="0"/>
+                        <a:cs typeface="Arial" charset="0"/>
                       </a:endParaRPr>
                     </a:p>
                   </a:txBody>
@@ -19822,20 +20103,20 @@
                         <a:buNone/>
                       </a:pPr>
                       <a:r>
-                        <a:rPr lang="en-US" sz="1050" dirty="0">
+                        <a:rPr lang="en-US" sz="1200" dirty="0">
                           <a:solidFill>
                             <a:srgbClr val="0F172A"/>
                           </a:solidFill>
-                          <a:latin typeface="Calibri" pitchFamily="34" charset="0"/>
-                          <a:ea typeface="Calibri" pitchFamily="34" charset="-122"/>
-                          <a:cs typeface="Calibri" pitchFamily="34" charset="-120"/>
+                          <a:latin typeface="Arial" pitchFamily="34" charset="0"/>
+                          <a:ea typeface="Arial" pitchFamily="34" charset="-122"/>
+                          <a:cs typeface="Arial" pitchFamily="34" charset="-120"/>
                         </a:rPr>
                         <a:t>2.10.1</a:t>
                       </a:r>
                       <a:endParaRPr lang="en-US" sz="1050" dirty="0">
-                        <a:latin typeface="Calibri" charset="0"/>
-                        <a:ea typeface="Calibri" charset="0"/>
-                        <a:cs typeface="Calibri" charset="0"/>
+                        <a:latin typeface="Arial" charset="0"/>
+                        <a:ea typeface="Arial" charset="0"/>
+                        <a:cs typeface="Arial" charset="0"/>
                       </a:endParaRPr>
                     </a:p>
                   </a:txBody>
@@ -19892,20 +20173,20 @@
                         <a:buNone/>
                       </a:pPr>
                       <a:r>
-                        <a:rPr lang="en-US" sz="1050" dirty="0">
+                        <a:rPr lang="en-US" sz="1200" dirty="0">
                           <a:solidFill>
                             <a:srgbClr val="0F172A"/>
                           </a:solidFill>
-                          <a:latin typeface="Calibri" pitchFamily="34" charset="0"/>
-                          <a:ea typeface="Calibri" pitchFamily="34" charset="-122"/>
-                          <a:cs typeface="Calibri" pitchFamily="34" charset="-120"/>
+                          <a:latin typeface="Arial" pitchFamily="34" charset="0"/>
+                          <a:ea typeface="Arial" pitchFamily="34" charset="-122"/>
+                          <a:cs typeface="Arial" pitchFamily="34" charset="-120"/>
                         </a:rPr>
                         <a:t>httpx</a:t>
                       </a:r>
                       <a:endParaRPr lang="en-US" sz="1050" dirty="0">
-                        <a:latin typeface="Calibri" charset="0"/>
-                        <a:ea typeface="Calibri" charset="0"/>
-                        <a:cs typeface="Calibri" charset="0"/>
+                        <a:latin typeface="Arial" charset="0"/>
+                        <a:ea typeface="Arial" charset="0"/>
+                        <a:cs typeface="Arial" charset="0"/>
                       </a:endParaRPr>
                     </a:p>
                   </a:txBody>
@@ -19960,20 +20241,20 @@
                         <a:buNone/>
                       </a:pPr>
                       <a:r>
-                        <a:rPr lang="en-US" sz="1050" dirty="0">
+                        <a:rPr lang="en-US" sz="1200" dirty="0">
                           <a:solidFill>
                             <a:srgbClr val="0F172A"/>
                           </a:solidFill>
-                          <a:latin typeface="Calibri" pitchFamily="34" charset="0"/>
-                          <a:ea typeface="Calibri" pitchFamily="34" charset="-122"/>
-                          <a:cs typeface="Calibri" pitchFamily="34" charset="-120"/>
+                          <a:latin typeface="Arial" pitchFamily="34" charset="0"/>
+                          <a:ea typeface="Arial" pitchFamily="34" charset="-122"/>
+                          <a:cs typeface="Arial" pitchFamily="34" charset="-120"/>
                         </a:rPr>
                         <a:t>0.28.1</a:t>
                       </a:r>
                       <a:endParaRPr lang="en-US" sz="1050" dirty="0">
-                        <a:latin typeface="Calibri" charset="0"/>
-                        <a:ea typeface="Calibri" charset="0"/>
-                        <a:cs typeface="Calibri" charset="0"/>
+                        <a:latin typeface="Arial" charset="0"/>
+                        <a:ea typeface="Arial" charset="0"/>
+                        <a:cs typeface="Arial" charset="0"/>
                       </a:endParaRPr>
                     </a:p>
                   </a:txBody>
@@ -20030,20 +20311,20 @@
                         <a:buNone/>
                       </a:pPr>
                       <a:r>
-                        <a:rPr lang="en-US" sz="1050" dirty="0">
+                        <a:rPr lang="en-US" sz="1200" dirty="0">
                           <a:solidFill>
                             <a:srgbClr val="0F172A"/>
                           </a:solidFill>
-                          <a:latin typeface="Calibri" pitchFamily="34" charset="0"/>
-                          <a:ea typeface="Calibri" pitchFamily="34" charset="-122"/>
-                          <a:cs typeface="Calibri" pitchFamily="34" charset="-120"/>
+                          <a:latin typeface="Arial" pitchFamily="34" charset="0"/>
+                          <a:ea typeface="Arial" pitchFamily="34" charset="-122"/>
+                          <a:cs typeface="Arial" pitchFamily="34" charset="-120"/>
                         </a:rPr>
                         <a:t>geoip2</a:t>
                       </a:r>
                       <a:endParaRPr lang="en-US" sz="1050" dirty="0">
-                        <a:latin typeface="Calibri" charset="0"/>
-                        <a:ea typeface="Calibri" charset="0"/>
-                        <a:cs typeface="Calibri" charset="0"/>
+                        <a:latin typeface="Arial" charset="0"/>
+                        <a:ea typeface="Arial" charset="0"/>
+                        <a:cs typeface="Arial" charset="0"/>
                       </a:endParaRPr>
                     </a:p>
                   </a:txBody>
@@ -20098,20 +20379,20 @@
                         <a:buNone/>
                       </a:pPr>
                       <a:r>
-                        <a:rPr lang="en-US" sz="1050" dirty="0">
+                        <a:rPr lang="en-US" sz="1200" dirty="0">
                           <a:solidFill>
                             <a:srgbClr val="0F172A"/>
                           </a:solidFill>
-                          <a:latin typeface="Calibri" pitchFamily="34" charset="0"/>
-                          <a:ea typeface="Calibri" pitchFamily="34" charset="-122"/>
-                          <a:cs typeface="Calibri" pitchFamily="34" charset="-120"/>
+                          <a:latin typeface="Arial" pitchFamily="34" charset="0"/>
+                          <a:ea typeface="Arial" pitchFamily="34" charset="-122"/>
+                          <a:cs typeface="Arial" pitchFamily="34" charset="-120"/>
                         </a:rPr>
                         <a:t>4.8.1</a:t>
                       </a:r>
                       <a:endParaRPr lang="en-US" sz="1050" dirty="0">
-                        <a:latin typeface="Calibri" charset="0"/>
-                        <a:ea typeface="Calibri" charset="0"/>
-                        <a:cs typeface="Calibri" charset="0"/>
+                        <a:latin typeface="Arial" charset="0"/>
+                        <a:ea typeface="Arial" charset="0"/>
+                        <a:cs typeface="Arial" charset="0"/>
                       </a:endParaRPr>
                     </a:p>
                   </a:txBody>
@@ -20168,20 +20449,20 @@
                         <a:buNone/>
                       </a:pPr>
                       <a:r>
-                        <a:rPr lang="en-US" sz="1050" dirty="0">
+                        <a:rPr lang="en-US" sz="1200" dirty="0">
                           <a:solidFill>
                             <a:srgbClr val="0F172A"/>
                           </a:solidFill>
-                          <a:latin typeface="Calibri" pitchFamily="34" charset="0"/>
-                          <a:ea typeface="Calibri" pitchFamily="34" charset="-122"/>
-                          <a:cs typeface="Calibri" pitchFamily="34" charset="-120"/>
+                          <a:latin typeface="Arial" pitchFamily="34" charset="0"/>
+                          <a:ea typeface="Arial" pitchFamily="34" charset="-122"/>
+                          <a:cs typeface="Arial" pitchFamily="34" charset="-120"/>
                         </a:rPr>
                         <a:t>PyYAML</a:t>
                       </a:r>
                       <a:endParaRPr lang="en-US" sz="1050" dirty="0">
-                        <a:latin typeface="Calibri" charset="0"/>
-                        <a:ea typeface="Calibri" charset="0"/>
-                        <a:cs typeface="Calibri" charset="0"/>
+                        <a:latin typeface="Arial" charset="0"/>
+                        <a:ea typeface="Arial" charset="0"/>
+                        <a:cs typeface="Arial" charset="0"/>
                       </a:endParaRPr>
                     </a:p>
                   </a:txBody>
@@ -20236,20 +20517,20 @@
                         <a:buNone/>
                       </a:pPr>
                       <a:r>
-                        <a:rPr lang="en-US" sz="1050" dirty="0">
+                        <a:rPr lang="en-US" sz="1200" dirty="0">
                           <a:solidFill>
                             <a:srgbClr val="0F172A"/>
                           </a:solidFill>
-                          <a:latin typeface="Calibri" pitchFamily="34" charset="0"/>
-                          <a:ea typeface="Calibri" pitchFamily="34" charset="-122"/>
-                          <a:cs typeface="Calibri" pitchFamily="34" charset="-120"/>
+                          <a:latin typeface="Arial" pitchFamily="34" charset="0"/>
+                          <a:ea typeface="Arial" pitchFamily="34" charset="-122"/>
+                          <a:cs typeface="Arial" pitchFamily="34" charset="-120"/>
                         </a:rPr>
                         <a:t>6.0.2</a:t>
                       </a:r>
                       <a:endParaRPr lang="en-US" sz="1050" dirty="0">
-                        <a:latin typeface="Calibri" charset="0"/>
-                        <a:ea typeface="Calibri" charset="0"/>
-                        <a:cs typeface="Calibri" charset="0"/>
+                        <a:latin typeface="Arial" charset="0"/>
+                        <a:ea typeface="Arial" charset="0"/>
+                        <a:cs typeface="Arial" charset="0"/>
                       </a:endParaRPr>
                     </a:p>
                   </a:txBody>
@@ -20306,20 +20587,20 @@
                         <a:buNone/>
                       </a:pPr>
                       <a:r>
-                        <a:rPr lang="en-US" sz="1050" dirty="0">
+                        <a:rPr lang="en-US" sz="1200" dirty="0">
                           <a:solidFill>
                             <a:srgbClr val="0F172A"/>
                           </a:solidFill>
-                          <a:latin typeface="Calibri" pitchFamily="34" charset="0"/>
-                          <a:ea typeface="Calibri" pitchFamily="34" charset="-122"/>
-                          <a:cs typeface="Calibri" pitchFamily="34" charset="-120"/>
+                          <a:latin typeface="Arial" pitchFamily="34" charset="0"/>
+                          <a:ea typeface="Arial" pitchFamily="34" charset="-122"/>
+                          <a:cs typeface="Arial" pitchFamily="34" charset="-120"/>
                         </a:rPr>
                         <a:t>jsonschema</a:t>
                       </a:r>
                       <a:endParaRPr lang="en-US" sz="1050" dirty="0">
-                        <a:latin typeface="Calibri" charset="0"/>
-                        <a:ea typeface="Calibri" charset="0"/>
-                        <a:cs typeface="Calibri" charset="0"/>
+                        <a:latin typeface="Arial" charset="0"/>
+                        <a:ea typeface="Arial" charset="0"/>
+                        <a:cs typeface="Arial" charset="0"/>
                       </a:endParaRPr>
                     </a:p>
                   </a:txBody>
@@ -20374,20 +20655,20 @@
                         <a:buNone/>
                       </a:pPr>
                       <a:r>
-                        <a:rPr lang="en-US" sz="1050" dirty="0">
+                        <a:rPr lang="en-US" sz="1200" dirty="0">
                           <a:solidFill>
                             <a:srgbClr val="0F172A"/>
                           </a:solidFill>
-                          <a:latin typeface="Calibri" pitchFamily="34" charset="0"/>
-                          <a:ea typeface="Calibri" pitchFamily="34" charset="-122"/>
-                          <a:cs typeface="Calibri" pitchFamily="34" charset="-120"/>
+                          <a:latin typeface="Arial" pitchFamily="34" charset="0"/>
+                          <a:ea typeface="Arial" pitchFamily="34" charset="-122"/>
+                          <a:cs typeface="Arial" pitchFamily="34" charset="-120"/>
                         </a:rPr>
                         <a:t>4.23.0</a:t>
                       </a:r>
                       <a:endParaRPr lang="en-US" sz="1050" dirty="0">
-                        <a:latin typeface="Calibri" charset="0"/>
-                        <a:ea typeface="Calibri" charset="0"/>
-                        <a:cs typeface="Calibri" charset="0"/>
+                        <a:latin typeface="Arial" charset="0"/>
+                        <a:ea typeface="Arial" charset="0"/>
+                        <a:cs typeface="Arial" charset="0"/>
                       </a:endParaRPr>
                     </a:p>
                   </a:txBody>
@@ -20444,20 +20725,20 @@
                         <a:buNone/>
                       </a:pPr>
                       <a:r>
-                        <a:rPr lang="en-US" sz="1050" dirty="0">
+                        <a:rPr lang="en-US" sz="1200" dirty="0">
                           <a:solidFill>
                             <a:srgbClr val="0F172A"/>
                           </a:solidFill>
-                          <a:latin typeface="Calibri" pitchFamily="34" charset="0"/>
-                          <a:ea typeface="Calibri" pitchFamily="34" charset="-122"/>
-                          <a:cs typeface="Calibri" pitchFamily="34" charset="-120"/>
+                          <a:latin typeface="Arial" pitchFamily="34" charset="0"/>
+                          <a:ea typeface="Arial" pitchFamily="34" charset="-122"/>
+                          <a:cs typeface="Arial" pitchFamily="34" charset="-120"/>
                         </a:rPr>
                         <a:t>prometheus-client</a:t>
                       </a:r>
                       <a:endParaRPr lang="en-US" sz="1050" dirty="0">
-                        <a:latin typeface="Calibri" charset="0"/>
-                        <a:ea typeface="Calibri" charset="0"/>
-                        <a:cs typeface="Calibri" charset="0"/>
+                        <a:latin typeface="Arial" charset="0"/>
+                        <a:ea typeface="Arial" charset="0"/>
+                        <a:cs typeface="Arial" charset="0"/>
                       </a:endParaRPr>
                     </a:p>
                   </a:txBody>
@@ -20512,20 +20793,20 @@
                         <a:buNone/>
                       </a:pPr>
                       <a:r>
-                        <a:rPr lang="en-US" sz="1050" dirty="0">
+                        <a:rPr lang="en-US" sz="1200" dirty="0">
                           <a:solidFill>
                             <a:srgbClr val="0F172A"/>
                           </a:solidFill>
-                          <a:latin typeface="Calibri" pitchFamily="34" charset="0"/>
-                          <a:ea typeface="Calibri" pitchFamily="34" charset="-122"/>
-                          <a:cs typeface="Calibri" pitchFamily="34" charset="-120"/>
+                          <a:latin typeface="Arial" pitchFamily="34" charset="0"/>
+                          <a:ea typeface="Arial" pitchFamily="34" charset="-122"/>
+                          <a:cs typeface="Arial" pitchFamily="34" charset="-120"/>
                         </a:rPr>
                         <a:t>0.21.1</a:t>
                       </a:r>
                       <a:endParaRPr lang="en-US" sz="1050" dirty="0">
-                        <a:latin typeface="Calibri" charset="0"/>
-                        <a:ea typeface="Calibri" charset="0"/>
-                        <a:cs typeface="Calibri" charset="0"/>
+                        <a:latin typeface="Arial" charset="0"/>
+                        <a:ea typeface="Arial" charset="0"/>
+                        <a:cs typeface="Arial" charset="0"/>
                       </a:endParaRPr>
                     </a:p>
                   </a:txBody>
@@ -20612,20 +20893,20 @@
                         <a:buNone/>
                       </a:pPr>
                       <a:r>
-                        <a:rPr lang="en-US" sz="1050" b="1" dirty="0">
+                        <a:rPr lang="en-US" sz="1200" dirty="0">
                           <a:solidFill>
                             <a:srgbClr val="FFFFFF"/>
                           </a:solidFill>
-                          <a:latin typeface="Calibri" pitchFamily="34" charset="0"/>
-                          <a:ea typeface="Calibri" pitchFamily="34" charset="-122"/>
-                          <a:cs typeface="Calibri" pitchFamily="34" charset="-120"/>
+                          <a:latin typeface="Arial" pitchFamily="34" charset="0"/>
+                          <a:ea typeface="Arial" pitchFamily="34" charset="-122"/>
+                          <a:cs typeface="Arial" pitchFamily="34" charset="-120"/>
                         </a:rPr>
                         <a:t>Thư viện Java</a:t>
                       </a:r>
                       <a:endParaRPr lang="en-US" sz="1050" dirty="0">
-                        <a:latin typeface="Calibri" charset="0"/>
-                        <a:ea typeface="Calibri" charset="0"/>
-                        <a:cs typeface="Calibri" charset="0"/>
+                        <a:latin typeface="Arial" charset="0"/>
+                        <a:ea typeface="Arial" charset="0"/>
+                        <a:cs typeface="Arial" charset="0"/>
                       </a:endParaRPr>
                     </a:p>
                   </a:txBody>
@@ -20680,20 +20961,20 @@
                         <a:buNone/>
                       </a:pPr>
                       <a:r>
-                        <a:rPr lang="en-US" sz="1050" b="1" dirty="0">
+                        <a:rPr lang="en-US" sz="1200" dirty="0">
                           <a:solidFill>
                             <a:srgbClr val="FFFFFF"/>
                           </a:solidFill>
-                          <a:latin typeface="Calibri" pitchFamily="34" charset="0"/>
-                          <a:ea typeface="Calibri" pitchFamily="34" charset="-122"/>
-                          <a:cs typeface="Calibri" pitchFamily="34" charset="-120"/>
+                          <a:latin typeface="Arial" pitchFamily="34" charset="0"/>
+                          <a:ea typeface="Arial" pitchFamily="34" charset="-122"/>
+                          <a:cs typeface="Arial" pitchFamily="34" charset="-120"/>
                         </a:rPr>
                         <a:t>Phiên bản</a:t>
                       </a:r>
                       <a:endParaRPr lang="en-US" sz="1050" dirty="0">
-                        <a:latin typeface="Calibri" charset="0"/>
-                        <a:ea typeface="Calibri" charset="0"/>
-                        <a:cs typeface="Calibri" charset="0"/>
+                        <a:latin typeface="Arial" charset="0"/>
+                        <a:ea typeface="Arial" charset="0"/>
+                        <a:cs typeface="Arial" charset="0"/>
                       </a:endParaRPr>
                     </a:p>
                   </a:txBody>
@@ -20750,20 +21031,20 @@
                         <a:buNone/>
                       </a:pPr>
                       <a:r>
-                        <a:rPr lang="en-US" sz="1050" dirty="0">
+                        <a:rPr lang="en-US" sz="1200" dirty="0">
                           <a:solidFill>
                             <a:srgbClr val="0F172A"/>
                           </a:solidFill>
-                          <a:latin typeface="Calibri" pitchFamily="34" charset="0"/>
-                          <a:ea typeface="Calibri" pitchFamily="34" charset="-122"/>
-                          <a:cs typeface="Calibri" pitchFamily="34" charset="-120"/>
+                          <a:latin typeface="Arial" pitchFamily="34" charset="0"/>
+                          <a:ea typeface="Arial" pitchFamily="34" charset="-122"/>
+                          <a:cs typeface="Arial" pitchFamily="34" charset="-120"/>
                         </a:rPr>
                         <a:t>kafka-clients</a:t>
                       </a:r>
                       <a:endParaRPr lang="en-US" sz="1050" dirty="0">
-                        <a:latin typeface="Calibri" charset="0"/>
-                        <a:ea typeface="Calibri" charset="0"/>
-                        <a:cs typeface="Calibri" charset="0"/>
+                        <a:latin typeface="Arial" charset="0"/>
+                        <a:ea typeface="Arial" charset="0"/>
+                        <a:cs typeface="Arial" charset="0"/>
                       </a:endParaRPr>
                     </a:p>
                   </a:txBody>
@@ -20818,20 +21099,20 @@
                         <a:buNone/>
                       </a:pPr>
                       <a:r>
-                        <a:rPr lang="en-US" sz="1050" dirty="0">
+                        <a:rPr lang="en-US" sz="1200" dirty="0">
                           <a:solidFill>
                             <a:srgbClr val="0F172A"/>
                           </a:solidFill>
-                          <a:latin typeface="Calibri" pitchFamily="34" charset="0"/>
-                          <a:ea typeface="Calibri" pitchFamily="34" charset="-122"/>
-                          <a:cs typeface="Calibri" pitchFamily="34" charset="-120"/>
+                          <a:latin typeface="Arial" pitchFamily="34" charset="0"/>
+                          <a:ea typeface="Arial" pitchFamily="34" charset="-122"/>
+                          <a:cs typeface="Arial" pitchFamily="34" charset="-120"/>
                         </a:rPr>
                         <a:t>4.1.2</a:t>
                       </a:r>
                       <a:endParaRPr lang="en-US" sz="1050" dirty="0">
-                        <a:latin typeface="Calibri" charset="0"/>
-                        <a:ea typeface="Calibri" charset="0"/>
-                        <a:cs typeface="Calibri" charset="0"/>
+                        <a:latin typeface="Arial" charset="0"/>
+                        <a:ea typeface="Arial" charset="0"/>
+                        <a:cs typeface="Arial" charset="0"/>
                       </a:endParaRPr>
                     </a:p>
                   </a:txBody>
@@ -20888,20 +21169,20 @@
                         <a:buNone/>
                       </a:pPr>
                       <a:r>
-                        <a:rPr lang="en-US" sz="1050" dirty="0">
+                        <a:rPr lang="en-US" sz="1200" dirty="0">
                           <a:solidFill>
                             <a:srgbClr val="0F172A"/>
                           </a:solidFill>
-                          <a:latin typeface="Calibri" pitchFamily="34" charset="0"/>
-                          <a:ea typeface="Calibri" pitchFamily="34" charset="-122"/>
-                          <a:cs typeface="Calibri" pitchFamily="34" charset="-120"/>
+                          <a:latin typeface="Arial" pitchFamily="34" charset="0"/>
+                          <a:ea typeface="Arial" pitchFamily="34" charset="-122"/>
+                          <a:cs typeface="Arial" pitchFamily="34" charset="-120"/>
                         </a:rPr>
                         <a:t>jackson-databind</a:t>
                       </a:r>
                       <a:endParaRPr lang="en-US" sz="1050" dirty="0">
-                        <a:latin typeface="Calibri" charset="0"/>
-                        <a:ea typeface="Calibri" charset="0"/>
-                        <a:cs typeface="Calibri" charset="0"/>
+                        <a:latin typeface="Arial" charset="0"/>
+                        <a:ea typeface="Arial" charset="0"/>
+                        <a:cs typeface="Arial" charset="0"/>
                       </a:endParaRPr>
                     </a:p>
                   </a:txBody>
@@ -20956,20 +21237,20 @@
                         <a:buNone/>
                       </a:pPr>
                       <a:r>
-                        <a:rPr lang="en-US" sz="1050" dirty="0">
+                        <a:rPr lang="en-US" sz="1200" dirty="0">
                           <a:solidFill>
                             <a:srgbClr val="0F172A"/>
                           </a:solidFill>
-                          <a:latin typeface="Calibri" pitchFamily="34" charset="0"/>
-                          <a:ea typeface="Calibri" pitchFamily="34" charset="-122"/>
-                          <a:cs typeface="Calibri" pitchFamily="34" charset="-120"/>
+                          <a:latin typeface="Arial" pitchFamily="34" charset="0"/>
+                          <a:ea typeface="Arial" pitchFamily="34" charset="-122"/>
+                          <a:cs typeface="Arial" pitchFamily="34" charset="-120"/>
                         </a:rPr>
                         <a:t>2.20.1</a:t>
                       </a:r>
                       <a:endParaRPr lang="en-US" sz="1050" dirty="0">
-                        <a:latin typeface="Calibri" charset="0"/>
-                        <a:ea typeface="Calibri" charset="0"/>
-                        <a:cs typeface="Calibri" charset="0"/>
+                        <a:latin typeface="Arial" charset="0"/>
+                        <a:ea typeface="Arial" charset="0"/>
+                        <a:cs typeface="Arial" charset="0"/>
                       </a:endParaRPr>
                     </a:p>
                   </a:txBody>
@@ -21026,20 +21307,20 @@
                         <a:buNone/>
                       </a:pPr>
                       <a:r>
-                        <a:rPr lang="en-US" sz="1050" dirty="0">
+                        <a:rPr lang="en-US" sz="1200" dirty="0">
                           <a:solidFill>
                             <a:srgbClr val="0F172A"/>
                           </a:solidFill>
-                          <a:latin typeface="Calibri" pitchFamily="34" charset="0"/>
-                          <a:ea typeface="Calibri" pitchFamily="34" charset="-122"/>
-                          <a:cs typeface="Calibri" pitchFamily="34" charset="-120"/>
+                          <a:latin typeface="Arial" pitchFamily="34" charset="0"/>
+                          <a:ea typeface="Arial" pitchFamily="34" charset="-122"/>
+                          <a:cs typeface="Arial" pitchFamily="34" charset="-120"/>
                         </a:rPr>
                         <a:t>jackson-dataformat-yaml</a:t>
                       </a:r>
                       <a:endParaRPr lang="en-US" sz="1050" dirty="0">
-                        <a:latin typeface="Calibri" charset="0"/>
-                        <a:ea typeface="Calibri" charset="0"/>
-                        <a:cs typeface="Calibri" charset="0"/>
+                        <a:latin typeface="Arial" charset="0"/>
+                        <a:ea typeface="Arial" charset="0"/>
+                        <a:cs typeface="Arial" charset="0"/>
                       </a:endParaRPr>
                     </a:p>
                   </a:txBody>
@@ -21094,20 +21375,20 @@
                         <a:buNone/>
                       </a:pPr>
                       <a:r>
-                        <a:rPr lang="en-US" sz="1050" dirty="0">
+                        <a:rPr lang="en-US" sz="1200" dirty="0">
                           <a:solidFill>
                             <a:srgbClr val="0F172A"/>
                           </a:solidFill>
-                          <a:latin typeface="Calibri" pitchFamily="34" charset="0"/>
-                          <a:ea typeface="Calibri" pitchFamily="34" charset="-122"/>
-                          <a:cs typeface="Calibri" pitchFamily="34" charset="-120"/>
+                          <a:latin typeface="Arial" pitchFamily="34" charset="0"/>
+                          <a:ea typeface="Arial" pitchFamily="34" charset="-122"/>
+                          <a:cs typeface="Arial" pitchFamily="34" charset="-120"/>
                         </a:rPr>
                         <a:t>2.20.1</a:t>
                       </a:r>
                       <a:endParaRPr lang="en-US" sz="1050" dirty="0">
-                        <a:latin typeface="Calibri" charset="0"/>
-                        <a:ea typeface="Calibri" charset="0"/>
-                        <a:cs typeface="Calibri" charset="0"/>
+                        <a:latin typeface="Arial" charset="0"/>
+                        <a:ea typeface="Arial" charset="0"/>
+                        <a:cs typeface="Arial" charset="0"/>
                       </a:endParaRPr>
                     </a:p>
                   </a:txBody>
@@ -21164,20 +21445,20 @@
                         <a:buNone/>
                       </a:pPr>
                       <a:r>
-                        <a:rPr lang="en-US" sz="1050" dirty="0">
+                        <a:rPr lang="en-US" sz="1200" dirty="0">
                           <a:solidFill>
                             <a:srgbClr val="0F172A"/>
                           </a:solidFill>
-                          <a:latin typeface="Calibri" pitchFamily="34" charset="0"/>
-                          <a:ea typeface="Calibri" pitchFamily="34" charset="-122"/>
-                          <a:cs typeface="Calibri" pitchFamily="34" charset="-120"/>
+                          <a:latin typeface="Arial" pitchFamily="34" charset="0"/>
+                          <a:ea typeface="Arial" pitchFamily="34" charset="-122"/>
+                          <a:cs typeface="Arial" pitchFamily="34" charset="-120"/>
                         </a:rPr>
                         <a:t>re2j (regex RE2)</a:t>
                       </a:r>
                       <a:endParaRPr lang="en-US" sz="1050" dirty="0">
-                        <a:latin typeface="Calibri" charset="0"/>
-                        <a:ea typeface="Calibri" charset="0"/>
-                        <a:cs typeface="Calibri" charset="0"/>
+                        <a:latin typeface="Arial" charset="0"/>
+                        <a:ea typeface="Arial" charset="0"/>
+                        <a:cs typeface="Arial" charset="0"/>
                       </a:endParaRPr>
                     </a:p>
                   </a:txBody>
@@ -21232,20 +21513,20 @@
                         <a:buNone/>
                       </a:pPr>
                       <a:r>
-                        <a:rPr lang="en-US" sz="1050" dirty="0">
+                        <a:rPr lang="en-US" sz="1200" dirty="0">
                           <a:solidFill>
                             <a:srgbClr val="0F172A"/>
                           </a:solidFill>
-                          <a:latin typeface="Calibri" pitchFamily="34" charset="0"/>
-                          <a:ea typeface="Calibri" pitchFamily="34" charset="-122"/>
-                          <a:cs typeface="Calibri" pitchFamily="34" charset="-120"/>
+                          <a:latin typeface="Arial" pitchFamily="34" charset="0"/>
+                          <a:ea typeface="Arial" pitchFamily="34" charset="-122"/>
+                          <a:cs typeface="Arial" pitchFamily="34" charset="-120"/>
                         </a:rPr>
                         <a:t>1.8</a:t>
                       </a:r>
                       <a:endParaRPr lang="en-US" sz="1050" dirty="0">
-                        <a:latin typeface="Calibri" charset="0"/>
-                        <a:ea typeface="Calibri" charset="0"/>
-                        <a:cs typeface="Calibri" charset="0"/>
+                        <a:latin typeface="Arial" charset="0"/>
+                        <a:ea typeface="Arial" charset="0"/>
+                        <a:cs typeface="Arial" charset="0"/>
                       </a:endParaRPr>
                     </a:p>
                   </a:txBody>
@@ -21302,20 +21583,20 @@
                         <a:buNone/>
                       </a:pPr>
                       <a:r>
-                        <a:rPr lang="en-US" sz="1050" dirty="0">
+                        <a:rPr lang="en-US" sz="1200" dirty="0">
                           <a:solidFill>
                             <a:srgbClr val="0F172A"/>
                           </a:solidFill>
-                          <a:latin typeface="Calibri" pitchFamily="34" charset="0"/>
-                          <a:ea typeface="Calibri" pitchFamily="34" charset="-122"/>
-                          <a:cs typeface="Calibri" pitchFamily="34" charset="-120"/>
+                          <a:latin typeface="Arial" pitchFamily="34" charset="0"/>
+                          <a:ea typeface="Arial" pitchFamily="34" charset="-122"/>
+                          <a:cs typeface="Arial" pitchFamily="34" charset="-120"/>
                         </a:rPr>
                         <a:t>junit-jupiter</a:t>
                       </a:r>
                       <a:endParaRPr lang="en-US" sz="1050" dirty="0">
-                        <a:latin typeface="Calibri" charset="0"/>
-                        <a:ea typeface="Calibri" charset="0"/>
-                        <a:cs typeface="Calibri" charset="0"/>
+                        <a:latin typeface="Arial" charset="0"/>
+                        <a:ea typeface="Arial" charset="0"/>
+                        <a:cs typeface="Arial" charset="0"/>
                       </a:endParaRPr>
                     </a:p>
                   </a:txBody>
@@ -21370,20 +21651,20 @@
                         <a:buNone/>
                       </a:pPr>
                       <a:r>
-                        <a:rPr lang="en-US" sz="1050" dirty="0">
+                        <a:rPr lang="en-US" sz="1200" dirty="0">
                           <a:solidFill>
                             <a:srgbClr val="0F172A"/>
                           </a:solidFill>
-                          <a:latin typeface="Calibri" pitchFamily="34" charset="0"/>
-                          <a:ea typeface="Calibri" pitchFamily="34" charset="-122"/>
-                          <a:cs typeface="Calibri" pitchFamily="34" charset="-120"/>
+                          <a:latin typeface="Arial" pitchFamily="34" charset="0"/>
+                          <a:ea typeface="Arial" pitchFamily="34" charset="-122"/>
+                          <a:cs typeface="Arial" pitchFamily="34" charset="-120"/>
                         </a:rPr>
                         <a:t>5.14.1</a:t>
                       </a:r>
                       <a:endParaRPr lang="en-US" sz="1050" dirty="0">
-                        <a:latin typeface="Calibri" charset="0"/>
-                        <a:ea typeface="Calibri" charset="0"/>
-                        <a:cs typeface="Calibri" charset="0"/>
+                        <a:latin typeface="Arial" charset="0"/>
+                        <a:ea typeface="Arial" charset="0"/>
+                        <a:cs typeface="Arial" charset="0"/>
                       </a:endParaRPr>
                     </a:p>
                   </a:txBody>
@@ -21470,20 +21751,20 @@
                         <a:buNone/>
                       </a:pPr>
                       <a:r>
-                        <a:rPr lang="en-US" sz="1050" b="1" dirty="0">
+                        <a:rPr lang="en-US" sz="1200" dirty="0">
                           <a:solidFill>
                             <a:srgbClr val="FFFFFF"/>
                           </a:solidFill>
-                          <a:latin typeface="Calibri" pitchFamily="34" charset="0"/>
-                          <a:ea typeface="Calibri" pitchFamily="34" charset="-122"/>
-                          <a:cs typeface="Calibri" pitchFamily="34" charset="-120"/>
+                          <a:latin typeface="Arial" pitchFamily="34" charset="0"/>
+                          <a:ea typeface="Arial" pitchFamily="34" charset="-122"/>
+                          <a:cs typeface="Arial" pitchFamily="34" charset="-120"/>
                         </a:rPr>
                         <a:t>Hạ tầng / công cụ</a:t>
                       </a:r>
                       <a:endParaRPr lang="en-US" sz="1050" dirty="0">
-                        <a:latin typeface="Calibri" charset="0"/>
-                        <a:ea typeface="Calibri" charset="0"/>
-                        <a:cs typeface="Calibri" charset="0"/>
+                        <a:latin typeface="Arial" charset="0"/>
+                        <a:ea typeface="Arial" charset="0"/>
+                        <a:cs typeface="Arial" charset="0"/>
                       </a:endParaRPr>
                     </a:p>
                   </a:txBody>
@@ -21538,20 +21819,20 @@
                         <a:buNone/>
                       </a:pPr>
                       <a:r>
-                        <a:rPr lang="en-US" sz="1050" b="1" dirty="0">
+                        <a:rPr lang="en-US" sz="1200" dirty="0">
                           <a:solidFill>
                             <a:srgbClr val="FFFFFF"/>
                           </a:solidFill>
-                          <a:latin typeface="Calibri" pitchFamily="34" charset="0"/>
-                          <a:ea typeface="Calibri" pitchFamily="34" charset="-122"/>
-                          <a:cs typeface="Calibri" pitchFamily="34" charset="-120"/>
+                          <a:latin typeface="Arial" pitchFamily="34" charset="0"/>
+                          <a:ea typeface="Arial" pitchFamily="34" charset="-122"/>
+                          <a:cs typeface="Arial" pitchFamily="34" charset="-120"/>
                         </a:rPr>
                         <a:t>Phiên bản</a:t>
                       </a:r>
                       <a:endParaRPr lang="en-US" sz="1050" dirty="0">
-                        <a:latin typeface="Calibri" charset="0"/>
-                        <a:ea typeface="Calibri" charset="0"/>
-                        <a:cs typeface="Calibri" charset="0"/>
+                        <a:latin typeface="Arial" charset="0"/>
+                        <a:ea typeface="Arial" charset="0"/>
+                        <a:cs typeface="Arial" charset="0"/>
                       </a:endParaRPr>
                     </a:p>
                   </a:txBody>
@@ -21608,20 +21889,20 @@
                         <a:buNone/>
                       </a:pPr>
                       <a:r>
-                        <a:rPr lang="en-US" sz="1050" dirty="0">
+                        <a:rPr lang="en-US" sz="1200" dirty="0">
                           <a:solidFill>
                             <a:srgbClr val="0F172A"/>
                           </a:solidFill>
-                          <a:latin typeface="Calibri" pitchFamily="34" charset="0"/>
-                          <a:ea typeface="Calibri" pitchFamily="34" charset="-122"/>
-                          <a:cs typeface="Calibri" pitchFamily="34" charset="-120"/>
+                          <a:latin typeface="Arial" pitchFamily="34" charset="0"/>
+                          <a:ea typeface="Arial" pitchFamily="34" charset="-122"/>
+                          <a:cs typeface="Arial" pitchFamily="34" charset="-120"/>
                         </a:rPr>
                         <a:t>Nginx</a:t>
                       </a:r>
                       <a:endParaRPr lang="en-US" sz="1050" dirty="0">
-                        <a:latin typeface="Calibri" charset="0"/>
-                        <a:ea typeface="Calibri" charset="0"/>
-                        <a:cs typeface="Calibri" charset="0"/>
+                        <a:latin typeface="Arial" charset="0"/>
+                        <a:ea typeface="Arial" charset="0"/>
+                        <a:cs typeface="Arial" charset="0"/>
                       </a:endParaRPr>
                     </a:p>
                   </a:txBody>
@@ -21676,20 +21957,20 @@
                         <a:buNone/>
                       </a:pPr>
                       <a:r>
-                        <a:rPr lang="en-US" sz="1050" dirty="0">
+                        <a:rPr lang="en-US" sz="1200" dirty="0">
                           <a:solidFill>
                             <a:srgbClr val="0F172A"/>
                           </a:solidFill>
-                          <a:latin typeface="Calibri" pitchFamily="34" charset="0"/>
-                          <a:ea typeface="Calibri" pitchFamily="34" charset="-122"/>
-                          <a:cs typeface="Calibri" pitchFamily="34" charset="-120"/>
+                          <a:latin typeface="Arial" pitchFamily="34" charset="0"/>
+                          <a:ea typeface="Arial" pitchFamily="34" charset="-122"/>
+                          <a:cs typeface="Arial" pitchFamily="34" charset="-120"/>
                         </a:rPr>
                         <a:t>1.28-alpine</a:t>
                       </a:r>
                       <a:endParaRPr lang="en-US" sz="1050" dirty="0">
-                        <a:latin typeface="Calibri" charset="0"/>
-                        <a:ea typeface="Calibri" charset="0"/>
-                        <a:cs typeface="Calibri" charset="0"/>
+                        <a:latin typeface="Arial" charset="0"/>
+                        <a:ea typeface="Arial" charset="0"/>
+                        <a:cs typeface="Arial" charset="0"/>
                       </a:endParaRPr>
                     </a:p>
                   </a:txBody>
@@ -21746,20 +22027,20 @@
                         <a:buNone/>
                       </a:pPr>
                       <a:r>
-                        <a:rPr lang="en-US" sz="1050" dirty="0">
+                        <a:rPr lang="en-US" sz="1200" dirty="0">
                           <a:solidFill>
                             <a:srgbClr val="0F172A"/>
                           </a:solidFill>
-                          <a:latin typeface="Calibri" pitchFamily="34" charset="0"/>
-                          <a:ea typeface="Calibri" pitchFamily="34" charset="-122"/>
-                          <a:cs typeface="Calibri" pitchFamily="34" charset="-120"/>
+                          <a:latin typeface="Arial" pitchFamily="34" charset="0"/>
+                          <a:ea typeface="Arial" pitchFamily="34" charset="-122"/>
+                          <a:cs typeface="Arial" pitchFamily="34" charset="-120"/>
                         </a:rPr>
                         <a:t>Mailpit</a:t>
                       </a:r>
                       <a:endParaRPr lang="en-US" sz="1050" dirty="0">
-                        <a:latin typeface="Calibri" charset="0"/>
-                        <a:ea typeface="Calibri" charset="0"/>
-                        <a:cs typeface="Calibri" charset="0"/>
+                        <a:latin typeface="Arial" charset="0"/>
+                        <a:ea typeface="Arial" charset="0"/>
+                        <a:cs typeface="Arial" charset="0"/>
                       </a:endParaRPr>
                     </a:p>
                   </a:txBody>
@@ -21814,20 +22095,20 @@
                         <a:buNone/>
                       </a:pPr>
                       <a:r>
-                        <a:rPr lang="en-US" sz="1050" dirty="0">
+                        <a:rPr lang="en-US" sz="1200" dirty="0">
                           <a:solidFill>
                             <a:srgbClr val="0F172A"/>
                           </a:solidFill>
-                          <a:latin typeface="Calibri" pitchFamily="34" charset="0"/>
-                          <a:ea typeface="Calibri" pitchFamily="34" charset="-122"/>
-                          <a:cs typeface="Calibri" pitchFamily="34" charset="-120"/>
+                          <a:latin typeface="Arial" pitchFamily="34" charset="0"/>
+                          <a:ea typeface="Arial" pitchFamily="34" charset="-122"/>
+                          <a:cs typeface="Arial" pitchFamily="34" charset="-120"/>
                         </a:rPr>
                         <a:t>v1.27</a:t>
                       </a:r>
                       <a:endParaRPr lang="en-US" sz="1050" dirty="0">
-                        <a:latin typeface="Calibri" charset="0"/>
-                        <a:ea typeface="Calibri" charset="0"/>
-                        <a:cs typeface="Calibri" charset="0"/>
+                        <a:latin typeface="Arial" charset="0"/>
+                        <a:ea typeface="Arial" charset="0"/>
+                        <a:cs typeface="Arial" charset="0"/>
                       </a:endParaRPr>
                     </a:p>
                   </a:txBody>
@@ -21884,20 +22165,20 @@
                         <a:buNone/>
                       </a:pPr>
                       <a:r>
-                        <a:rPr lang="en-US" sz="1050" dirty="0">
+                        <a:rPr lang="en-US" sz="1200" dirty="0">
                           <a:solidFill>
                             <a:srgbClr val="0F172A"/>
                           </a:solidFill>
-                          <a:latin typeface="Calibri" pitchFamily="34" charset="0"/>
-                          <a:ea typeface="Calibri" pitchFamily="34" charset="-122"/>
-                          <a:cs typeface="Calibri" pitchFamily="34" charset="-120"/>
+                          <a:latin typeface="Arial" pitchFamily="34" charset="0"/>
+                          <a:ea typeface="Arial" pitchFamily="34" charset="-122"/>
+                          <a:cs typeface="Arial" pitchFamily="34" charset="-120"/>
                         </a:rPr>
                         <a:t>Swagger UI</a:t>
                       </a:r>
                       <a:endParaRPr lang="en-US" sz="1050" dirty="0">
-                        <a:latin typeface="Calibri" charset="0"/>
-                        <a:ea typeface="Calibri" charset="0"/>
-                        <a:cs typeface="Calibri" charset="0"/>
+                        <a:latin typeface="Arial" charset="0"/>
+                        <a:ea typeface="Arial" charset="0"/>
+                        <a:cs typeface="Arial" charset="0"/>
                       </a:endParaRPr>
                     </a:p>
                   </a:txBody>
@@ -21952,20 +22233,20 @@
                         <a:buNone/>
                       </a:pPr>
                       <a:r>
-                        <a:rPr lang="en-US" sz="1050" dirty="0">
+                        <a:rPr lang="en-US" sz="1200" dirty="0">
                           <a:solidFill>
                             <a:srgbClr val="0F172A"/>
                           </a:solidFill>
-                          <a:latin typeface="Calibri" pitchFamily="34" charset="0"/>
-                          <a:ea typeface="Calibri" pitchFamily="34" charset="-122"/>
-                          <a:cs typeface="Calibri" pitchFamily="34" charset="-120"/>
+                          <a:latin typeface="Arial" pitchFamily="34" charset="0"/>
+                          <a:ea typeface="Arial" pitchFamily="34" charset="-122"/>
+                          <a:cs typeface="Arial" pitchFamily="34" charset="-120"/>
                         </a:rPr>
                         <a:t>v5.27.1</a:t>
                       </a:r>
                       <a:endParaRPr lang="en-US" sz="1050" dirty="0">
-                        <a:latin typeface="Calibri" charset="0"/>
-                        <a:ea typeface="Calibri" charset="0"/>
-                        <a:cs typeface="Calibri" charset="0"/>
+                        <a:latin typeface="Arial" charset="0"/>
+                        <a:ea typeface="Arial" charset="0"/>
+                        <a:cs typeface="Arial" charset="0"/>
                       </a:endParaRPr>
                     </a:p>
                   </a:txBody>
@@ -22022,20 +22303,20 @@
                         <a:buNone/>
                       </a:pPr>
                       <a:r>
-                        <a:rPr lang="en-US" sz="1050" dirty="0">
+                        <a:rPr lang="en-US" sz="1200" dirty="0">
                           <a:solidFill>
                             <a:srgbClr val="0F172A"/>
                           </a:solidFill>
-                          <a:latin typeface="Calibri" pitchFamily="34" charset="0"/>
-                          <a:ea typeface="Calibri" pitchFamily="34" charset="-122"/>
-                          <a:cs typeface="Calibri" pitchFamily="34" charset="-120"/>
+                          <a:latin typeface="Arial" pitchFamily="34" charset="0"/>
+                          <a:ea typeface="Arial" pitchFamily="34" charset="-122"/>
+                          <a:cs typeface="Arial" pitchFamily="34" charset="-120"/>
                         </a:rPr>
                         <a:t>Kafka UI</a:t>
                       </a:r>
                       <a:endParaRPr lang="en-US" sz="1050" dirty="0">
-                        <a:latin typeface="Calibri" charset="0"/>
-                        <a:ea typeface="Calibri" charset="0"/>
-                        <a:cs typeface="Calibri" charset="0"/>
+                        <a:latin typeface="Arial" charset="0"/>
+                        <a:ea typeface="Arial" charset="0"/>
+                        <a:cs typeface="Arial" charset="0"/>
                       </a:endParaRPr>
                     </a:p>
                   </a:txBody>
@@ -22090,20 +22371,20 @@
                         <a:buNone/>
                       </a:pPr>
                       <a:r>
-                        <a:rPr lang="en-US" sz="1050" dirty="0">
+                        <a:rPr lang="en-US" sz="1200" dirty="0">
                           <a:solidFill>
                             <a:srgbClr val="0F172A"/>
                           </a:solidFill>
-                          <a:latin typeface="Calibri" pitchFamily="34" charset="0"/>
-                          <a:ea typeface="Calibri" pitchFamily="34" charset="-122"/>
-                          <a:cs typeface="Calibri" pitchFamily="34" charset="-120"/>
+                          <a:latin typeface="Arial" pitchFamily="34" charset="0"/>
+                          <a:ea typeface="Arial" pitchFamily="34" charset="-122"/>
+                          <a:cs typeface="Arial" pitchFamily="34" charset="-120"/>
                         </a:rPr>
                         <a:t>v1.4.2</a:t>
                       </a:r>
                       <a:endParaRPr lang="en-US" sz="1050" dirty="0">
-                        <a:latin typeface="Calibri" charset="0"/>
-                        <a:ea typeface="Calibri" charset="0"/>
-                        <a:cs typeface="Calibri" charset="0"/>
+                        <a:latin typeface="Arial" charset="0"/>
+                        <a:ea typeface="Arial" charset="0"/>
+                        <a:cs typeface="Arial" charset="0"/>
                       </a:endParaRPr>
                     </a:p>
                   </a:txBody>
@@ -22160,20 +22441,20 @@
                         <a:buNone/>
                       </a:pPr>
                       <a:r>
-                        <a:rPr lang="en-US" sz="1050" dirty="0">
+                        <a:rPr lang="en-US" sz="1200" dirty="0">
                           <a:solidFill>
                             <a:srgbClr val="0F172A"/>
                           </a:solidFill>
-                          <a:latin typeface="Calibri" pitchFamily="34" charset="0"/>
-                          <a:ea typeface="Calibri" pitchFamily="34" charset="-122"/>
-                          <a:cs typeface="Calibri" pitchFamily="34" charset="-120"/>
+                          <a:latin typeface="Arial" pitchFamily="34" charset="0"/>
+                          <a:ea typeface="Arial" pitchFamily="34" charset="-122"/>
+                          <a:cs typeface="Arial" pitchFamily="34" charset="-120"/>
                         </a:rPr>
                         <a:t>Prometheus</a:t>
                       </a:r>
                       <a:endParaRPr lang="en-US" sz="1050" dirty="0">
-                        <a:latin typeface="Calibri" charset="0"/>
-                        <a:ea typeface="Calibri" charset="0"/>
-                        <a:cs typeface="Calibri" charset="0"/>
+                        <a:latin typeface="Arial" charset="0"/>
+                        <a:ea typeface="Arial" charset="0"/>
+                        <a:cs typeface="Arial" charset="0"/>
                       </a:endParaRPr>
                     </a:p>
                   </a:txBody>
@@ -22228,20 +22509,20 @@
                         <a:buNone/>
                       </a:pPr>
                       <a:r>
-                        <a:rPr lang="en-US" sz="1050" dirty="0">
+                        <a:rPr lang="en-US" sz="1200" dirty="0">
                           <a:solidFill>
                             <a:srgbClr val="0F172A"/>
                           </a:solidFill>
-                          <a:latin typeface="Calibri" pitchFamily="34" charset="0"/>
-                          <a:ea typeface="Calibri" pitchFamily="34" charset="-122"/>
-                          <a:cs typeface="Calibri" pitchFamily="34" charset="-120"/>
+                          <a:latin typeface="Arial" pitchFamily="34" charset="0"/>
+                          <a:ea typeface="Arial" pitchFamily="34" charset="-122"/>
+                          <a:cs typeface="Arial" pitchFamily="34" charset="-120"/>
                         </a:rPr>
                         <a:t>v3.1.0</a:t>
                       </a:r>
                       <a:endParaRPr lang="en-US" sz="1050" dirty="0">
-                        <a:latin typeface="Calibri" charset="0"/>
-                        <a:ea typeface="Calibri" charset="0"/>
-                        <a:cs typeface="Calibri" charset="0"/>
+                        <a:latin typeface="Arial" charset="0"/>
+                        <a:ea typeface="Arial" charset="0"/>
+                        <a:cs typeface="Arial" charset="0"/>
                       </a:endParaRPr>
                     </a:p>
                   </a:txBody>
@@ -22298,20 +22579,20 @@
                         <a:buNone/>
                       </a:pPr>
                       <a:r>
-                        <a:rPr lang="en-US" sz="1050" dirty="0">
+                        <a:rPr lang="en-US" sz="1200" dirty="0">
                           <a:solidFill>
                             <a:srgbClr val="0F172A"/>
                           </a:solidFill>
-                          <a:latin typeface="Calibri" pitchFamily="34" charset="0"/>
-                          <a:ea typeface="Calibri" pitchFamily="34" charset="-122"/>
-                          <a:cs typeface="Calibri" pitchFamily="34" charset="-120"/>
+                          <a:latin typeface="Arial" pitchFamily="34" charset="0"/>
+                          <a:ea typeface="Arial" pitchFamily="34" charset="-122"/>
+                          <a:cs typeface="Arial" pitchFamily="34" charset="-120"/>
                         </a:rPr>
                         <a:t>Grafana</a:t>
                       </a:r>
                       <a:endParaRPr lang="en-US" sz="1050" dirty="0">
-                        <a:latin typeface="Calibri" charset="0"/>
-                        <a:ea typeface="Calibri" charset="0"/>
-                        <a:cs typeface="Calibri" charset="0"/>
+                        <a:latin typeface="Arial" charset="0"/>
+                        <a:ea typeface="Arial" charset="0"/>
+                        <a:cs typeface="Arial" charset="0"/>
                       </a:endParaRPr>
                     </a:p>
                   </a:txBody>
@@ -22366,20 +22647,20 @@
                         <a:buNone/>
                       </a:pPr>
                       <a:r>
-                        <a:rPr lang="en-US" sz="1050" dirty="0">
+                        <a:rPr lang="en-US" sz="1200" dirty="0">
                           <a:solidFill>
                             <a:srgbClr val="0F172A"/>
                           </a:solidFill>
-                          <a:latin typeface="Calibri" pitchFamily="34" charset="0"/>
-                          <a:ea typeface="Calibri" pitchFamily="34" charset="-122"/>
-                          <a:cs typeface="Calibri" pitchFamily="34" charset="-120"/>
+                          <a:latin typeface="Arial" pitchFamily="34" charset="0"/>
+                          <a:ea typeface="Arial" pitchFamily="34" charset="-122"/>
+                          <a:cs typeface="Arial" pitchFamily="34" charset="-120"/>
                         </a:rPr>
                         <a:t>11.4.0</a:t>
                       </a:r>
                       <a:endParaRPr lang="en-US" sz="1050" dirty="0">
-                        <a:latin typeface="Calibri" charset="0"/>
-                        <a:ea typeface="Calibri" charset="0"/>
-                        <a:cs typeface="Calibri" charset="0"/>
+                        <a:latin typeface="Arial" charset="0"/>
+                        <a:ea typeface="Arial" charset="0"/>
+                        <a:cs typeface="Arial" charset="0"/>
                       </a:endParaRPr>
                     </a:p>
                   </a:txBody>
@@ -22436,20 +22717,20 @@
                         <a:buNone/>
                       </a:pPr>
                       <a:r>
-                        <a:rPr lang="en-US" sz="1050" dirty="0">
+                        <a:rPr lang="en-US" sz="1200" dirty="0">
                           <a:solidFill>
                             <a:srgbClr val="0F172A"/>
                           </a:solidFill>
-                          <a:latin typeface="Calibri" pitchFamily="34" charset="0"/>
-                          <a:ea typeface="Calibri" pitchFamily="34" charset="-122"/>
-                          <a:cs typeface="Calibri" pitchFamily="34" charset="-120"/>
+                          <a:latin typeface="Arial" pitchFamily="34" charset="0"/>
+                          <a:ea typeface="Arial" pitchFamily="34" charset="-122"/>
+                          <a:cs typeface="Arial" pitchFamily="34" charset="-120"/>
                         </a:rPr>
                         <a:t>Loki / Promtail</a:t>
                       </a:r>
                       <a:endParaRPr lang="en-US" sz="1050" dirty="0">
-                        <a:latin typeface="Calibri" charset="0"/>
-                        <a:ea typeface="Calibri" charset="0"/>
-                        <a:cs typeface="Calibri" charset="0"/>
+                        <a:latin typeface="Arial" charset="0"/>
+                        <a:ea typeface="Arial" charset="0"/>
+                        <a:cs typeface="Arial" charset="0"/>
                       </a:endParaRPr>
                     </a:p>
                   </a:txBody>
@@ -22504,20 +22785,20 @@
                         <a:buNone/>
                       </a:pPr>
                       <a:r>
-                        <a:rPr lang="en-US" sz="1050" dirty="0">
+                        <a:rPr lang="en-US" sz="1200" dirty="0">
                           <a:solidFill>
                             <a:srgbClr val="0F172A"/>
                           </a:solidFill>
-                          <a:latin typeface="Calibri" pitchFamily="34" charset="0"/>
-                          <a:ea typeface="Calibri" pitchFamily="34" charset="-122"/>
-                          <a:cs typeface="Calibri" pitchFamily="34" charset="-120"/>
+                          <a:latin typeface="Arial" pitchFamily="34" charset="0"/>
+                          <a:ea typeface="Arial" pitchFamily="34" charset="-122"/>
+                          <a:cs typeface="Arial" pitchFamily="34" charset="-120"/>
                         </a:rPr>
                         <a:t>3.3.2</a:t>
                       </a:r>
                       <a:endParaRPr lang="en-US" sz="1050" dirty="0">
-                        <a:latin typeface="Calibri" charset="0"/>
-                        <a:ea typeface="Calibri" charset="0"/>
-                        <a:cs typeface="Calibri" charset="0"/>
+                        <a:latin typeface="Arial" charset="0"/>
+                        <a:ea typeface="Arial" charset="0"/>
+                        <a:cs typeface="Arial" charset="0"/>
                       </a:endParaRPr>
                     </a:p>
                   </a:txBody>
@@ -22574,20 +22855,20 @@
                         <a:buNone/>
                       </a:pPr>
                       <a:r>
-                        <a:rPr lang="en-US" sz="1050" dirty="0">
+                        <a:rPr lang="en-US" sz="1200" dirty="0">
                           <a:solidFill>
                             <a:srgbClr val="0F172A"/>
                           </a:solidFill>
-                          <a:latin typeface="Calibri" pitchFamily="34" charset="0"/>
-                          <a:ea typeface="Calibri" pitchFamily="34" charset="-122"/>
-                          <a:cs typeface="Calibri" pitchFamily="34" charset="-120"/>
+                          <a:latin typeface="Arial" pitchFamily="34" charset="0"/>
+                          <a:ea typeface="Arial" pitchFamily="34" charset="-122"/>
+                          <a:cs typeface="Arial" pitchFamily="34" charset="-120"/>
                         </a:rPr>
                         <a:t>kafka-exporter</a:t>
                       </a:r>
                       <a:endParaRPr lang="en-US" sz="1050" dirty="0">
-                        <a:latin typeface="Calibri" charset="0"/>
-                        <a:ea typeface="Calibri" charset="0"/>
-                        <a:cs typeface="Calibri" charset="0"/>
+                        <a:latin typeface="Arial" charset="0"/>
+                        <a:ea typeface="Arial" charset="0"/>
+                        <a:cs typeface="Arial" charset="0"/>
                       </a:endParaRPr>
                     </a:p>
                   </a:txBody>
@@ -22642,20 +22923,20 @@
                         <a:buNone/>
                       </a:pPr>
                       <a:r>
-                        <a:rPr lang="en-US" sz="1050" dirty="0">
+                        <a:rPr lang="en-US" sz="1200" dirty="0">
                           <a:solidFill>
                             <a:srgbClr val="0F172A"/>
                           </a:solidFill>
-                          <a:latin typeface="Calibri" pitchFamily="34" charset="0"/>
-                          <a:ea typeface="Calibri" pitchFamily="34" charset="-122"/>
-                          <a:cs typeface="Calibri" pitchFamily="34" charset="-120"/>
+                          <a:latin typeface="Arial" pitchFamily="34" charset="0"/>
+                          <a:ea typeface="Arial" pitchFamily="34" charset="-122"/>
+                          <a:cs typeface="Arial" pitchFamily="34" charset="-120"/>
                         </a:rPr>
                         <a:t>v1.9.0</a:t>
                       </a:r>
                       <a:endParaRPr lang="en-US" sz="1050" dirty="0">
-                        <a:latin typeface="Calibri" charset="0"/>
-                        <a:ea typeface="Calibri" charset="0"/>
-                        <a:cs typeface="Calibri" charset="0"/>
+                        <a:latin typeface="Arial" charset="0"/>
+                        <a:ea typeface="Arial" charset="0"/>
+                        <a:cs typeface="Arial" charset="0"/>
                       </a:endParaRPr>
                     </a:p>
                   </a:txBody>
@@ -22712,20 +22993,20 @@
                         <a:buNone/>
                       </a:pPr>
                       <a:r>
-                        <a:rPr lang="en-US" sz="1050" dirty="0">
+                        <a:rPr lang="en-US" sz="1200" dirty="0">
                           <a:solidFill>
                             <a:srgbClr val="0F172A"/>
                           </a:solidFill>
-                          <a:latin typeface="Calibri" pitchFamily="34" charset="0"/>
-                          <a:ea typeface="Calibri" pitchFamily="34" charset="-122"/>
-                          <a:cs typeface="Calibri" pitchFamily="34" charset="-120"/>
+                          <a:latin typeface="Arial" pitchFamily="34" charset="0"/>
+                          <a:ea typeface="Arial" pitchFamily="34" charset="-122"/>
+                          <a:cs typeface="Arial" pitchFamily="34" charset="-120"/>
                         </a:rPr>
                         <a:t>ModSecurity CRS</a:t>
                       </a:r>
                       <a:endParaRPr lang="en-US" sz="1050" dirty="0">
-                        <a:latin typeface="Calibri" charset="0"/>
-                        <a:ea typeface="Calibri" charset="0"/>
-                        <a:cs typeface="Calibri" charset="0"/>
+                        <a:latin typeface="Arial" charset="0"/>
+                        <a:ea typeface="Arial" charset="0"/>
+                        <a:cs typeface="Arial" charset="0"/>
                       </a:endParaRPr>
                     </a:p>
                   </a:txBody>
@@ -22780,20 +23061,20 @@
                         <a:buNone/>
                       </a:pPr>
                       <a:r>
-                        <a:rPr lang="en-US" sz="1050" dirty="0">
+                        <a:rPr lang="en-US" sz="1200" dirty="0">
                           <a:solidFill>
                             <a:srgbClr val="0F172A"/>
                           </a:solidFill>
-                          <a:latin typeface="Calibri" pitchFamily="34" charset="0"/>
-                          <a:ea typeface="Calibri" pitchFamily="34" charset="-122"/>
-                          <a:cs typeface="Calibri" pitchFamily="34" charset="-120"/>
+                          <a:latin typeface="Arial" pitchFamily="34" charset="0"/>
+                          <a:ea typeface="Arial" pitchFamily="34" charset="-122"/>
+                          <a:cs typeface="Arial" pitchFamily="34" charset="-120"/>
                         </a:rPr>
                         <a:t>4.25.2 (đối chứng)</a:t>
                       </a:r>
                       <a:endParaRPr lang="en-US" sz="1050" dirty="0">
-                        <a:latin typeface="Calibri" charset="0"/>
-                        <a:ea typeface="Calibri" charset="0"/>
-                        <a:cs typeface="Calibri" charset="0"/>
+                        <a:latin typeface="Arial" charset="0"/>
+                        <a:ea typeface="Arial" charset="0"/>
+                        <a:cs typeface="Arial" charset="0"/>
                       </a:endParaRPr>
                     </a:p>
                   </a:txBody>
@@ -22869,7 +23150,7 @@
               <a:buNone/>
             </a:pPr>
             <a:r>
-              <a:rPr lang="en-US" sz="1200" i="1" dirty="0">
+              <a:rPr lang="en-US" sz="1300" i="1" dirty="0">
                 <a:solidFill>
                   <a:srgbClr val="0E7490"/>
                 </a:solidFill>
@@ -22981,9 +23262,9 @@
                 <a:solidFill>
                   <a:schemeClr val="tx1"/>
                 </a:solidFill>
-                <a:latin typeface="Cambria" pitchFamily="34" charset="0"/>
-                <a:ea typeface="Cambria" pitchFamily="34" charset="-122"/>
-                <a:cs typeface="Cambria" pitchFamily="34" charset="-120"/>
+                <a:latin typeface="Arial" pitchFamily="34" charset="0"/>
+                <a:ea typeface="Arial" pitchFamily="34" charset="-122"/>
+                <a:cs typeface="Arial" pitchFamily="34" charset="-120"/>
               </a:rPr>
               <a:t>Biểu đồ use case tổng quan</a:t>
             </a:r>
@@ -23040,7 +23321,7 @@
               <a:buNone/>
             </a:pPr>
             <a:r>
-              <a:rPr lang="en-US" sz="1250" b="1" dirty="0">
+              <a:rPr lang="en-US" sz="1400" dirty="0">
                 <a:solidFill>
                   <a:srgbClr val="0E7490"/>
                 </a:solidFill>
@@ -23054,7 +23335,7 @@
               <a:buNone/>
             </a:pPr>
             <a:r>
-              <a:rPr lang="en-US" sz="1250" dirty="0">
+              <a:rPr lang="en-US" sz="1400" dirty="0">
                 <a:solidFill>
                   <a:schemeClr val="tx1"/>
                 </a:solidFill>
@@ -23082,7 +23363,7 @@
               <a:buNone/>
             </a:pPr>
             <a:r>
-              <a:rPr lang="en-US" sz="1250" b="1" dirty="0">
+              <a:rPr lang="en-US" sz="1400" dirty="0">
                 <a:solidFill>
                   <a:srgbClr val="0E7490"/>
                 </a:solidFill>
@@ -23096,12 +23377,12 @@
               <a:buNone/>
             </a:pPr>
             <a:r>
-              <a:rPr lang="en-US" sz="1250" dirty="0">
+              <a:rPr lang="en-US" sz="1400" dirty="0">
                 <a:solidFill>
                   <a:schemeClr val="tx1"/>
                 </a:solidFill>
               </a:rPr>
-              <a:t>UC02, 03, 07, 08, 09 «include» UC01 Đăng nhập (JWT)</a:t>
+              <a:t>UC02, UC03, UC07, UC08, UC09 include UC01 Đăng nhập (JWT)</a:t>
             </a:r>
             <a:endParaRPr lang="en-US" sz="1250" dirty="0"/>
           </a:p>
@@ -23110,12 +23391,12 @@
               <a:buNone/>
             </a:pPr>
             <a:r>
-              <a:rPr lang="en-US" sz="1250" dirty="0">
+              <a:rPr lang="en-US" sz="1400" dirty="0">
                 <a:solidFill>
                   <a:schemeClr val="tx1"/>
                 </a:solidFill>
               </a:rPr>
-              <a:t>UC04 «include» UC05; UC06 «extend» UC05 khi điểm ≥ ngưỡng</a:t>
+              <a:t>UC04 include UC05; UC06 extend UC05 khi điểm đạt ngưỡng</a:t>
             </a:r>
             <a:endParaRPr lang="en-US" sz="1250" dirty="0"/>
           </a:p>
@@ -23217,7 +23498,7 @@
     </a:clrScheme>
     <a:fontScheme name="WAF Signal">
       <a:majorFont>
-        <a:latin typeface="Cambria"/>
+        <a:latin typeface="Arial"/>
         <a:ea typeface=""/>
         <a:cs typeface=""/>
         <a:font script="Jpan" typeface="游ゴシック Light"/>
@@ -23269,7 +23550,7 @@
         <a:font script="Tfng" typeface="Ebrima"/>
       </a:majorFont>
       <a:minorFont>
-        <a:latin typeface="Calibri"/>
+        <a:latin typeface="Arial"/>
         <a:ea typeface=""/>
         <a:cs typeface=""/>
         <a:font script="Jpan" typeface="游ゴシック"/>

--- a/docs/report/Slide_WAF_Log_Analyzer.pptx
+++ b/docs/report/Slide_WAF_Log_Analyzer.pptx
@@ -14078,6 +14078,24 @@
             </a:r>
             <a:endParaRPr lang="en-US" sz="1300" dirty="0"/>
           </a:p>
+          <a:p>
+            <a:pPr marL="342900" indent="-342900">
+              <a:spcAft>
+                <a:spcPts val="800"/>
+              </a:spcAft>
+              <a:buSzPct val="100000"/>
+              <a:buChar char="•"/>
+            </a:pPr>
+            <a:r>
+              <a:rPr lang="en-US" sz="1300" dirty="0">
+                <a:solidFill>
+                  <a:srgbClr val="E2E8F0"/>
+                </a:solidFill>
+              </a:rPr>
+              <a:t>Bot xoay IP tránh được tín hiệu hành vi</a:t>
+            </a:r>
+            <a:endParaRPr lang="en-US" sz="1300" dirty="0"/>
+          </a:p>
         </p:txBody>
       </p:sp>
       <p:sp>
@@ -14232,6 +14250,24 @@
                 </a:solidFill>
               </a:rPr>
               <a:t>Phản ứng có phê duyệt (dry-run)</a:t>
+            </a:r>
+            <a:endParaRPr lang="en-US" sz="1300" dirty="0"/>
+          </a:p>
+          <a:p>
+            <a:pPr marL="342900" indent="-342900">
+              <a:spcAft>
+                <a:spcPts val="800"/>
+              </a:spcAft>
+              <a:buSzPct val="100000"/>
+              <a:buChar char="•"/>
+            </a:pPr>
+            <a:r>
+              <a:rPr lang="en-US" sz="1300" dirty="0">
+                <a:solidFill>
+                  <a:srgbClr val="E2E8F0"/>
+                </a:solidFill>
+              </a:rPr>
+              <a:t>Tín hiệu theo domain, gộp cảnh báo</a:t>
             </a:r>
             <a:endParaRPr lang="en-US" sz="1300" dirty="0"/>
           </a:p>
